--- a/Multi-agent4DT.pptx
+++ b/Multi-agent4DT.pptx
@@ -4,10 +4,23 @@
   <p:sldMasterIdLst>
     <p:sldMasterId id="2147483648" r:id="rId1"/>
   </p:sldMasterIdLst>
+  <p:notesMasterIdLst>
+    <p:notesMasterId r:id="rId15"/>
+  </p:notesMasterIdLst>
   <p:sldIdLst>
     <p:sldId id="256" r:id="rId2"/>
-    <p:sldId id="260" r:id="rId3"/>
-    <p:sldId id="258" r:id="rId4"/>
+    <p:sldId id="261" r:id="rId3"/>
+    <p:sldId id="271" r:id="rId4"/>
+    <p:sldId id="262" r:id="rId5"/>
+    <p:sldId id="263" r:id="rId6"/>
+    <p:sldId id="264" r:id="rId7"/>
+    <p:sldId id="265" r:id="rId8"/>
+    <p:sldId id="266" r:id="rId9"/>
+    <p:sldId id="267" r:id="rId10"/>
+    <p:sldId id="269" r:id="rId11"/>
+    <p:sldId id="258" r:id="rId12"/>
+    <p:sldId id="268" r:id="rId13"/>
+    <p:sldId id="270" r:id="rId14"/>
   </p:sldIdLst>
   <p:sldSz cx="12192000" cy="6858000"/>
   <p:notesSz cx="6858000" cy="9144000"/>
@@ -117,7 +130,8 @@
 <file path=ppt/revisionInfo.xml><?xml version="1.0" encoding="utf-8"?>
 <p1510:revInfo xmlns:a="http://schemas.openxmlformats.org/drawingml/2006/main" xmlns:r="http://schemas.openxmlformats.org/officeDocument/2006/relationships" xmlns:p1510="http://schemas.microsoft.com/office/powerpoint/2015/10/main">
   <p1510:revLst>
-    <p1510:client id="{7740E7E7-3638-4A29-A623-5192DB3902F4}" v="1" dt="2025-10-13T21:09:43.225"/>
+    <p1510:client id="{7740E7E7-3638-4A29-A623-5192DB3902F4}" v="306" dt="2025-10-15T07:38:31.785"/>
+    <p1510:client id="{92EC9CF0-2331-C347-A714-F3089E906419}" v="6" dt="2025-10-15T07:16:09.505"/>
   </p1510:revLst>
 </p1510:revInfo>
 </file>
@@ -125,30 +139,1348 @@
 <file path=ppt/changesInfos/changesInfo1.xml><?xml version="1.0" encoding="utf-8"?>
 <pc:chgInfo xmlns:a="http://schemas.openxmlformats.org/drawingml/2006/main" xmlns:r="http://schemas.openxmlformats.org/officeDocument/2006/relationships" xmlns:ac="http://schemas.microsoft.com/office/drawing/2013/main/command" xmlns:pc="http://schemas.microsoft.com/office/powerpoint/2013/main/command">
   <pc:docChgLst>
+    <pc:chgData name="An Ngoc Lam" userId="230f1ae5-ab5b-4ec6-87e3-6ef016cdabf3" providerId="ADAL" clId="{63D110D8-8880-5270-B3D1-A8B78CADEEE9}"/>
+    <pc:docChg chg="custSel addSld modSld">
+      <pc:chgData name="An Ngoc Lam" userId="230f1ae5-ab5b-4ec6-87e3-6ef016cdabf3" providerId="ADAL" clId="{63D110D8-8880-5270-B3D1-A8B78CADEEE9}" dt="2025-10-15T07:16:09.505" v="5" actId="1076"/>
+      <pc:docMkLst>
+        <pc:docMk/>
+      </pc:docMkLst>
+      <pc:sldChg chg="addSp delSp modSp mod">
+        <pc:chgData name="An Ngoc Lam" userId="230f1ae5-ab5b-4ec6-87e3-6ef016cdabf3" providerId="ADAL" clId="{63D110D8-8880-5270-B3D1-A8B78CADEEE9}" dt="2025-10-15T07:16:09.505" v="5" actId="1076"/>
+        <pc:sldMkLst>
+          <pc:docMk/>
+          <pc:sldMk cId="3686194882" sldId="266"/>
+        </pc:sldMkLst>
+        <pc:picChg chg="add mod">
+          <ac:chgData name="An Ngoc Lam" userId="230f1ae5-ab5b-4ec6-87e3-6ef016cdabf3" providerId="ADAL" clId="{63D110D8-8880-5270-B3D1-A8B78CADEEE9}" dt="2025-10-15T07:16:09.505" v="5" actId="1076"/>
+          <ac:picMkLst>
+            <pc:docMk/>
+            <pc:sldMk cId="3686194882" sldId="266"/>
+            <ac:picMk id="3" creationId="{C210DFDC-33B0-BDF6-0FD3-CFEE194F0F97}"/>
+          </ac:picMkLst>
+        </pc:picChg>
+        <pc:picChg chg="del">
+          <ac:chgData name="An Ngoc Lam" userId="230f1ae5-ab5b-4ec6-87e3-6ef016cdabf3" providerId="ADAL" clId="{63D110D8-8880-5270-B3D1-A8B78CADEEE9}" dt="2025-10-15T07:16:04.975" v="1" actId="478"/>
+          <ac:picMkLst>
+            <pc:docMk/>
+            <pc:sldMk cId="3686194882" sldId="266"/>
+            <ac:picMk id="4" creationId="{9B02A64E-C8F6-8591-F845-4F90EB260128}"/>
+          </ac:picMkLst>
+        </pc:picChg>
+      </pc:sldChg>
+      <pc:sldChg chg="modSp mod">
+        <pc:chgData name="An Ngoc Lam" userId="230f1ae5-ab5b-4ec6-87e3-6ef016cdabf3" providerId="ADAL" clId="{63D110D8-8880-5270-B3D1-A8B78CADEEE9}" dt="2025-10-15T07:16:06.153" v="3" actId="27636"/>
+        <pc:sldMkLst>
+          <pc:docMk/>
+          <pc:sldMk cId="1971890539" sldId="270"/>
+        </pc:sldMkLst>
+        <pc:spChg chg="mod">
+          <ac:chgData name="An Ngoc Lam" userId="230f1ae5-ab5b-4ec6-87e3-6ef016cdabf3" providerId="ADAL" clId="{63D110D8-8880-5270-B3D1-A8B78CADEEE9}" dt="2025-10-15T07:16:06.153" v="3" actId="27636"/>
+          <ac:spMkLst>
+            <pc:docMk/>
+            <pc:sldMk cId="1971890539" sldId="270"/>
+            <ac:spMk id="5" creationId="{B2EB0FAA-183A-25B8-6308-084777D95B46}"/>
+          </ac:spMkLst>
+        </pc:spChg>
+      </pc:sldChg>
+      <pc:sldChg chg="add">
+        <pc:chgData name="An Ngoc Lam" userId="230f1ae5-ab5b-4ec6-87e3-6ef016cdabf3" providerId="ADAL" clId="{63D110D8-8880-5270-B3D1-A8B78CADEEE9}" dt="2025-10-15T07:16:02.503" v="0" actId="2890"/>
+        <pc:sldMkLst>
+          <pc:docMk/>
+          <pc:sldMk cId="2461978777" sldId="272"/>
+        </pc:sldMkLst>
+      </pc:sldChg>
+    </pc:docChg>
+  </pc:docChgLst>
+  <pc:docChgLst>
     <pc:chgData name="Adela Nedisan Videsjorden" userId="16205ae5-98c8-4080-bff7-3ead80d46a09" providerId="ADAL" clId="{CB254D50-70D7-42A1-80E6-E8FD860A9ABC}"/>
-    <pc:docChg chg="modSld">
-      <pc:chgData name="Adela Nedisan Videsjorden" userId="16205ae5-98c8-4080-bff7-3ead80d46a09" providerId="ADAL" clId="{CB254D50-70D7-42A1-80E6-E8FD860A9ABC}" dt="2025-10-13T21:09:57.178" v="26" actId="20577"/>
+    <pc:docChg chg="undo custSel addSld delSld modSld sldOrd">
+      <pc:chgData name="Adela Nedisan Videsjorden" userId="16205ae5-98c8-4080-bff7-3ead80d46a09" providerId="ADAL" clId="{CB254D50-70D7-42A1-80E6-E8FD860A9ABC}" dt="2025-10-15T07:38:31.785" v="3863" actId="20577"/>
       <pc:docMkLst>
         <pc:docMk/>
       </pc:docMkLst>
       <pc:sldChg chg="modSp mod">
-        <pc:chgData name="Adela Nedisan Videsjorden" userId="16205ae5-98c8-4080-bff7-3ead80d46a09" providerId="ADAL" clId="{CB254D50-70D7-42A1-80E6-E8FD860A9ABC}" dt="2025-10-13T21:09:57.178" v="26" actId="20577"/>
+        <pc:chgData name="Adela Nedisan Videsjorden" userId="16205ae5-98c8-4080-bff7-3ead80d46a09" providerId="ADAL" clId="{CB254D50-70D7-42A1-80E6-E8FD860A9ABC}" dt="2025-10-15T04:57:28.659" v="3159"/>
+        <pc:sldMkLst>
+          <pc:docMk/>
+          <pc:sldMk cId="2779956770" sldId="256"/>
+        </pc:sldMkLst>
+        <pc:spChg chg="mod">
+          <ac:chgData name="Adela Nedisan Videsjorden" userId="16205ae5-98c8-4080-bff7-3ead80d46a09" providerId="ADAL" clId="{CB254D50-70D7-42A1-80E6-E8FD860A9ABC}" dt="2025-10-15T04:56:40.801" v="3151" actId="1076"/>
+          <ac:spMkLst>
+            <pc:docMk/>
+            <pc:sldMk cId="2779956770" sldId="256"/>
+            <ac:spMk id="2" creationId="{9E61E4DA-7A9F-2760-51E8-52896C64769A}"/>
+          </ac:spMkLst>
+        </pc:spChg>
+        <pc:spChg chg="mod">
+          <ac:chgData name="Adela Nedisan Videsjorden" userId="16205ae5-98c8-4080-bff7-3ead80d46a09" providerId="ADAL" clId="{CB254D50-70D7-42A1-80E6-E8FD860A9ABC}" dt="2025-10-15T04:57:28.659" v="3159"/>
+          <ac:spMkLst>
+            <pc:docMk/>
+            <pc:sldMk cId="2779956770" sldId="256"/>
+            <ac:spMk id="3" creationId="{5B0DE831-F176-DFF0-C2B3-847BC2D71D61}"/>
+          </ac:spMkLst>
+        </pc:spChg>
+      </pc:sldChg>
+      <pc:sldChg chg="modSp mod">
+        <pc:chgData name="Adela Nedisan Videsjorden" userId="16205ae5-98c8-4080-bff7-3ead80d46a09" providerId="ADAL" clId="{CB254D50-70D7-42A1-80E6-E8FD860A9ABC}" dt="2025-10-15T07:37:58.735" v="3845" actId="20577"/>
+        <pc:sldMkLst>
+          <pc:docMk/>
+          <pc:sldMk cId="3373906735" sldId="258"/>
+        </pc:sldMkLst>
+        <pc:spChg chg="mod">
+          <ac:chgData name="Adela Nedisan Videsjorden" userId="16205ae5-98c8-4080-bff7-3ead80d46a09" providerId="ADAL" clId="{CB254D50-70D7-42A1-80E6-E8FD860A9ABC}" dt="2025-10-15T04:57:28.659" v="3159"/>
+          <ac:spMkLst>
+            <pc:docMk/>
+            <pc:sldMk cId="3373906735" sldId="258"/>
+            <ac:spMk id="2" creationId="{A267B84F-B7CE-7767-FBFC-5A904DFDA3E4}"/>
+          </ac:spMkLst>
+        </pc:spChg>
+        <pc:spChg chg="mod">
+          <ac:chgData name="Adela Nedisan Videsjorden" userId="16205ae5-98c8-4080-bff7-3ead80d46a09" providerId="ADAL" clId="{CB254D50-70D7-42A1-80E6-E8FD860A9ABC}" dt="2025-10-15T07:37:58.735" v="3845" actId="20577"/>
+          <ac:spMkLst>
+            <pc:docMk/>
+            <pc:sldMk cId="3373906735" sldId="258"/>
+            <ac:spMk id="3" creationId="{775A1F99-AD78-BDD4-0893-8EDA4298F3D8}"/>
+          </ac:spMkLst>
+        </pc:spChg>
+      </pc:sldChg>
+      <pc:sldChg chg="delSp modSp del mod">
+        <pc:chgData name="Adela Nedisan Videsjorden" userId="16205ae5-98c8-4080-bff7-3ead80d46a09" providerId="ADAL" clId="{CB254D50-70D7-42A1-80E6-E8FD860A9ABC}" dt="2025-10-15T07:38:17.084" v="3846" actId="2696"/>
         <pc:sldMkLst>
           <pc:docMk/>
           <pc:sldMk cId="3559493706" sldId="260"/>
         </pc:sldMkLst>
         <pc:spChg chg="mod">
-          <ac:chgData name="Adela Nedisan Videsjorden" userId="16205ae5-98c8-4080-bff7-3ead80d46a09" providerId="ADAL" clId="{CB254D50-70D7-42A1-80E6-E8FD860A9ABC}" dt="2025-10-13T21:09:57.178" v="26" actId="20577"/>
+          <ac:chgData name="Adela Nedisan Videsjorden" userId="16205ae5-98c8-4080-bff7-3ead80d46a09" providerId="ADAL" clId="{CB254D50-70D7-42A1-80E6-E8FD860A9ABC}" dt="2025-10-15T04:57:28.659" v="3159"/>
+          <ac:spMkLst>
+            <pc:docMk/>
+            <pc:sldMk cId="3559493706" sldId="260"/>
+            <ac:spMk id="2" creationId="{806DFB20-C5CB-19FF-B167-BF48384EFDFC}"/>
+          </ac:spMkLst>
+        </pc:spChg>
+        <pc:spChg chg="mod">
+          <ac:chgData name="Adela Nedisan Videsjorden" userId="16205ae5-98c8-4080-bff7-3ead80d46a09" providerId="ADAL" clId="{CB254D50-70D7-42A1-80E6-E8FD860A9ABC}" dt="2025-10-15T07:36:04.738" v="3788" actId="20577"/>
           <ac:spMkLst>
             <pc:docMk/>
             <pc:sldMk cId="3559493706" sldId="260"/>
             <ac:spMk id="3" creationId="{73311C9B-7B82-50BC-9C6E-6B334EFAF3CD}"/>
           </ac:spMkLst>
         </pc:spChg>
+        <pc:spChg chg="del">
+          <ac:chgData name="Adela Nedisan Videsjorden" userId="16205ae5-98c8-4080-bff7-3ead80d46a09" providerId="ADAL" clId="{CB254D50-70D7-42A1-80E6-E8FD860A9ABC}" dt="2025-10-15T04:07:07.275" v="28" actId="478"/>
+          <ac:spMkLst>
+            <pc:docMk/>
+            <pc:sldMk cId="3559493706" sldId="260"/>
+            <ac:spMk id="4" creationId="{73831B58-1F0D-8B79-F8DC-55647F14F10D}"/>
+          </ac:spMkLst>
+        </pc:spChg>
+        <pc:spChg chg="del">
+          <ac:chgData name="Adela Nedisan Videsjorden" userId="16205ae5-98c8-4080-bff7-3ead80d46a09" providerId="ADAL" clId="{CB254D50-70D7-42A1-80E6-E8FD860A9ABC}" dt="2025-10-15T04:07:05.765" v="27" actId="478"/>
+          <ac:spMkLst>
+            <pc:docMk/>
+            <pc:sldMk cId="3559493706" sldId="260"/>
+            <ac:spMk id="5" creationId="{FDFFCE57-7B5B-F6DC-4463-5C377AF1B187}"/>
+          </ac:spMkLst>
+        </pc:spChg>
+      </pc:sldChg>
+      <pc:sldChg chg="modSp add mod">
+        <pc:chgData name="Adela Nedisan Videsjorden" userId="16205ae5-98c8-4080-bff7-3ead80d46a09" providerId="ADAL" clId="{CB254D50-70D7-42A1-80E6-E8FD860A9ABC}" dt="2025-10-15T07:38:31.785" v="3863" actId="20577"/>
+        <pc:sldMkLst>
+          <pc:docMk/>
+          <pc:sldMk cId="1230631313" sldId="261"/>
+        </pc:sldMkLst>
+        <pc:spChg chg="mod">
+          <ac:chgData name="Adela Nedisan Videsjorden" userId="16205ae5-98c8-4080-bff7-3ead80d46a09" providerId="ADAL" clId="{CB254D50-70D7-42A1-80E6-E8FD860A9ABC}" dt="2025-10-15T07:38:27.457" v="3861" actId="20577"/>
+          <ac:spMkLst>
+            <pc:docMk/>
+            <pc:sldMk cId="1230631313" sldId="261"/>
+            <ac:spMk id="2" creationId="{34B97BB2-595D-D812-47CB-ACA0B271F760}"/>
+          </ac:spMkLst>
+        </pc:spChg>
+        <pc:spChg chg="mod">
+          <ac:chgData name="Adela Nedisan Videsjorden" userId="16205ae5-98c8-4080-bff7-3ead80d46a09" providerId="ADAL" clId="{CB254D50-70D7-42A1-80E6-E8FD860A9ABC}" dt="2025-10-15T07:38:31.785" v="3863" actId="20577"/>
+          <ac:spMkLst>
+            <pc:docMk/>
+            <pc:sldMk cId="1230631313" sldId="261"/>
+            <ac:spMk id="3" creationId="{7B56B4C6-9322-EC07-AEB4-08E501F5A8DF}"/>
+          </ac:spMkLst>
+        </pc:spChg>
+      </pc:sldChg>
+      <pc:sldChg chg="addSp delSp modSp add mod">
+        <pc:chgData name="Adela Nedisan Videsjorden" userId="16205ae5-98c8-4080-bff7-3ead80d46a09" providerId="ADAL" clId="{CB254D50-70D7-42A1-80E6-E8FD860A9ABC}" dt="2025-10-15T07:36:10.168" v="3798" actId="20577"/>
+        <pc:sldMkLst>
+          <pc:docMk/>
+          <pc:sldMk cId="3519001183" sldId="262"/>
+        </pc:sldMkLst>
+        <pc:spChg chg="mod">
+          <ac:chgData name="Adela Nedisan Videsjorden" userId="16205ae5-98c8-4080-bff7-3ead80d46a09" providerId="ADAL" clId="{CB254D50-70D7-42A1-80E6-E8FD860A9ABC}" dt="2025-10-15T07:36:10.168" v="3798" actId="20577"/>
+          <ac:spMkLst>
+            <pc:docMk/>
+            <pc:sldMk cId="3519001183" sldId="262"/>
+            <ac:spMk id="2" creationId="{99B3045E-1FDC-3C69-8C64-9AC17A8FF679}"/>
+          </ac:spMkLst>
+        </pc:spChg>
+        <pc:spChg chg="del">
+          <ac:chgData name="Adela Nedisan Videsjorden" userId="16205ae5-98c8-4080-bff7-3ead80d46a09" providerId="ADAL" clId="{CB254D50-70D7-42A1-80E6-E8FD860A9ABC}" dt="2025-10-15T04:10:13.433" v="148" actId="478"/>
+          <ac:spMkLst>
+            <pc:docMk/>
+            <pc:sldMk cId="3519001183" sldId="262"/>
+            <ac:spMk id="3" creationId="{C3990E88-0CA6-3C22-1B6E-EB0F7C6D45C2}"/>
+          </ac:spMkLst>
+        </pc:spChg>
+        <pc:spChg chg="add mod">
+          <ac:chgData name="Adela Nedisan Videsjorden" userId="16205ae5-98c8-4080-bff7-3ead80d46a09" providerId="ADAL" clId="{CB254D50-70D7-42A1-80E6-E8FD860A9ABC}" dt="2025-10-15T04:12:55.495" v="219" actId="115"/>
+          <ac:spMkLst>
+            <pc:docMk/>
+            <pc:sldMk cId="3519001183" sldId="262"/>
+            <ac:spMk id="5" creationId="{C4313049-B6AD-97F8-D483-FE216CC3F405}"/>
+          </ac:spMkLst>
+        </pc:spChg>
+      </pc:sldChg>
+      <pc:sldChg chg="addSp delSp modSp add mod">
+        <pc:chgData name="Adela Nedisan Videsjorden" userId="16205ae5-98c8-4080-bff7-3ead80d46a09" providerId="ADAL" clId="{CB254D50-70D7-42A1-80E6-E8FD860A9ABC}" dt="2025-10-15T07:36:14.627" v="3808" actId="20577"/>
+        <pc:sldMkLst>
+          <pc:docMk/>
+          <pc:sldMk cId="830137114" sldId="263"/>
+        </pc:sldMkLst>
+        <pc:spChg chg="mod">
+          <ac:chgData name="Adela Nedisan Videsjorden" userId="16205ae5-98c8-4080-bff7-3ead80d46a09" providerId="ADAL" clId="{CB254D50-70D7-42A1-80E6-E8FD860A9ABC}" dt="2025-10-15T07:36:14.627" v="3808" actId="20577"/>
+          <ac:spMkLst>
+            <pc:docMk/>
+            <pc:sldMk cId="830137114" sldId="263"/>
+            <ac:spMk id="2" creationId="{296D1E1B-1F80-7416-68CB-2EDE83CF9448}"/>
+          </ac:spMkLst>
+        </pc:spChg>
+        <pc:spChg chg="add del mod">
+          <ac:chgData name="Adela Nedisan Videsjorden" userId="16205ae5-98c8-4080-bff7-3ead80d46a09" providerId="ADAL" clId="{CB254D50-70D7-42A1-80E6-E8FD860A9ABC}" dt="2025-10-15T04:13:25.735" v="223" actId="478"/>
+          <ac:spMkLst>
+            <pc:docMk/>
+            <pc:sldMk cId="830137114" sldId="263"/>
+            <ac:spMk id="4" creationId="{28879449-EAE1-561E-F5EE-87ECEA12E412}"/>
+          </ac:spMkLst>
+        </pc:spChg>
+        <pc:spChg chg="del">
+          <ac:chgData name="Adela Nedisan Videsjorden" userId="16205ae5-98c8-4080-bff7-3ead80d46a09" providerId="ADAL" clId="{CB254D50-70D7-42A1-80E6-E8FD860A9ABC}" dt="2025-10-15T04:13:10.321" v="221" actId="478"/>
+          <ac:spMkLst>
+            <pc:docMk/>
+            <pc:sldMk cId="830137114" sldId="263"/>
+            <ac:spMk id="5" creationId="{15FF1168-A687-724B-1411-5E4CA4BEDF87}"/>
+          </ac:spMkLst>
+        </pc:spChg>
+        <pc:spChg chg="add del mod">
+          <ac:chgData name="Adela Nedisan Videsjorden" userId="16205ae5-98c8-4080-bff7-3ead80d46a09" providerId="ADAL" clId="{CB254D50-70D7-42A1-80E6-E8FD860A9ABC}" dt="2025-10-15T04:13:27.750" v="224" actId="478"/>
+          <ac:spMkLst>
+            <pc:docMk/>
+            <pc:sldMk cId="830137114" sldId="263"/>
+            <ac:spMk id="7" creationId="{05BD8801-D2F6-2961-71BD-133FF5655662}"/>
+          </ac:spMkLst>
+        </pc:spChg>
+        <pc:spChg chg="add mod">
+          <ac:chgData name="Adela Nedisan Videsjorden" userId="16205ae5-98c8-4080-bff7-3ead80d46a09" providerId="ADAL" clId="{CB254D50-70D7-42A1-80E6-E8FD860A9ABC}" dt="2025-10-15T04:16:06.828" v="360" actId="1076"/>
+          <ac:spMkLst>
+            <pc:docMk/>
+            <pc:sldMk cId="830137114" sldId="263"/>
+            <ac:spMk id="12" creationId="{F346D95D-CACC-9C14-7935-13C2B7C165BD}"/>
+          </ac:spMkLst>
+        </pc:spChg>
+        <pc:spChg chg="add mod">
+          <ac:chgData name="Adela Nedisan Videsjorden" userId="16205ae5-98c8-4080-bff7-3ead80d46a09" providerId="ADAL" clId="{CB254D50-70D7-42A1-80E6-E8FD860A9ABC}" dt="2025-10-15T04:16:11.679" v="361" actId="1076"/>
+          <ac:spMkLst>
+            <pc:docMk/>
+            <pc:sldMk cId="830137114" sldId="263"/>
+            <ac:spMk id="13" creationId="{BB78C7D5-B9AD-3F5A-65C0-67E2F566BE34}"/>
+          </ac:spMkLst>
+        </pc:spChg>
+        <pc:spChg chg="add del mod">
+          <ac:chgData name="Adela Nedisan Videsjorden" userId="16205ae5-98c8-4080-bff7-3ead80d46a09" providerId="ADAL" clId="{CB254D50-70D7-42A1-80E6-E8FD860A9ABC}" dt="2025-10-15T04:16:49.828" v="395" actId="478"/>
+          <ac:spMkLst>
+            <pc:docMk/>
+            <pc:sldMk cId="830137114" sldId="263"/>
+            <ac:spMk id="14" creationId="{D78955C1-B068-6352-B879-011DFB7140A3}"/>
+          </ac:spMkLst>
+        </pc:spChg>
+        <pc:picChg chg="add mod">
+          <ac:chgData name="Adela Nedisan Videsjorden" userId="16205ae5-98c8-4080-bff7-3ead80d46a09" providerId="ADAL" clId="{CB254D50-70D7-42A1-80E6-E8FD860A9ABC}" dt="2025-10-15T04:14:08.711" v="231" actId="1076"/>
+          <ac:picMkLst>
+            <pc:docMk/>
+            <pc:sldMk cId="830137114" sldId="263"/>
+            <ac:picMk id="9" creationId="{67F6D59F-E01D-2244-7153-3115DB82C644}"/>
+          </ac:picMkLst>
+        </pc:picChg>
+        <pc:picChg chg="add mod">
+          <ac:chgData name="Adela Nedisan Videsjorden" userId="16205ae5-98c8-4080-bff7-3ead80d46a09" providerId="ADAL" clId="{CB254D50-70D7-42A1-80E6-E8FD860A9ABC}" dt="2025-10-15T04:14:19.877" v="236" actId="1076"/>
+          <ac:picMkLst>
+            <pc:docMk/>
+            <pc:sldMk cId="830137114" sldId="263"/>
+            <ac:picMk id="11" creationId="{40B7E609-1D4C-39B8-B961-2361B80B1A03}"/>
+          </ac:picMkLst>
+        </pc:picChg>
+      </pc:sldChg>
+      <pc:sldChg chg="modSp add mod">
+        <pc:chgData name="Adela Nedisan Videsjorden" userId="16205ae5-98c8-4080-bff7-3ead80d46a09" providerId="ADAL" clId="{CB254D50-70D7-42A1-80E6-E8FD860A9ABC}" dt="2025-10-15T07:36:19.316" v="3818" actId="20577"/>
+        <pc:sldMkLst>
+          <pc:docMk/>
+          <pc:sldMk cId="2381808421" sldId="264"/>
+        </pc:sldMkLst>
+        <pc:spChg chg="mod">
+          <ac:chgData name="Adela Nedisan Videsjorden" userId="16205ae5-98c8-4080-bff7-3ead80d46a09" providerId="ADAL" clId="{CB254D50-70D7-42A1-80E6-E8FD860A9ABC}" dt="2025-10-15T07:36:19.316" v="3818" actId="20577"/>
+          <ac:spMkLst>
+            <pc:docMk/>
+            <pc:sldMk cId="2381808421" sldId="264"/>
+            <ac:spMk id="2" creationId="{58216FC4-1449-73CD-DA31-D8EE0A638F04}"/>
+          </ac:spMkLst>
+        </pc:spChg>
+        <pc:spChg chg="mod">
+          <ac:chgData name="Adela Nedisan Videsjorden" userId="16205ae5-98c8-4080-bff7-3ead80d46a09" providerId="ADAL" clId="{CB254D50-70D7-42A1-80E6-E8FD860A9ABC}" dt="2025-10-15T04:17:41.177" v="408" actId="1076"/>
+          <ac:spMkLst>
+            <pc:docMk/>
+            <pc:sldMk cId="2381808421" sldId="264"/>
+            <ac:spMk id="14" creationId="{E958EECE-C9AE-614C-C5BA-520674EB46AC}"/>
+          </ac:spMkLst>
+        </pc:spChg>
+      </pc:sldChg>
+      <pc:sldChg chg="addSp delSp modSp add mod">
+        <pc:chgData name="Adela Nedisan Videsjorden" userId="16205ae5-98c8-4080-bff7-3ead80d46a09" providerId="ADAL" clId="{CB254D50-70D7-42A1-80E6-E8FD860A9ABC}" dt="2025-10-15T04:57:28.659" v="3159"/>
+        <pc:sldMkLst>
+          <pc:docMk/>
+          <pc:sldMk cId="3435594461" sldId="265"/>
+        </pc:sldMkLst>
+        <pc:spChg chg="mod">
+          <ac:chgData name="Adela Nedisan Videsjorden" userId="16205ae5-98c8-4080-bff7-3ead80d46a09" providerId="ADAL" clId="{CB254D50-70D7-42A1-80E6-E8FD860A9ABC}" dt="2025-10-15T04:57:28.659" v="3159"/>
+          <ac:spMkLst>
+            <pc:docMk/>
+            <pc:sldMk cId="3435594461" sldId="265"/>
+            <ac:spMk id="2" creationId="{99B00596-AECD-E80B-AE13-9F87AE95412F}"/>
+          </ac:spMkLst>
+        </pc:spChg>
+        <pc:spChg chg="add mod">
+          <ac:chgData name="Adela Nedisan Videsjorden" userId="16205ae5-98c8-4080-bff7-3ead80d46a09" providerId="ADAL" clId="{CB254D50-70D7-42A1-80E6-E8FD860A9ABC}" dt="2025-10-15T04:21:04.836" v="766" actId="20577"/>
+          <ac:spMkLst>
+            <pc:docMk/>
+            <pc:sldMk cId="3435594461" sldId="265"/>
+            <ac:spMk id="3" creationId="{DD688EE6-22E0-701D-55EB-DF2C06802881}"/>
+          </ac:spMkLst>
+        </pc:spChg>
+        <pc:spChg chg="del">
+          <ac:chgData name="Adela Nedisan Videsjorden" userId="16205ae5-98c8-4080-bff7-3ead80d46a09" providerId="ADAL" clId="{CB254D50-70D7-42A1-80E6-E8FD860A9ABC}" dt="2025-10-15T04:17:57.949" v="412" actId="478"/>
+          <ac:spMkLst>
+            <pc:docMk/>
+            <pc:sldMk cId="3435594461" sldId="265"/>
+            <ac:spMk id="12" creationId="{3C802847-816F-745B-9621-CEDFBEBFC8B0}"/>
+          </ac:spMkLst>
+        </pc:spChg>
+        <pc:spChg chg="del">
+          <ac:chgData name="Adela Nedisan Videsjorden" userId="16205ae5-98c8-4080-bff7-3ead80d46a09" providerId="ADAL" clId="{CB254D50-70D7-42A1-80E6-E8FD860A9ABC}" dt="2025-10-15T04:18:02.230" v="413" actId="478"/>
+          <ac:spMkLst>
+            <pc:docMk/>
+            <pc:sldMk cId="3435594461" sldId="265"/>
+            <ac:spMk id="13" creationId="{185288F0-8F3C-2ADC-8772-634C0C079D28}"/>
+          </ac:spMkLst>
+        </pc:spChg>
+        <pc:spChg chg="del">
+          <ac:chgData name="Adela Nedisan Videsjorden" userId="16205ae5-98c8-4080-bff7-3ead80d46a09" providerId="ADAL" clId="{CB254D50-70D7-42A1-80E6-E8FD860A9ABC}" dt="2025-10-15T04:17:55.600" v="411" actId="478"/>
+          <ac:spMkLst>
+            <pc:docMk/>
+            <pc:sldMk cId="3435594461" sldId="265"/>
+            <ac:spMk id="14" creationId="{B9886991-3648-526C-29BE-00FB880D8AF1}"/>
+          </ac:spMkLst>
+        </pc:spChg>
+        <pc:picChg chg="del">
+          <ac:chgData name="Adela Nedisan Videsjorden" userId="16205ae5-98c8-4080-bff7-3ead80d46a09" providerId="ADAL" clId="{CB254D50-70D7-42A1-80E6-E8FD860A9ABC}" dt="2025-10-15T04:17:51.526" v="409" actId="478"/>
+          <ac:picMkLst>
+            <pc:docMk/>
+            <pc:sldMk cId="3435594461" sldId="265"/>
+            <ac:picMk id="9" creationId="{BBD01997-A34F-D67E-04B2-111B97B7755C}"/>
+          </ac:picMkLst>
+        </pc:picChg>
+        <pc:picChg chg="del">
+          <ac:chgData name="Adela Nedisan Videsjorden" userId="16205ae5-98c8-4080-bff7-3ead80d46a09" providerId="ADAL" clId="{CB254D50-70D7-42A1-80E6-E8FD860A9ABC}" dt="2025-10-15T04:17:52.735" v="410" actId="478"/>
+          <ac:picMkLst>
+            <pc:docMk/>
+            <pc:sldMk cId="3435594461" sldId="265"/>
+            <ac:picMk id="11" creationId="{80AA9BDC-914C-751C-3051-75CB785AF06F}"/>
+          </ac:picMkLst>
+        </pc:picChg>
+      </pc:sldChg>
+      <pc:sldChg chg="addSp delSp modSp add mod">
+        <pc:chgData name="Adela Nedisan Videsjorden" userId="16205ae5-98c8-4080-bff7-3ead80d46a09" providerId="ADAL" clId="{CB254D50-70D7-42A1-80E6-E8FD860A9ABC}" dt="2025-10-15T07:14:18.845" v="3686" actId="1076"/>
+        <pc:sldMkLst>
+          <pc:docMk/>
+          <pc:sldMk cId="3686194882" sldId="266"/>
+        </pc:sldMkLst>
+        <pc:spChg chg="mod">
+          <ac:chgData name="Adela Nedisan Videsjorden" userId="16205ae5-98c8-4080-bff7-3ead80d46a09" providerId="ADAL" clId="{CB254D50-70D7-42A1-80E6-E8FD860A9ABC}" dt="2025-10-15T04:34:30.498" v="918" actId="1076"/>
+          <ac:spMkLst>
+            <pc:docMk/>
+            <pc:sldMk cId="3686194882" sldId="266"/>
+            <ac:spMk id="2" creationId="{288F3ABB-8E15-D44C-A7AA-77C0C3B27628}"/>
+          </ac:spMkLst>
+        </pc:spChg>
+        <pc:spChg chg="del mod">
+          <ac:chgData name="Adela Nedisan Videsjorden" userId="16205ae5-98c8-4080-bff7-3ead80d46a09" providerId="ADAL" clId="{CB254D50-70D7-42A1-80E6-E8FD860A9ABC}" dt="2025-10-15T04:22:06.376" v="785"/>
+          <ac:spMkLst>
+            <pc:docMk/>
+            <pc:sldMk cId="3686194882" sldId="266"/>
+            <ac:spMk id="3" creationId="{D4F7E93D-BF0F-C2D9-5720-841B45B844E6}"/>
+          </ac:spMkLst>
+        </pc:spChg>
+        <pc:spChg chg="add del mod">
+          <ac:chgData name="Adela Nedisan Videsjorden" userId="16205ae5-98c8-4080-bff7-3ead80d46a09" providerId="ADAL" clId="{CB254D50-70D7-42A1-80E6-E8FD860A9ABC}" dt="2025-10-15T04:34:51.826" v="921" actId="478"/>
+          <ac:spMkLst>
+            <pc:docMk/>
+            <pc:sldMk cId="3686194882" sldId="266"/>
+            <ac:spMk id="4" creationId="{8307DB8F-E0EC-FCC2-F1D6-64DD2294D8DA}"/>
+          </ac:spMkLst>
+        </pc:spChg>
+        <pc:spChg chg="add mod">
+          <ac:chgData name="Adela Nedisan Videsjorden" userId="16205ae5-98c8-4080-bff7-3ead80d46a09" providerId="ADAL" clId="{CB254D50-70D7-42A1-80E6-E8FD860A9ABC}" dt="2025-10-15T04:29:51.113" v="857" actId="20577"/>
+          <ac:spMkLst>
+            <pc:docMk/>
+            <pc:sldMk cId="3686194882" sldId="266"/>
+            <ac:spMk id="5" creationId="{69396315-6ACA-B8DE-6C04-97E290E0CCDF}"/>
+          </ac:spMkLst>
+        </pc:spChg>
+        <pc:spChg chg="add mod">
+          <ac:chgData name="Adela Nedisan Videsjorden" userId="16205ae5-98c8-4080-bff7-3ead80d46a09" providerId="ADAL" clId="{CB254D50-70D7-42A1-80E6-E8FD860A9ABC}" dt="2025-10-15T04:29:45.941" v="856"/>
+          <ac:spMkLst>
+            <pc:docMk/>
+            <pc:sldMk cId="3686194882" sldId="266"/>
+            <ac:spMk id="6" creationId="{7DA1281F-3CCB-5382-7EE1-C583E9276A9E}"/>
+          </ac:spMkLst>
+        </pc:spChg>
+        <pc:spChg chg="add del mod">
+          <ac:chgData name="Adela Nedisan Videsjorden" userId="16205ae5-98c8-4080-bff7-3ead80d46a09" providerId="ADAL" clId="{CB254D50-70D7-42A1-80E6-E8FD860A9ABC}" dt="2025-10-15T04:34:55.410" v="923" actId="478"/>
+          <ac:spMkLst>
+            <pc:docMk/>
+            <pc:sldMk cId="3686194882" sldId="266"/>
+            <ac:spMk id="8" creationId="{48E07507-A08E-1CFE-038A-E7C0516ED04F}"/>
+          </ac:spMkLst>
+        </pc:spChg>
+        <pc:picChg chg="add mod">
+          <ac:chgData name="Adela Nedisan Videsjorden" userId="16205ae5-98c8-4080-bff7-3ead80d46a09" providerId="ADAL" clId="{CB254D50-70D7-42A1-80E6-E8FD860A9ABC}" dt="2025-10-15T07:14:18.845" v="3686" actId="1076"/>
+          <ac:picMkLst>
+            <pc:docMk/>
+            <pc:sldMk cId="3686194882" sldId="266"/>
+            <ac:picMk id="4" creationId="{9B02A64E-C8F6-8591-F845-4F90EB260128}"/>
+          </ac:picMkLst>
+        </pc:picChg>
+      </pc:sldChg>
+      <pc:sldChg chg="add">
+        <pc:chgData name="Adela Nedisan Videsjorden" userId="16205ae5-98c8-4080-bff7-3ead80d46a09" providerId="ADAL" clId="{CB254D50-70D7-42A1-80E6-E8FD860A9ABC}" dt="2025-10-15T04:34:45.294" v="920" actId="2890"/>
+        <pc:sldMkLst>
+          <pc:docMk/>
+          <pc:sldMk cId="3451000195" sldId="267"/>
+        </pc:sldMkLst>
+      </pc:sldChg>
+      <pc:sldChg chg="modSp add mod">
+        <pc:chgData name="Adela Nedisan Videsjorden" userId="16205ae5-98c8-4080-bff7-3ead80d46a09" providerId="ADAL" clId="{CB254D50-70D7-42A1-80E6-E8FD860A9ABC}" dt="2025-10-15T07:19:04.562" v="3722" actId="20577"/>
+        <pc:sldMkLst>
+          <pc:docMk/>
+          <pc:sldMk cId="1198931030" sldId="268"/>
+        </pc:sldMkLst>
+        <pc:spChg chg="mod">
+          <ac:chgData name="Adela Nedisan Videsjorden" userId="16205ae5-98c8-4080-bff7-3ead80d46a09" providerId="ADAL" clId="{CB254D50-70D7-42A1-80E6-E8FD860A9ABC}" dt="2025-10-15T04:57:28.659" v="3159"/>
+          <ac:spMkLst>
+            <pc:docMk/>
+            <pc:sldMk cId="1198931030" sldId="268"/>
+            <ac:spMk id="2" creationId="{33068F23-E808-B8CF-CD40-6BC1D975311B}"/>
+          </ac:spMkLst>
+        </pc:spChg>
+        <pc:spChg chg="mod">
+          <ac:chgData name="Adela Nedisan Videsjorden" userId="16205ae5-98c8-4080-bff7-3ead80d46a09" providerId="ADAL" clId="{CB254D50-70D7-42A1-80E6-E8FD860A9ABC}" dt="2025-10-15T07:19:04.562" v="3722" actId="20577"/>
+          <ac:spMkLst>
+            <pc:docMk/>
+            <pc:sldMk cId="1198931030" sldId="268"/>
+            <ac:spMk id="3" creationId="{70FE6DB0-E23E-7805-391A-66293396DD31}"/>
+          </ac:spMkLst>
+        </pc:spChg>
+      </pc:sldChg>
+      <pc:sldChg chg="modSp add mod ord">
+        <pc:chgData name="Adela Nedisan Videsjorden" userId="16205ae5-98c8-4080-bff7-3ead80d46a09" providerId="ADAL" clId="{CB254D50-70D7-42A1-80E6-E8FD860A9ABC}" dt="2025-10-15T05:05:07.304" v="3575" actId="20577"/>
+        <pc:sldMkLst>
+          <pc:docMk/>
+          <pc:sldMk cId="1762233370" sldId="269"/>
+        </pc:sldMkLst>
+        <pc:spChg chg="mod">
+          <ac:chgData name="Adela Nedisan Videsjorden" userId="16205ae5-98c8-4080-bff7-3ead80d46a09" providerId="ADAL" clId="{CB254D50-70D7-42A1-80E6-E8FD860A9ABC}" dt="2025-10-15T04:57:28.659" v="3159"/>
+          <ac:spMkLst>
+            <pc:docMk/>
+            <pc:sldMk cId="1762233370" sldId="269"/>
+            <ac:spMk id="2" creationId="{E6D61FA3-723B-AF54-D5E2-3AFF95C25FC2}"/>
+          </ac:spMkLst>
+        </pc:spChg>
+        <pc:spChg chg="mod">
+          <ac:chgData name="Adela Nedisan Videsjorden" userId="16205ae5-98c8-4080-bff7-3ead80d46a09" providerId="ADAL" clId="{CB254D50-70D7-42A1-80E6-E8FD860A9ABC}" dt="2025-10-15T05:05:07.304" v="3575" actId="20577"/>
+          <ac:spMkLst>
+            <pc:docMk/>
+            <pc:sldMk cId="1762233370" sldId="269"/>
+            <ac:spMk id="3" creationId="{35904B02-32A4-530D-9F47-B2F2A1FC62B0}"/>
+          </ac:spMkLst>
+        </pc:spChg>
+      </pc:sldChg>
+      <pc:sldChg chg="addSp delSp modSp add mod">
+        <pc:chgData name="Adela Nedisan Videsjorden" userId="16205ae5-98c8-4080-bff7-3ead80d46a09" providerId="ADAL" clId="{CB254D50-70D7-42A1-80E6-E8FD860A9ABC}" dt="2025-10-15T05:04:55.026" v="3572" actId="27636"/>
+        <pc:sldMkLst>
+          <pc:docMk/>
+          <pc:sldMk cId="1971890539" sldId="270"/>
+        </pc:sldMkLst>
+        <pc:spChg chg="del mod">
+          <ac:chgData name="Adela Nedisan Videsjorden" userId="16205ae5-98c8-4080-bff7-3ead80d46a09" providerId="ADAL" clId="{CB254D50-70D7-42A1-80E6-E8FD860A9ABC}" dt="2025-10-15T05:03:59.160" v="3536" actId="478"/>
+          <ac:spMkLst>
+            <pc:docMk/>
+            <pc:sldMk cId="1971890539" sldId="270"/>
+            <ac:spMk id="2" creationId="{0FDE77A8-D47A-5D8A-2B43-29EB0C077F7C}"/>
+          </ac:spMkLst>
+        </pc:spChg>
+        <pc:spChg chg="del mod">
+          <ac:chgData name="Adela Nedisan Videsjorden" userId="16205ae5-98c8-4080-bff7-3ead80d46a09" providerId="ADAL" clId="{CB254D50-70D7-42A1-80E6-E8FD860A9ABC}" dt="2025-10-15T05:02:00.877" v="3351" actId="478"/>
+          <ac:spMkLst>
+            <pc:docMk/>
+            <pc:sldMk cId="1971890539" sldId="270"/>
+            <ac:spMk id="3" creationId="{71D19E15-6C08-1C41-A30E-3632210F786A}"/>
+          </ac:spMkLst>
+        </pc:spChg>
+        <pc:spChg chg="add mod">
+          <ac:chgData name="Adela Nedisan Videsjorden" userId="16205ae5-98c8-4080-bff7-3ead80d46a09" providerId="ADAL" clId="{CB254D50-70D7-42A1-80E6-E8FD860A9ABC}" dt="2025-10-15T05:04:55.026" v="3572" actId="27636"/>
+          <ac:spMkLst>
+            <pc:docMk/>
+            <pc:sldMk cId="1971890539" sldId="270"/>
+            <ac:spMk id="5" creationId="{B2EB0FAA-183A-25B8-6308-084777D95B46}"/>
+          </ac:spMkLst>
+        </pc:spChg>
+      </pc:sldChg>
+      <pc:sldChg chg="addSp delSp modSp add mod setBg">
+        <pc:chgData name="Adela Nedisan Videsjorden" userId="16205ae5-98c8-4080-bff7-3ead80d46a09" providerId="ADAL" clId="{CB254D50-70D7-42A1-80E6-E8FD860A9ABC}" dt="2025-10-15T07:35:01.064" v="3776" actId="113"/>
+        <pc:sldMkLst>
+          <pc:docMk/>
+          <pc:sldMk cId="3062124621" sldId="271"/>
+        </pc:sldMkLst>
+        <pc:spChg chg="mod">
+          <ac:chgData name="Adela Nedisan Videsjorden" userId="16205ae5-98c8-4080-bff7-3ead80d46a09" providerId="ADAL" clId="{CB254D50-70D7-42A1-80E6-E8FD860A9ABC}" dt="2025-10-15T07:34:54.377" v="3767" actId="113"/>
+          <ac:spMkLst>
+            <pc:docMk/>
+            <pc:sldMk cId="3062124621" sldId="271"/>
+            <ac:spMk id="2" creationId="{FEF21048-E361-75A2-F9E8-8BDB25F02485}"/>
+          </ac:spMkLst>
+        </pc:spChg>
+        <pc:spChg chg="del">
+          <ac:chgData name="Adela Nedisan Videsjorden" userId="16205ae5-98c8-4080-bff7-3ead80d46a09" providerId="ADAL" clId="{CB254D50-70D7-42A1-80E6-E8FD860A9ABC}" dt="2025-10-15T07:06:51.628" v="3613" actId="478"/>
+          <ac:spMkLst>
+            <pc:docMk/>
+            <pc:sldMk cId="3062124621" sldId="271"/>
+            <ac:spMk id="3" creationId="{1FC6D0A6-7C32-60B6-2AF0-0A1FA7BF3994}"/>
+          </ac:spMkLst>
+        </pc:spChg>
+        <pc:spChg chg="add del mod">
+          <ac:chgData name="Adela Nedisan Videsjorden" userId="16205ae5-98c8-4080-bff7-3ead80d46a09" providerId="ADAL" clId="{CB254D50-70D7-42A1-80E6-E8FD860A9ABC}" dt="2025-10-15T07:07:06.090" v="3614"/>
+          <ac:spMkLst>
+            <pc:docMk/>
+            <pc:sldMk cId="3062124621" sldId="271"/>
+            <ac:spMk id="5" creationId="{8F1E9F0F-BADF-08C0-26B7-F8729744BF63}"/>
+          </ac:spMkLst>
+        </pc:spChg>
+        <pc:spChg chg="add mod">
+          <ac:chgData name="Adela Nedisan Videsjorden" userId="16205ae5-98c8-4080-bff7-3ead80d46a09" providerId="ADAL" clId="{CB254D50-70D7-42A1-80E6-E8FD860A9ABC}" dt="2025-10-15T07:35:01.064" v="3776" actId="113"/>
+          <ac:spMkLst>
+            <pc:docMk/>
+            <pc:sldMk cId="3062124621" sldId="271"/>
+            <ac:spMk id="8" creationId="{BA58588A-3E05-9D00-1221-802555612833}"/>
+          </ac:spMkLst>
+        </pc:spChg>
+        <pc:spChg chg="add del">
+          <ac:chgData name="Adela Nedisan Videsjorden" userId="16205ae5-98c8-4080-bff7-3ead80d46a09" providerId="ADAL" clId="{CB254D50-70D7-42A1-80E6-E8FD860A9ABC}" dt="2025-10-15T07:07:09.713" v="3618" actId="26606"/>
+          <ac:spMkLst>
+            <pc:docMk/>
+            <pc:sldMk cId="3062124621" sldId="271"/>
+            <ac:spMk id="11" creationId="{1BE0FD2A-6FBD-55F3-25C9-9D88199F9EDB}"/>
+          </ac:spMkLst>
+        </pc:spChg>
+        <pc:spChg chg="add del">
+          <ac:chgData name="Adela Nedisan Videsjorden" userId="16205ae5-98c8-4080-bff7-3ead80d46a09" providerId="ADAL" clId="{CB254D50-70D7-42A1-80E6-E8FD860A9ABC}" dt="2025-10-15T07:07:09.713" v="3618" actId="26606"/>
+          <ac:spMkLst>
+            <pc:docMk/>
+            <pc:sldMk cId="3062124621" sldId="271"/>
+            <ac:spMk id="14" creationId="{32AEEBC8-9D30-42EF-95F2-386C2653FBF0}"/>
+          </ac:spMkLst>
+        </pc:spChg>
+        <pc:spChg chg="add del">
+          <ac:chgData name="Adela Nedisan Videsjorden" userId="16205ae5-98c8-4080-bff7-3ead80d46a09" providerId="ADAL" clId="{CB254D50-70D7-42A1-80E6-E8FD860A9ABC}" dt="2025-10-15T07:07:09.713" v="3618" actId="26606"/>
+          <ac:spMkLst>
+            <pc:docMk/>
+            <pc:sldMk cId="3062124621" sldId="271"/>
+            <ac:spMk id="16" creationId="{3529E97A-97C3-40EA-8A04-5C02398D568F}"/>
+          </ac:spMkLst>
+        </pc:spChg>
+        <pc:spChg chg="add del">
+          <ac:chgData name="Adela Nedisan Videsjorden" userId="16205ae5-98c8-4080-bff7-3ead80d46a09" providerId="ADAL" clId="{CB254D50-70D7-42A1-80E6-E8FD860A9ABC}" dt="2025-10-15T07:07:09.713" v="3618" actId="26606"/>
+          <ac:spMkLst>
+            <pc:docMk/>
+            <pc:sldMk cId="3062124621" sldId="271"/>
+            <ac:spMk id="18" creationId="{59FA8C2E-A5A7-4490-927A-7CD58343EDBB}"/>
+          </ac:spMkLst>
+        </pc:spChg>
+        <pc:picChg chg="add mod">
+          <ac:chgData name="Adela Nedisan Videsjorden" userId="16205ae5-98c8-4080-bff7-3ead80d46a09" providerId="ADAL" clId="{CB254D50-70D7-42A1-80E6-E8FD860A9ABC}" dt="2025-10-15T07:23:51.944" v="3724" actId="14861"/>
+          <ac:picMkLst>
+            <pc:docMk/>
+            <pc:sldMk cId="3062124621" sldId="271"/>
+            <ac:picMk id="7" creationId="{03A7A828-B834-F418-FFD6-22E86B287E47}"/>
+          </ac:picMkLst>
+        </pc:picChg>
+        <pc:picChg chg="add mod">
+          <ac:chgData name="Adela Nedisan Videsjorden" userId="16205ae5-98c8-4080-bff7-3ead80d46a09" providerId="ADAL" clId="{CB254D50-70D7-42A1-80E6-E8FD860A9ABC}" dt="2025-10-15T07:24:15.551" v="3726" actId="14861"/>
+          <ac:picMkLst>
+            <pc:docMk/>
+            <pc:sldMk cId="3062124621" sldId="271"/>
+            <ac:picMk id="10" creationId="{CC517768-C298-3290-D44E-EC7250A0384E}"/>
+          </ac:picMkLst>
+        </pc:picChg>
+      </pc:sldChg>
+      <pc:sldChg chg="del">
+        <pc:chgData name="Adela Nedisan Videsjorden" userId="16205ae5-98c8-4080-bff7-3ead80d46a09" providerId="ADAL" clId="{CB254D50-70D7-42A1-80E6-E8FD860A9ABC}" dt="2025-10-15T07:16:18.848" v="3687" actId="2696"/>
+        <pc:sldMkLst>
+          <pc:docMk/>
+          <pc:sldMk cId="2461978777" sldId="272"/>
+        </pc:sldMkLst>
       </pc:sldChg>
     </pc:docChg>
   </pc:docChgLst>
 </pc:chgInfo>
+</file>
+
+<file path=ppt/notesMasters/notesMaster1.xml><?xml version="1.0" encoding="utf-8"?>
+<p:notesMaster xmlns:a="http://schemas.openxmlformats.org/drawingml/2006/main" xmlns:r="http://schemas.openxmlformats.org/officeDocument/2006/relationships" xmlns:p="http://schemas.openxmlformats.org/presentationml/2006/main">
+  <p:cSld>
+    <p:bg>
+      <p:bgRef idx="1001">
+        <a:schemeClr val="bg1"/>
+      </p:bgRef>
+    </p:bg>
+    <p:spTree>
+      <p:nvGrpSpPr>
+        <p:cNvPr id="1" name=""/>
+        <p:cNvGrpSpPr/>
+        <p:nvPr/>
+      </p:nvGrpSpPr>
+      <p:grpSpPr>
+        <a:xfrm>
+          <a:off x="0" y="0"/>
+          <a:ext cx="0" cy="0"/>
+          <a:chOff x="0" y="0"/>
+          <a:chExt cx="0" cy="0"/>
+        </a:xfrm>
+      </p:grpSpPr>
+      <p:sp>
+        <p:nvSpPr>
+          <p:cNvPr id="2" name="Header Placeholder 1"/>
+          <p:cNvSpPr>
+            <a:spLocks noGrp="1"/>
+          </p:cNvSpPr>
+          <p:nvPr>
+            <p:ph type="hdr" sz="quarter"/>
+          </p:nvPr>
+        </p:nvSpPr>
+        <p:spPr>
+          <a:xfrm>
+            <a:off x="0" y="0"/>
+            <a:ext cx="2971800" cy="458788"/>
+          </a:xfrm>
+          <a:prstGeom prst="rect">
+            <a:avLst/>
+          </a:prstGeom>
+        </p:spPr>
+        <p:txBody>
+          <a:bodyPr vert="horz" lIns="91440" tIns="45720" rIns="91440" bIns="45720" rtlCol="0"/>
+          <a:lstStyle>
+            <a:lvl1pPr algn="l">
+              <a:defRPr sz="1200"/>
+            </a:lvl1pPr>
+          </a:lstStyle>
+          <a:p>
+            <a:endParaRPr lang="nb-NO"/>
+          </a:p>
+        </p:txBody>
+      </p:sp>
+      <p:sp>
+        <p:nvSpPr>
+          <p:cNvPr id="3" name="Date Placeholder 2"/>
+          <p:cNvSpPr>
+            <a:spLocks noGrp="1"/>
+          </p:cNvSpPr>
+          <p:nvPr>
+            <p:ph type="dt" idx="1"/>
+          </p:nvPr>
+        </p:nvSpPr>
+        <p:spPr>
+          <a:xfrm>
+            <a:off x="3884613" y="0"/>
+            <a:ext cx="2971800" cy="458788"/>
+          </a:xfrm>
+          <a:prstGeom prst="rect">
+            <a:avLst/>
+          </a:prstGeom>
+        </p:spPr>
+        <p:txBody>
+          <a:bodyPr vert="horz" lIns="91440" tIns="45720" rIns="91440" bIns="45720" rtlCol="0"/>
+          <a:lstStyle>
+            <a:lvl1pPr algn="r">
+              <a:defRPr sz="1200"/>
+            </a:lvl1pPr>
+          </a:lstStyle>
+          <a:p>
+            <a:fld id="{23C71B8A-1CEE-4F5A-8EE9-756D353F3DBE}" type="datetimeFigureOut">
+              <a:rPr lang="nb-NO" smtClean="0"/>
+              <a:t>15.10.2025</a:t>
+            </a:fld>
+            <a:endParaRPr lang="nb-NO"/>
+          </a:p>
+        </p:txBody>
+      </p:sp>
+      <p:sp>
+        <p:nvSpPr>
+          <p:cNvPr id="4" name="Slide Image Placeholder 3"/>
+          <p:cNvSpPr>
+            <a:spLocks noGrp="1" noRot="1" noChangeAspect="1"/>
+          </p:cNvSpPr>
+          <p:nvPr>
+            <p:ph type="sldImg" idx="2"/>
+          </p:nvPr>
+        </p:nvSpPr>
+        <p:spPr>
+          <a:xfrm>
+            <a:off x="685800" y="1143000"/>
+            <a:ext cx="5486400" cy="3086100"/>
+          </a:xfrm>
+          <a:prstGeom prst="rect">
+            <a:avLst/>
+          </a:prstGeom>
+          <a:noFill/>
+          <a:ln w="12700">
+            <a:solidFill>
+              <a:prstClr val="black"/>
+            </a:solidFill>
+          </a:ln>
+        </p:spPr>
+        <p:txBody>
+          <a:bodyPr vert="horz" lIns="91440" tIns="45720" rIns="91440" bIns="45720" rtlCol="0" anchor="ctr"/>
+          <a:lstStyle/>
+          <a:p>
+            <a:endParaRPr lang="nb-NO"/>
+          </a:p>
+        </p:txBody>
+      </p:sp>
+      <p:sp>
+        <p:nvSpPr>
+          <p:cNvPr id="5" name="Notes Placeholder 4"/>
+          <p:cNvSpPr>
+            <a:spLocks noGrp="1"/>
+          </p:cNvSpPr>
+          <p:nvPr>
+            <p:ph type="body" sz="quarter" idx="3"/>
+          </p:nvPr>
+        </p:nvSpPr>
+        <p:spPr>
+          <a:xfrm>
+            <a:off x="685800" y="4400550"/>
+            <a:ext cx="5486400" cy="3600450"/>
+          </a:xfrm>
+          <a:prstGeom prst="rect">
+            <a:avLst/>
+          </a:prstGeom>
+        </p:spPr>
+        <p:txBody>
+          <a:bodyPr vert="horz" lIns="91440" tIns="45720" rIns="91440" bIns="45720" rtlCol="0"/>
+          <a:lstStyle/>
+          <a:p>
+            <a:pPr lvl="0"/>
+            <a:r>
+              <a:rPr lang="en-US"/>
+              <a:t>Click to edit Master text styles</a:t>
+            </a:r>
+          </a:p>
+          <a:p>
+            <a:pPr lvl="1"/>
+            <a:r>
+              <a:rPr lang="en-US"/>
+              <a:t>Second level</a:t>
+            </a:r>
+          </a:p>
+          <a:p>
+            <a:pPr lvl="2"/>
+            <a:r>
+              <a:rPr lang="en-US"/>
+              <a:t>Third level</a:t>
+            </a:r>
+          </a:p>
+          <a:p>
+            <a:pPr lvl="3"/>
+            <a:r>
+              <a:rPr lang="en-US"/>
+              <a:t>Fourth level</a:t>
+            </a:r>
+          </a:p>
+          <a:p>
+            <a:pPr lvl="4"/>
+            <a:r>
+              <a:rPr lang="en-US"/>
+              <a:t>Fifth level</a:t>
+            </a:r>
+            <a:endParaRPr lang="nb-NO"/>
+          </a:p>
+        </p:txBody>
+      </p:sp>
+      <p:sp>
+        <p:nvSpPr>
+          <p:cNvPr id="6" name="Footer Placeholder 5"/>
+          <p:cNvSpPr>
+            <a:spLocks noGrp="1"/>
+          </p:cNvSpPr>
+          <p:nvPr>
+            <p:ph type="ftr" sz="quarter" idx="4"/>
+          </p:nvPr>
+        </p:nvSpPr>
+        <p:spPr>
+          <a:xfrm>
+            <a:off x="0" y="8685213"/>
+            <a:ext cx="2971800" cy="458787"/>
+          </a:xfrm>
+          <a:prstGeom prst="rect">
+            <a:avLst/>
+          </a:prstGeom>
+        </p:spPr>
+        <p:txBody>
+          <a:bodyPr vert="horz" lIns="91440" tIns="45720" rIns="91440" bIns="45720" rtlCol="0" anchor="b"/>
+          <a:lstStyle>
+            <a:lvl1pPr algn="l">
+              <a:defRPr sz="1200"/>
+            </a:lvl1pPr>
+          </a:lstStyle>
+          <a:p>
+            <a:endParaRPr lang="nb-NO"/>
+          </a:p>
+        </p:txBody>
+      </p:sp>
+      <p:sp>
+        <p:nvSpPr>
+          <p:cNvPr id="7" name="Slide Number Placeholder 6"/>
+          <p:cNvSpPr>
+            <a:spLocks noGrp="1"/>
+          </p:cNvSpPr>
+          <p:nvPr>
+            <p:ph type="sldNum" sz="quarter" idx="5"/>
+          </p:nvPr>
+        </p:nvSpPr>
+        <p:spPr>
+          <a:xfrm>
+            <a:off x="3884613" y="8685213"/>
+            <a:ext cx="2971800" cy="458787"/>
+          </a:xfrm>
+          <a:prstGeom prst="rect">
+            <a:avLst/>
+          </a:prstGeom>
+        </p:spPr>
+        <p:txBody>
+          <a:bodyPr vert="horz" lIns="91440" tIns="45720" rIns="91440" bIns="45720" rtlCol="0" anchor="b"/>
+          <a:lstStyle>
+            <a:lvl1pPr algn="r">
+              <a:defRPr sz="1200"/>
+            </a:lvl1pPr>
+          </a:lstStyle>
+          <a:p>
+            <a:fld id="{C1706352-E723-4D3D-B00F-048F1669AF71}" type="slidenum">
+              <a:rPr lang="nb-NO" smtClean="0"/>
+              <a:t>‹#›</a:t>
+            </a:fld>
+            <a:endParaRPr lang="nb-NO"/>
+          </a:p>
+        </p:txBody>
+      </p:sp>
+    </p:spTree>
+    <p:extLst>
+      <p:ext uri="{BB962C8B-B14F-4D97-AF65-F5344CB8AC3E}">
+        <p14:creationId xmlns:p14="http://schemas.microsoft.com/office/powerpoint/2010/main" val="118466404"/>
+      </p:ext>
+    </p:extLst>
+  </p:cSld>
+  <p:clrMap bg1="lt1" tx1="dk1" bg2="lt2" tx2="dk2" accent1="accent1" accent2="accent2" accent3="accent3" accent4="accent4" accent5="accent5" accent6="accent6" hlink="hlink" folHlink="folHlink"/>
+  <p:notesStyle>
+    <a:lvl1pPr marL="0" algn="l" defTabSz="914400" rtl="0" eaLnBrk="1" latinLnBrk="0" hangingPunct="1">
+      <a:defRPr sz="1200" kern="1200">
+        <a:solidFill>
+          <a:schemeClr val="tx1"/>
+        </a:solidFill>
+        <a:latin typeface="+mn-lt"/>
+        <a:ea typeface="+mn-ea"/>
+        <a:cs typeface="+mn-cs"/>
+      </a:defRPr>
+    </a:lvl1pPr>
+    <a:lvl2pPr marL="457200" algn="l" defTabSz="914400" rtl="0" eaLnBrk="1" latinLnBrk="0" hangingPunct="1">
+      <a:defRPr sz="1200" kern="1200">
+        <a:solidFill>
+          <a:schemeClr val="tx1"/>
+        </a:solidFill>
+        <a:latin typeface="+mn-lt"/>
+        <a:ea typeface="+mn-ea"/>
+        <a:cs typeface="+mn-cs"/>
+      </a:defRPr>
+    </a:lvl2pPr>
+    <a:lvl3pPr marL="914400" algn="l" defTabSz="914400" rtl="0" eaLnBrk="1" latinLnBrk="0" hangingPunct="1">
+      <a:defRPr sz="1200" kern="1200">
+        <a:solidFill>
+          <a:schemeClr val="tx1"/>
+        </a:solidFill>
+        <a:latin typeface="+mn-lt"/>
+        <a:ea typeface="+mn-ea"/>
+        <a:cs typeface="+mn-cs"/>
+      </a:defRPr>
+    </a:lvl3pPr>
+    <a:lvl4pPr marL="1371600" algn="l" defTabSz="914400" rtl="0" eaLnBrk="1" latinLnBrk="0" hangingPunct="1">
+      <a:defRPr sz="1200" kern="1200">
+        <a:solidFill>
+          <a:schemeClr val="tx1"/>
+        </a:solidFill>
+        <a:latin typeface="+mn-lt"/>
+        <a:ea typeface="+mn-ea"/>
+        <a:cs typeface="+mn-cs"/>
+      </a:defRPr>
+    </a:lvl4pPr>
+    <a:lvl5pPr marL="1828800" algn="l" defTabSz="914400" rtl="0" eaLnBrk="1" latinLnBrk="0" hangingPunct="1">
+      <a:defRPr sz="1200" kern="1200">
+        <a:solidFill>
+          <a:schemeClr val="tx1"/>
+        </a:solidFill>
+        <a:latin typeface="+mn-lt"/>
+        <a:ea typeface="+mn-ea"/>
+        <a:cs typeface="+mn-cs"/>
+      </a:defRPr>
+    </a:lvl5pPr>
+    <a:lvl6pPr marL="2286000" algn="l" defTabSz="914400" rtl="0" eaLnBrk="1" latinLnBrk="0" hangingPunct="1">
+      <a:defRPr sz="1200" kern="1200">
+        <a:solidFill>
+          <a:schemeClr val="tx1"/>
+        </a:solidFill>
+        <a:latin typeface="+mn-lt"/>
+        <a:ea typeface="+mn-ea"/>
+        <a:cs typeface="+mn-cs"/>
+      </a:defRPr>
+    </a:lvl6pPr>
+    <a:lvl7pPr marL="2743200" algn="l" defTabSz="914400" rtl="0" eaLnBrk="1" latinLnBrk="0" hangingPunct="1">
+      <a:defRPr sz="1200" kern="1200">
+        <a:solidFill>
+          <a:schemeClr val="tx1"/>
+        </a:solidFill>
+        <a:latin typeface="+mn-lt"/>
+        <a:ea typeface="+mn-ea"/>
+        <a:cs typeface="+mn-cs"/>
+      </a:defRPr>
+    </a:lvl7pPr>
+    <a:lvl8pPr marL="3200400" algn="l" defTabSz="914400" rtl="0" eaLnBrk="1" latinLnBrk="0" hangingPunct="1">
+      <a:defRPr sz="1200" kern="1200">
+        <a:solidFill>
+          <a:schemeClr val="tx1"/>
+        </a:solidFill>
+        <a:latin typeface="+mn-lt"/>
+        <a:ea typeface="+mn-ea"/>
+        <a:cs typeface="+mn-cs"/>
+      </a:defRPr>
+    </a:lvl8pPr>
+    <a:lvl9pPr marL="3657600" algn="l" defTabSz="914400" rtl="0" eaLnBrk="1" latinLnBrk="0" hangingPunct="1">
+      <a:defRPr sz="1200" kern="1200">
+        <a:solidFill>
+          <a:schemeClr val="tx1"/>
+        </a:solidFill>
+        <a:latin typeface="+mn-lt"/>
+        <a:ea typeface="+mn-ea"/>
+        <a:cs typeface="+mn-cs"/>
+      </a:defRPr>
+    </a:lvl9pPr>
+  </p:notesStyle>
+</p:notesMaster>
+</file>
+
+<file path=ppt/notesSlides/notesSlide1.xml><?xml version="1.0" encoding="utf-8"?>
+<p:notes xmlns:a="http://schemas.openxmlformats.org/drawingml/2006/main" xmlns:r="http://schemas.openxmlformats.org/officeDocument/2006/relationships" xmlns:p="http://schemas.openxmlformats.org/presentationml/2006/main">
+  <p:cSld>
+    <p:spTree>
+      <p:nvGrpSpPr>
+        <p:cNvPr id="1" name=""/>
+        <p:cNvGrpSpPr/>
+        <p:nvPr/>
+      </p:nvGrpSpPr>
+      <p:grpSpPr>
+        <a:xfrm>
+          <a:off x="0" y="0"/>
+          <a:ext cx="0" cy="0"/>
+          <a:chOff x="0" y="0"/>
+          <a:chExt cx="0" cy="0"/>
+        </a:xfrm>
+      </p:grpSpPr>
+      <p:sp>
+        <p:nvSpPr>
+          <p:cNvPr id="2" name="Slide Image Placeholder 1"/>
+          <p:cNvSpPr>
+            <a:spLocks noGrp="1" noRot="1" noChangeAspect="1"/>
+          </p:cNvSpPr>
+          <p:nvPr>
+            <p:ph type="sldImg"/>
+          </p:nvPr>
+        </p:nvSpPr>
+        <p:spPr/>
+      </p:sp>
+      <p:sp>
+        <p:nvSpPr>
+          <p:cNvPr id="3" name="Notes Placeholder 2"/>
+          <p:cNvSpPr>
+            <a:spLocks noGrp="1"/>
+          </p:cNvSpPr>
+          <p:nvPr>
+            <p:ph type="body" idx="1"/>
+          </p:nvPr>
+        </p:nvSpPr>
+        <p:spPr/>
+        <p:txBody>
+          <a:bodyPr/>
+          <a:lstStyle/>
+          <a:p>
+            <a:endParaRPr lang="nb-NO"/>
+          </a:p>
+        </p:txBody>
+      </p:sp>
+      <p:sp>
+        <p:nvSpPr>
+          <p:cNvPr id="4" name="Slide Number Placeholder 3"/>
+          <p:cNvSpPr>
+            <a:spLocks noGrp="1"/>
+          </p:cNvSpPr>
+          <p:nvPr>
+            <p:ph type="sldNum" sz="quarter" idx="5"/>
+          </p:nvPr>
+        </p:nvSpPr>
+        <p:spPr/>
+        <p:txBody>
+          <a:bodyPr/>
+          <a:lstStyle/>
+          <a:p>
+            <a:fld id="{C1706352-E723-4D3D-B00F-048F1669AF71}" type="slidenum">
+              <a:rPr lang="nb-NO" smtClean="0"/>
+              <a:t>2</a:t>
+            </a:fld>
+            <a:endParaRPr lang="nb-NO"/>
+          </a:p>
+        </p:txBody>
+      </p:sp>
+    </p:spTree>
+    <p:extLst>
+      <p:ext uri="{BB962C8B-B14F-4D97-AF65-F5344CB8AC3E}">
+        <p14:creationId xmlns:p14="http://schemas.microsoft.com/office/powerpoint/2010/main" val="2327086522"/>
+      </p:ext>
+    </p:extLst>
+  </p:cSld>
+  <p:clrMapOvr>
+    <a:masterClrMapping/>
+  </p:clrMapOvr>
+</p:notes>
+</file>
+
+<file path=ppt/notesSlides/notesSlide2.xml><?xml version="1.0" encoding="utf-8"?>
+<p:notes xmlns:a="http://schemas.openxmlformats.org/drawingml/2006/main" xmlns:r="http://schemas.openxmlformats.org/officeDocument/2006/relationships" xmlns:p="http://schemas.openxmlformats.org/presentationml/2006/main">
+  <p:cSld>
+    <p:spTree>
+      <p:nvGrpSpPr>
+        <p:cNvPr id="1" name="">
+          <a:extLst>
+            <a:ext uri="{FF2B5EF4-FFF2-40B4-BE49-F238E27FC236}">
+              <a16:creationId xmlns:a16="http://schemas.microsoft.com/office/drawing/2014/main" id="{BA52CA30-E207-E2E1-EEE5-F3ADF888BE6C}"/>
+            </a:ext>
+          </a:extLst>
+        </p:cNvPr>
+        <p:cNvGrpSpPr/>
+        <p:nvPr/>
+      </p:nvGrpSpPr>
+      <p:grpSpPr>
+        <a:xfrm>
+          <a:off x="0" y="0"/>
+          <a:ext cx="0" cy="0"/>
+          <a:chOff x="0" y="0"/>
+          <a:chExt cx="0" cy="0"/>
+        </a:xfrm>
+      </p:grpSpPr>
+      <p:sp>
+        <p:nvSpPr>
+          <p:cNvPr id="2" name="Slide Image Placeholder 1">
+            <a:extLst>
+              <a:ext uri="{FF2B5EF4-FFF2-40B4-BE49-F238E27FC236}">
+                <a16:creationId xmlns:a16="http://schemas.microsoft.com/office/drawing/2014/main" id="{16FE7506-0CEE-523E-C007-3E9F84BF9534}"/>
+              </a:ext>
+            </a:extLst>
+          </p:cNvPr>
+          <p:cNvSpPr>
+            <a:spLocks noGrp="1" noRot="1" noChangeAspect="1"/>
+          </p:cNvSpPr>
+          <p:nvPr>
+            <p:ph type="sldImg"/>
+          </p:nvPr>
+        </p:nvSpPr>
+        <p:spPr/>
+      </p:sp>
+      <p:sp>
+        <p:nvSpPr>
+          <p:cNvPr id="3" name="Notes Placeholder 2">
+            <a:extLst>
+              <a:ext uri="{FF2B5EF4-FFF2-40B4-BE49-F238E27FC236}">
+                <a16:creationId xmlns:a16="http://schemas.microsoft.com/office/drawing/2014/main" id="{DBF9C373-EA94-80A0-551C-226CCDF49CB3}"/>
+              </a:ext>
+            </a:extLst>
+          </p:cNvPr>
+          <p:cNvSpPr>
+            <a:spLocks noGrp="1"/>
+          </p:cNvSpPr>
+          <p:nvPr>
+            <p:ph type="body" idx="1"/>
+          </p:nvPr>
+        </p:nvSpPr>
+        <p:spPr/>
+        <p:txBody>
+          <a:bodyPr/>
+          <a:lstStyle/>
+          <a:p>
+            <a:endParaRPr lang="nb-NO"/>
+          </a:p>
+        </p:txBody>
+      </p:sp>
+      <p:sp>
+        <p:nvSpPr>
+          <p:cNvPr id="4" name="Slide Number Placeholder 3">
+            <a:extLst>
+              <a:ext uri="{FF2B5EF4-FFF2-40B4-BE49-F238E27FC236}">
+                <a16:creationId xmlns:a16="http://schemas.microsoft.com/office/drawing/2014/main" id="{5C31329C-C489-9574-782C-234DDB6B2569}"/>
+              </a:ext>
+            </a:extLst>
+          </p:cNvPr>
+          <p:cNvSpPr>
+            <a:spLocks noGrp="1"/>
+          </p:cNvSpPr>
+          <p:nvPr>
+            <p:ph type="sldNum" sz="quarter" idx="5"/>
+          </p:nvPr>
+        </p:nvSpPr>
+        <p:spPr/>
+        <p:txBody>
+          <a:bodyPr/>
+          <a:lstStyle/>
+          <a:p>
+            <a:fld id="{C1706352-E723-4D3D-B00F-048F1669AF71}" type="slidenum">
+              <a:rPr lang="nb-NO" smtClean="0"/>
+              <a:t>3</a:t>
+            </a:fld>
+            <a:endParaRPr lang="nb-NO"/>
+          </a:p>
+        </p:txBody>
+      </p:sp>
+    </p:spTree>
+    <p:extLst>
+      <p:ext uri="{BB962C8B-B14F-4D97-AF65-F5344CB8AC3E}">
+        <p14:creationId xmlns:p14="http://schemas.microsoft.com/office/powerpoint/2010/main" val="955885837"/>
+      </p:ext>
+    </p:extLst>
+  </p:cSld>
+  <p:clrMapOvr>
+    <a:masterClrMapping/>
+  </p:clrMapOvr>
+</p:notes>
+</file>
+
+<file path=ppt/notesSlides/notesSlide3.xml><?xml version="1.0" encoding="utf-8"?>
+<p:notes xmlns:a="http://schemas.openxmlformats.org/drawingml/2006/main" xmlns:r="http://schemas.openxmlformats.org/officeDocument/2006/relationships" xmlns:p="http://schemas.openxmlformats.org/presentationml/2006/main">
+  <p:cSld>
+    <p:spTree>
+      <p:nvGrpSpPr>
+        <p:cNvPr id="1" name=""/>
+        <p:cNvGrpSpPr/>
+        <p:nvPr/>
+      </p:nvGrpSpPr>
+      <p:grpSpPr>
+        <a:xfrm>
+          <a:off x="0" y="0"/>
+          <a:ext cx="0" cy="0"/>
+          <a:chOff x="0" y="0"/>
+          <a:chExt cx="0" cy="0"/>
+        </a:xfrm>
+      </p:grpSpPr>
+      <p:sp>
+        <p:nvSpPr>
+          <p:cNvPr id="2" name="Slide Image Placeholder 1"/>
+          <p:cNvSpPr>
+            <a:spLocks noGrp="1" noRot="1" noChangeAspect="1"/>
+          </p:cNvSpPr>
+          <p:nvPr>
+            <p:ph type="sldImg"/>
+          </p:nvPr>
+        </p:nvSpPr>
+        <p:spPr/>
+      </p:sp>
+      <p:sp>
+        <p:nvSpPr>
+          <p:cNvPr id="3" name="Notes Placeholder 2"/>
+          <p:cNvSpPr>
+            <a:spLocks noGrp="1"/>
+          </p:cNvSpPr>
+          <p:nvPr>
+            <p:ph type="body" idx="1"/>
+          </p:nvPr>
+        </p:nvSpPr>
+        <p:spPr/>
+        <p:txBody>
+          <a:bodyPr/>
+          <a:lstStyle/>
+          <a:p>
+            <a:endParaRPr lang="nb-NO"/>
+          </a:p>
+        </p:txBody>
+      </p:sp>
+      <p:sp>
+        <p:nvSpPr>
+          <p:cNvPr id="4" name="Slide Number Placeholder 3"/>
+          <p:cNvSpPr>
+            <a:spLocks noGrp="1"/>
+          </p:cNvSpPr>
+          <p:nvPr>
+            <p:ph type="sldNum" sz="quarter" idx="5"/>
+          </p:nvPr>
+        </p:nvSpPr>
+        <p:spPr/>
+        <p:txBody>
+          <a:bodyPr/>
+          <a:lstStyle/>
+          <a:p>
+            <a:fld id="{C1706352-E723-4D3D-B00F-048F1669AF71}" type="slidenum">
+              <a:rPr lang="nb-NO" smtClean="0"/>
+              <a:t>8</a:t>
+            </a:fld>
+            <a:endParaRPr lang="nb-NO"/>
+          </a:p>
+        </p:txBody>
+      </p:sp>
+    </p:spTree>
+    <p:extLst>
+      <p:ext uri="{BB962C8B-B14F-4D97-AF65-F5344CB8AC3E}">
+        <p14:creationId xmlns:p14="http://schemas.microsoft.com/office/powerpoint/2010/main" val="1329995131"/>
+      </p:ext>
+    </p:extLst>
+  </p:cSld>
+  <p:clrMapOvr>
+    <a:masterClrMapping/>
+  </p:clrMapOvr>
+</p:notes>
+</file>
+
+<file path=ppt/notesSlides/notesSlide4.xml><?xml version="1.0" encoding="utf-8"?>
+<p:notes xmlns:a="http://schemas.openxmlformats.org/drawingml/2006/main" xmlns:r="http://schemas.openxmlformats.org/officeDocument/2006/relationships" xmlns:p="http://schemas.openxmlformats.org/presentationml/2006/main">
+  <p:cSld>
+    <p:spTree>
+      <p:nvGrpSpPr>
+        <p:cNvPr id="1" name="">
+          <a:extLst>
+            <a:ext uri="{FF2B5EF4-FFF2-40B4-BE49-F238E27FC236}">
+              <a16:creationId xmlns:a16="http://schemas.microsoft.com/office/drawing/2014/main" id="{5CCC30C9-6BD2-86BD-08E3-B2EC43C0A3B0}"/>
+            </a:ext>
+          </a:extLst>
+        </p:cNvPr>
+        <p:cNvGrpSpPr/>
+        <p:nvPr/>
+      </p:nvGrpSpPr>
+      <p:grpSpPr>
+        <a:xfrm>
+          <a:off x="0" y="0"/>
+          <a:ext cx="0" cy="0"/>
+          <a:chOff x="0" y="0"/>
+          <a:chExt cx="0" cy="0"/>
+        </a:xfrm>
+      </p:grpSpPr>
+      <p:sp>
+        <p:nvSpPr>
+          <p:cNvPr id="2" name="Slide Image Placeholder 1">
+            <a:extLst>
+              <a:ext uri="{FF2B5EF4-FFF2-40B4-BE49-F238E27FC236}">
+                <a16:creationId xmlns:a16="http://schemas.microsoft.com/office/drawing/2014/main" id="{29B7235E-87B9-CD3B-E10F-C5D823AA36B9}"/>
+              </a:ext>
+            </a:extLst>
+          </p:cNvPr>
+          <p:cNvSpPr>
+            <a:spLocks noGrp="1" noRot="1" noChangeAspect="1"/>
+          </p:cNvSpPr>
+          <p:nvPr>
+            <p:ph type="sldImg"/>
+          </p:nvPr>
+        </p:nvSpPr>
+        <p:spPr/>
+      </p:sp>
+      <p:sp>
+        <p:nvSpPr>
+          <p:cNvPr id="3" name="Notes Placeholder 2">
+            <a:extLst>
+              <a:ext uri="{FF2B5EF4-FFF2-40B4-BE49-F238E27FC236}">
+                <a16:creationId xmlns:a16="http://schemas.microsoft.com/office/drawing/2014/main" id="{B93E8C79-8138-5B53-9C29-A4AC061C1142}"/>
+              </a:ext>
+            </a:extLst>
+          </p:cNvPr>
+          <p:cNvSpPr>
+            <a:spLocks noGrp="1"/>
+          </p:cNvSpPr>
+          <p:nvPr>
+            <p:ph type="body" idx="1"/>
+          </p:nvPr>
+        </p:nvSpPr>
+        <p:spPr/>
+        <p:txBody>
+          <a:bodyPr/>
+          <a:lstStyle/>
+          <a:p>
+            <a:endParaRPr lang="nb-NO"/>
+          </a:p>
+        </p:txBody>
+      </p:sp>
+      <p:sp>
+        <p:nvSpPr>
+          <p:cNvPr id="4" name="Slide Number Placeholder 3">
+            <a:extLst>
+              <a:ext uri="{FF2B5EF4-FFF2-40B4-BE49-F238E27FC236}">
+                <a16:creationId xmlns:a16="http://schemas.microsoft.com/office/drawing/2014/main" id="{518C2779-6CE4-9E0F-96A7-59115F7BCA8E}"/>
+              </a:ext>
+            </a:extLst>
+          </p:cNvPr>
+          <p:cNvSpPr>
+            <a:spLocks noGrp="1"/>
+          </p:cNvSpPr>
+          <p:nvPr>
+            <p:ph type="sldNum" sz="quarter" idx="5"/>
+          </p:nvPr>
+        </p:nvSpPr>
+        <p:spPr/>
+        <p:txBody>
+          <a:bodyPr/>
+          <a:lstStyle/>
+          <a:p>
+            <a:fld id="{C1706352-E723-4D3D-B00F-048F1669AF71}" type="slidenum">
+              <a:rPr lang="nb-NO" smtClean="0"/>
+              <a:t>9</a:t>
+            </a:fld>
+            <a:endParaRPr lang="nb-NO"/>
+          </a:p>
+        </p:txBody>
+      </p:sp>
+    </p:spTree>
+    <p:extLst>
+      <p:ext uri="{BB962C8B-B14F-4D97-AF65-F5344CB8AC3E}">
+        <p14:creationId xmlns:p14="http://schemas.microsoft.com/office/powerpoint/2010/main" val="659579611"/>
+      </p:ext>
+    </p:extLst>
+  </p:cSld>
+  <p:clrMapOvr>
+    <a:masterClrMapping/>
+  </p:clrMapOvr>
+</p:notes>
 </file>
 
 <file path=ppt/slideLayouts/slideLayout1.xml><?xml version="1.0" encoding="utf-8"?>
@@ -300,7 +1632,7 @@
           <a:p>
             <a:fld id="{F995DA09-43F3-4E83-B0CE-65E66947C6FF}" type="datetimeFigureOut">
               <a:rPr lang="nb-NO" smtClean="0"/>
-              <a:t>13.10.2025</a:t>
+              <a:t>15.10.2025</a:t>
             </a:fld>
             <a:endParaRPr lang="nb-NO"/>
           </a:p>
@@ -500,7 +1832,7 @@
           <a:p>
             <a:fld id="{F995DA09-43F3-4E83-B0CE-65E66947C6FF}" type="datetimeFigureOut">
               <a:rPr lang="nb-NO" smtClean="0"/>
-              <a:t>13.10.2025</a:t>
+              <a:t>15.10.2025</a:t>
             </a:fld>
             <a:endParaRPr lang="nb-NO"/>
           </a:p>
@@ -710,7 +2042,7 @@
           <a:p>
             <a:fld id="{F995DA09-43F3-4E83-B0CE-65E66947C6FF}" type="datetimeFigureOut">
               <a:rPr lang="nb-NO" smtClean="0"/>
-              <a:t>13.10.2025</a:t>
+              <a:t>15.10.2025</a:t>
             </a:fld>
             <a:endParaRPr lang="nb-NO"/>
           </a:p>
@@ -910,7 +2242,7 @@
           <a:p>
             <a:fld id="{F995DA09-43F3-4E83-B0CE-65E66947C6FF}" type="datetimeFigureOut">
               <a:rPr lang="nb-NO" smtClean="0"/>
-              <a:t>13.10.2025</a:t>
+              <a:t>15.10.2025</a:t>
             </a:fld>
             <a:endParaRPr lang="nb-NO"/>
           </a:p>
@@ -1186,7 +2518,7 @@
           <a:p>
             <a:fld id="{F995DA09-43F3-4E83-B0CE-65E66947C6FF}" type="datetimeFigureOut">
               <a:rPr lang="nb-NO" smtClean="0"/>
-              <a:t>13.10.2025</a:t>
+              <a:t>15.10.2025</a:t>
             </a:fld>
             <a:endParaRPr lang="nb-NO"/>
           </a:p>
@@ -1454,7 +2786,7 @@
           <a:p>
             <a:fld id="{F995DA09-43F3-4E83-B0CE-65E66947C6FF}" type="datetimeFigureOut">
               <a:rPr lang="nb-NO" smtClean="0"/>
-              <a:t>13.10.2025</a:t>
+              <a:t>15.10.2025</a:t>
             </a:fld>
             <a:endParaRPr lang="nb-NO"/>
           </a:p>
@@ -1869,7 +3201,7 @@
           <a:p>
             <a:fld id="{F995DA09-43F3-4E83-B0CE-65E66947C6FF}" type="datetimeFigureOut">
               <a:rPr lang="nb-NO" smtClean="0"/>
-              <a:t>13.10.2025</a:t>
+              <a:t>15.10.2025</a:t>
             </a:fld>
             <a:endParaRPr lang="nb-NO"/>
           </a:p>
@@ -2011,7 +3343,7 @@
           <a:p>
             <a:fld id="{F995DA09-43F3-4E83-B0CE-65E66947C6FF}" type="datetimeFigureOut">
               <a:rPr lang="nb-NO" smtClean="0"/>
-              <a:t>13.10.2025</a:t>
+              <a:t>15.10.2025</a:t>
             </a:fld>
             <a:endParaRPr lang="nb-NO"/>
           </a:p>
@@ -2124,7 +3456,7 @@
           <a:p>
             <a:fld id="{F995DA09-43F3-4E83-B0CE-65E66947C6FF}" type="datetimeFigureOut">
               <a:rPr lang="nb-NO" smtClean="0"/>
-              <a:t>13.10.2025</a:t>
+              <a:t>15.10.2025</a:t>
             </a:fld>
             <a:endParaRPr lang="nb-NO"/>
           </a:p>
@@ -2437,7 +3769,7 @@
           <a:p>
             <a:fld id="{F995DA09-43F3-4E83-B0CE-65E66947C6FF}" type="datetimeFigureOut">
               <a:rPr lang="nb-NO" smtClean="0"/>
-              <a:t>13.10.2025</a:t>
+              <a:t>15.10.2025</a:t>
             </a:fld>
             <a:endParaRPr lang="nb-NO"/>
           </a:p>
@@ -2726,7 +4058,7 @@
           <a:p>
             <a:fld id="{F995DA09-43F3-4E83-B0CE-65E66947C6FF}" type="datetimeFigureOut">
               <a:rPr lang="nb-NO" smtClean="0"/>
-              <a:t>13.10.2025</a:t>
+              <a:t>15.10.2025</a:t>
             </a:fld>
             <a:endParaRPr lang="nb-NO"/>
           </a:p>
@@ -2969,7 +4301,7 @@
           <a:p>
             <a:fld id="{F995DA09-43F3-4E83-B0CE-65E66947C6FF}" type="datetimeFigureOut">
               <a:rPr lang="nb-NO" smtClean="0"/>
-              <a:t>13.10.2025</a:t>
+              <a:t>15.10.2025</a:t>
             </a:fld>
             <a:endParaRPr lang="nb-NO"/>
           </a:p>
@@ -3402,23 +4734,28 @@
             <p:ph type="ctrTitle"/>
           </p:nvPr>
         </p:nvSpPr>
-        <p:spPr/>
+        <p:spPr>
+          <a:xfrm>
+            <a:off x="1398165" y="457200"/>
+            <a:ext cx="9144000" cy="2387600"/>
+          </a:xfrm>
+        </p:spPr>
         <p:txBody>
           <a:bodyPr/>
           <a:lstStyle/>
           <a:p>
             <a:r>
-              <a:rPr lang="en-GB" dirty="0"/>
+              <a:rPr lang="en-GB"/>
               <a:t>Department Gathering</a:t>
             </a:r>
             <a:br>
-              <a:rPr lang="en-GB" dirty="0"/>
+              <a:rPr lang="en-GB"/>
             </a:br>
             <a:r>
-              <a:rPr lang="en-GB" dirty="0"/>
+              <a:rPr lang="en-GB"/>
               <a:t>October 2025</a:t>
             </a:r>
-            <a:endParaRPr lang="nb-NO" dirty="0"/>
+            <a:endParaRPr lang="nb-NO"/>
           </a:p>
         </p:txBody>
       </p:sp>
@@ -3440,53 +4777,50 @@
         </p:nvSpPr>
         <p:spPr>
           <a:xfrm>
-            <a:off x="1524000" y="3602038"/>
-            <a:ext cx="9144000" cy="2798762"/>
+            <a:off x="620785" y="3171039"/>
+            <a:ext cx="11123802" cy="3229761"/>
           </a:xfrm>
         </p:spPr>
         <p:txBody>
           <a:bodyPr>
-            <a:normAutofit fontScale="70000" lnSpcReduction="20000"/>
+            <a:normAutofit fontScale="92500"/>
           </a:bodyPr>
           <a:lstStyle/>
           <a:p>
-            <a:endParaRPr lang="en-GB" dirty="0"/>
-          </a:p>
-          <a:p>
-            <a:endParaRPr lang="en-GB" sz="4600" dirty="0"/>
-          </a:p>
-          <a:p>
-            <a:r>
-              <a:rPr lang="nb-NO" sz="4600" b="1" dirty="0" err="1"/>
+            <a:endParaRPr lang="en-GB"/>
+          </a:p>
+          <a:p>
+            <a:r>
+              <a:rPr lang="nb-NO" sz="4600" b="1" err="1"/>
               <a:t>Multi</a:t>
             </a:r>
             <a:r>
-              <a:rPr lang="nb-NO" sz="4600" b="1" dirty="0"/>
+              <a:rPr lang="nb-NO" sz="4600" b="1"/>
               <a:t>-agent AI </a:t>
             </a:r>
             <a:r>
-              <a:rPr lang="nb-NO" sz="4600" b="1" dirty="0" err="1"/>
+              <a:rPr lang="nb-NO" sz="4600" b="1" err="1"/>
               <a:t>with</a:t>
             </a:r>
             <a:r>
-              <a:rPr lang="nb-NO" sz="4600" b="1" dirty="0"/>
+              <a:rPr lang="nb-NO" sz="4600" b="1"/>
               <a:t> Autogen for Digital </a:t>
             </a:r>
             <a:r>
-              <a:rPr lang="nb-NO" sz="4600" b="1" dirty="0" err="1"/>
+              <a:rPr lang="nb-NO" sz="4600" b="1" err="1"/>
               <a:t>Twins</a:t>
             </a:r>
             <a:r>
-              <a:rPr lang="nb-NO" sz="4600" b="1" dirty="0"/>
+              <a:rPr lang="nb-NO" sz="4600" b="1"/>
               <a:t>​</a:t>
             </a:r>
           </a:p>
           <a:p>
-            <a:endParaRPr lang="en-GB" sz="4600" b="1" dirty="0"/>
-          </a:p>
-          <a:p>
-            <a:r>
-              <a:rPr lang="en-GB" sz="3800" dirty="0">
+            <a:endParaRPr lang="en-GB" sz="4600" b="1"/>
+          </a:p>
+          <a:p>
+            <a:r>
+              <a:rPr lang="en-GB" sz="4000">
                 <a:solidFill>
                   <a:schemeClr val="accent5">
                     <a:lumMod val="60000"/>
@@ -3494,24 +4828,19 @@
                   </a:schemeClr>
                 </a:solidFill>
               </a:rPr>
-              <a:t>Presentation by</a:t>
-            </a:r>
-          </a:p>
-          <a:p>
-            <a:r>
-              <a:rPr lang="en-GB" sz="3800" dirty="0">
-                <a:solidFill>
-                  <a:schemeClr val="accent5">
-                    <a:lumMod val="60000"/>
-                    <a:lumOff val="40000"/>
-                  </a:schemeClr>
-                </a:solidFill>
-              </a:rPr>
-              <a:t>Adela Nedisan Videsjorden</a:t>
-            </a:r>
-          </a:p>
-          <a:p>
-            <a:endParaRPr lang="nb-NO" dirty="0"/>
+              <a:t>TEAM 4</a:t>
+            </a:r>
+            <a:r>
+              <a:rPr lang="en-GB" sz="4000"/>
+              <a:t>✨</a:t>
+            </a:r>
+          </a:p>
+          <a:p>
+            <a:r>
+              <a:rPr lang="en-GB" sz="4000"/>
+              <a:t>(Sagar, An, Arne, Jan Erik, Adela, Tor Arne )</a:t>
+            </a:r>
+            <a:endParaRPr lang="nb-NO"/>
           </a:p>
         </p:txBody>
       </p:sp>
@@ -3528,12 +4857,18 @@
 </p:sld>
 </file>
 
-<file path=ppt/slides/slide2.xml><?xml version="1.0" encoding="utf-8"?>
+<file path=ppt/slides/slide10.xml><?xml version="1.0" encoding="utf-8"?>
 <p:sld xmlns:a="http://schemas.openxmlformats.org/drawingml/2006/main" xmlns:r="http://schemas.openxmlformats.org/officeDocument/2006/relationships" xmlns:p="http://schemas.openxmlformats.org/presentationml/2006/main">
   <p:cSld>
     <p:spTree>
       <p:nvGrpSpPr>
-        <p:cNvPr id="1" name=""/>
+        <p:cNvPr id="1" name="">
+          <a:extLst>
+            <a:ext uri="{FF2B5EF4-FFF2-40B4-BE49-F238E27FC236}">
+              <a16:creationId xmlns:a16="http://schemas.microsoft.com/office/drawing/2014/main" id="{DB56410C-5D66-F8C5-2968-C4122CBF5F4D}"/>
+            </a:ext>
+          </a:extLst>
+        </p:cNvPr>
         <p:cNvGrpSpPr/>
         <p:nvPr/>
       </p:nvGrpSpPr>
@@ -3550,7 +4885,7 @@
           <p:cNvPr id="2" name="Title 1">
             <a:extLst>
               <a:ext uri="{FF2B5EF4-FFF2-40B4-BE49-F238E27FC236}">
-                <a16:creationId xmlns:a16="http://schemas.microsoft.com/office/drawing/2014/main" id="{806DFB20-C5CB-19FF-B167-BF48384EFDFC}"/>
+                <a16:creationId xmlns:a16="http://schemas.microsoft.com/office/drawing/2014/main" id="{E6D61FA3-723B-AF54-D5E2-3AFF95C25FC2}"/>
               </a:ext>
             </a:extLst>
           </p:cNvPr>
@@ -3563,14 +4898,19 @@
         </p:nvSpPr>
         <p:spPr/>
         <p:txBody>
-          <a:bodyPr/>
+          <a:bodyPr>
+            <a:normAutofit/>
+          </a:bodyPr>
           <a:lstStyle/>
           <a:p>
             <a:r>
-              <a:rPr lang="en-GB" dirty="0"/>
-              <a:t>Outline</a:t>
-            </a:r>
-            <a:endParaRPr lang="nb-NO" dirty="0"/>
+              <a:rPr lang="en-GB"/>
+              <a:t>Discussions we’ve had</a:t>
+            </a:r>
+            <a:br>
+              <a:rPr lang="en-GB"/>
+            </a:br>
+            <a:endParaRPr lang="nb-NO"/>
           </a:p>
         </p:txBody>
       </p:sp>
@@ -3579,7 +4919,7 @@
           <p:cNvPr id="3" name="Content Placeholder 2">
             <a:extLst>
               <a:ext uri="{FF2B5EF4-FFF2-40B4-BE49-F238E27FC236}">
-                <a16:creationId xmlns:a16="http://schemas.microsoft.com/office/drawing/2014/main" id="{73311C9B-7B82-50BC-9C6E-6B334EFAF3CD}"/>
+                <a16:creationId xmlns:a16="http://schemas.microsoft.com/office/drawing/2014/main" id="{35904B02-32A4-530D-9F47-B2F2A1FC62B0}"/>
               </a:ext>
             </a:extLst>
           </p:cNvPr>
@@ -3590,161 +4930,402 @@
             <p:ph idx="1"/>
           </p:nvPr>
         </p:nvSpPr>
-        <p:spPr/>
+        <p:spPr>
+          <a:xfrm>
+            <a:off x="360727" y="1451295"/>
+            <a:ext cx="10993073" cy="4725668"/>
+          </a:xfrm>
+        </p:spPr>
         <p:txBody>
-          <a:bodyPr/>
+          <a:bodyPr>
+            <a:normAutofit/>
+          </a:bodyPr>
           <a:lstStyle/>
           <a:p>
-            <a:pPr marL="0" indent="0">
+            <a:pPr marL="914400" lvl="1" indent="-457200">
+              <a:buAutoNum type="arabicParenR"/>
+            </a:pPr>
+            <a:r>
+              <a:rPr lang="nb-NO" err="1">
+                <a:solidFill>
+                  <a:schemeClr val="accent5">
+                    <a:lumMod val="60000"/>
+                    <a:lumOff val="40000"/>
+                  </a:schemeClr>
+                </a:solidFill>
+              </a:rPr>
+              <a:t>What</a:t>
+            </a:r>
+            <a:r>
+              <a:rPr lang="nb-NO">
+                <a:solidFill>
+                  <a:schemeClr val="accent5">
+                    <a:lumMod val="60000"/>
+                    <a:lumOff val="40000"/>
+                  </a:schemeClr>
+                </a:solidFill>
+              </a:rPr>
+              <a:t> </a:t>
+            </a:r>
+            <a:r>
+              <a:rPr lang="nb-NO" err="1">
+                <a:solidFill>
+                  <a:schemeClr val="accent5">
+                    <a:lumMod val="60000"/>
+                    <a:lumOff val="40000"/>
+                  </a:schemeClr>
+                </a:solidFill>
+              </a:rPr>
+              <a:t>did</a:t>
+            </a:r>
+            <a:r>
+              <a:rPr lang="nb-NO">
+                <a:solidFill>
+                  <a:schemeClr val="accent5">
+                    <a:lumMod val="60000"/>
+                    <a:lumOff val="40000"/>
+                  </a:schemeClr>
+                </a:solidFill>
+              </a:rPr>
+              <a:t> </a:t>
+            </a:r>
+            <a:r>
+              <a:rPr lang="nb-NO" err="1">
+                <a:solidFill>
+                  <a:schemeClr val="accent5">
+                    <a:lumMod val="60000"/>
+                    <a:lumOff val="40000"/>
+                  </a:schemeClr>
+                </a:solidFill>
+              </a:rPr>
+              <a:t>the</a:t>
+            </a:r>
+            <a:r>
+              <a:rPr lang="nb-NO">
+                <a:solidFill>
+                  <a:schemeClr val="accent5">
+                    <a:lumMod val="60000"/>
+                    <a:lumOff val="40000"/>
+                  </a:schemeClr>
+                </a:solidFill>
+              </a:rPr>
+              <a:t> </a:t>
+            </a:r>
+            <a:r>
+              <a:rPr lang="nb-NO" err="1">
+                <a:solidFill>
+                  <a:schemeClr val="accent5">
+                    <a:lumMod val="60000"/>
+                    <a:lumOff val="40000"/>
+                  </a:schemeClr>
+                </a:solidFill>
+              </a:rPr>
+              <a:t>participants</a:t>
+            </a:r>
+            <a:r>
+              <a:rPr lang="nb-NO">
+                <a:solidFill>
+                  <a:schemeClr val="accent5">
+                    <a:lumMod val="60000"/>
+                    <a:lumOff val="40000"/>
+                  </a:schemeClr>
+                </a:solidFill>
+              </a:rPr>
+              <a:t> </a:t>
+            </a:r>
+            <a:r>
+              <a:rPr lang="nb-NO" err="1">
+                <a:solidFill>
+                  <a:schemeClr val="accent5">
+                    <a:lumMod val="60000"/>
+                    <a:lumOff val="40000"/>
+                  </a:schemeClr>
+                </a:solidFill>
+              </a:rPr>
+              <a:t>produce</a:t>
+            </a:r>
+            <a:r>
+              <a:rPr lang="nb-NO">
+                <a:solidFill>
+                  <a:schemeClr val="accent5">
+                    <a:lumMod val="60000"/>
+                    <a:lumOff val="40000"/>
+                  </a:schemeClr>
+                </a:solidFill>
+              </a:rPr>
+              <a:t>?</a:t>
+            </a:r>
+          </a:p>
+          <a:p>
+            <a:pPr marL="457200" lvl="1" indent="0">
               <a:buNone/>
             </a:pPr>
-            <a:r>
-              <a:rPr lang="en-GB" dirty="0"/>
-              <a:t>1. Introduction</a:t>
-            </a:r>
-          </a:p>
-          <a:p>
-            <a:pPr marL="0" indent="0">
+            <a:endParaRPr lang="nb-NO" sz="3200"/>
+          </a:p>
+          <a:p>
+            <a:pPr marL="457200" lvl="1" indent="0">
               <a:buNone/>
             </a:pPr>
             <a:r>
-              <a:rPr lang="en-GB" dirty="0"/>
-              <a:t>2. Challenge &amp; Case</a:t>
-            </a:r>
-          </a:p>
-          <a:p>
-            <a:pPr marL="0" indent="0">
+              <a:rPr lang="nb-NO" sz="3200" err="1"/>
+              <a:t>We</a:t>
+            </a:r>
+            <a:r>
+              <a:rPr lang="nb-NO" sz="3200"/>
+              <a:t> </a:t>
+            </a:r>
+            <a:r>
+              <a:rPr lang="nb-NO" sz="3200" err="1"/>
+              <a:t>followed</a:t>
+            </a:r>
+            <a:r>
+              <a:rPr lang="nb-NO" sz="3200"/>
+              <a:t> a pre-</a:t>
+            </a:r>
+            <a:r>
+              <a:rPr lang="nb-NO" sz="3200" err="1"/>
+              <a:t>planned</a:t>
+            </a:r>
+            <a:r>
+              <a:rPr lang="nb-NO" sz="3200"/>
+              <a:t> </a:t>
+            </a:r>
+            <a:r>
+              <a:rPr lang="nb-NO" sz="3200" err="1"/>
+              <a:t>workflow</a:t>
+            </a:r>
+            <a:r>
+              <a:rPr lang="nb-NO" sz="3200"/>
+              <a:t> for </a:t>
+            </a:r>
+            <a:r>
+              <a:rPr lang="nb-NO" sz="3200" err="1"/>
+              <a:t>this</a:t>
+            </a:r>
+            <a:r>
+              <a:rPr lang="nb-NO" sz="3200"/>
+              <a:t> workshop, </a:t>
+            </a:r>
+            <a:r>
+              <a:rPr lang="nb-NO" sz="3200" err="1"/>
+              <a:t>however</a:t>
+            </a:r>
+            <a:r>
+              <a:rPr lang="nb-NO" sz="3200"/>
+              <a:t> </a:t>
+            </a:r>
+            <a:r>
+              <a:rPr lang="nb-NO" sz="3200" err="1"/>
+              <a:t>we</a:t>
+            </a:r>
+            <a:r>
+              <a:rPr lang="nb-NO" sz="3200"/>
+              <a:t> </a:t>
+            </a:r>
+            <a:r>
+              <a:rPr lang="nb-NO" sz="3200" err="1"/>
+              <a:t>varied</a:t>
+            </a:r>
+            <a:r>
+              <a:rPr lang="nb-NO" sz="3200"/>
+              <a:t> </a:t>
+            </a:r>
+            <a:r>
+              <a:rPr lang="nb-NO" sz="3200" err="1"/>
+              <a:t>some</a:t>
+            </a:r>
+            <a:r>
+              <a:rPr lang="nb-NO" sz="3200"/>
+              <a:t> </a:t>
+            </a:r>
+            <a:r>
+              <a:rPr lang="nb-NO" sz="3200" err="1"/>
+              <a:t>of</a:t>
+            </a:r>
+            <a:r>
+              <a:rPr lang="nb-NO" sz="3200"/>
+              <a:t> </a:t>
+            </a:r>
+            <a:r>
+              <a:rPr lang="nb-NO" sz="3200" err="1"/>
+              <a:t>the</a:t>
+            </a:r>
+            <a:r>
+              <a:rPr lang="nb-NO" sz="3200"/>
+              <a:t> inputs and agent </a:t>
+            </a:r>
+            <a:r>
+              <a:rPr lang="nb-NO" sz="3200" err="1"/>
+              <a:t>configurations</a:t>
+            </a:r>
+            <a:r>
+              <a:rPr lang="nb-NO" sz="3200"/>
+              <a:t> to </a:t>
+            </a:r>
+            <a:r>
+              <a:rPr lang="nb-NO" sz="3200" err="1"/>
+              <a:t>observe</a:t>
+            </a:r>
+            <a:r>
+              <a:rPr lang="nb-NO" sz="3200"/>
+              <a:t> </a:t>
+            </a:r>
+            <a:r>
+              <a:rPr lang="nb-NO" sz="3200" err="1"/>
+              <a:t>how</a:t>
+            </a:r>
+            <a:r>
+              <a:rPr lang="nb-NO" sz="3200"/>
+              <a:t> </a:t>
+            </a:r>
+            <a:r>
+              <a:rPr lang="nb-NO" sz="3200" err="1"/>
+              <a:t>this</a:t>
+            </a:r>
+            <a:r>
+              <a:rPr lang="nb-NO" sz="3200"/>
+              <a:t> </a:t>
+            </a:r>
+            <a:r>
+              <a:rPr lang="nb-NO" sz="3200" err="1"/>
+              <a:t>impacts</a:t>
+            </a:r>
+            <a:r>
+              <a:rPr lang="nb-NO" sz="3200"/>
+              <a:t> </a:t>
+            </a:r>
+            <a:r>
+              <a:rPr lang="nb-NO" sz="3200" err="1"/>
+              <a:t>the</a:t>
+            </a:r>
+            <a:r>
+              <a:rPr lang="nb-NO" sz="3200"/>
+              <a:t> </a:t>
+            </a:r>
+            <a:r>
+              <a:rPr lang="nb-NO" sz="3200" err="1"/>
+              <a:t>behaviour</a:t>
+            </a:r>
+            <a:r>
+              <a:rPr lang="nb-NO" sz="3200"/>
+              <a:t> </a:t>
+            </a:r>
+            <a:r>
+              <a:rPr lang="nb-NO" sz="3200" err="1"/>
+              <a:t>of</a:t>
+            </a:r>
+            <a:r>
+              <a:rPr lang="nb-NO" sz="3200"/>
+              <a:t> </a:t>
+            </a:r>
+            <a:r>
+              <a:rPr lang="nb-NO" sz="3200" err="1"/>
+              <a:t>the</a:t>
+            </a:r>
+            <a:r>
+              <a:rPr lang="nb-NO" sz="3200"/>
+              <a:t> agents. </a:t>
+            </a:r>
+          </a:p>
+          <a:p>
+            <a:pPr marL="457200" lvl="1" indent="0">
               <a:buNone/>
             </a:pPr>
-            <a:r>
-              <a:rPr lang="en-GB" dirty="0"/>
-              <a:t>3. Setup</a:t>
-            </a:r>
-          </a:p>
-          <a:p>
-            <a:pPr marL="0" indent="0">
+            <a:endParaRPr lang="nb-NO" sz="3200"/>
+          </a:p>
+          <a:p>
+            <a:pPr marL="457200" lvl="1" indent="0">
               <a:buNone/>
             </a:pPr>
             <a:r>
-              <a:rPr lang="en-GB" dirty="0"/>
-              <a:t>4. Demonstration</a:t>
-            </a:r>
-          </a:p>
-          <a:p>
-            <a:pPr marL="0" indent="0">
+              <a:rPr lang="nb-NO" sz="3200"/>
+              <a:t>Knowledge </a:t>
+            </a:r>
+            <a:r>
+              <a:rPr lang="nb-NO" sz="3200" err="1"/>
+              <a:t>graphs</a:t>
+            </a:r>
+            <a:r>
+              <a:rPr lang="nb-NO" sz="3200"/>
+              <a:t> </a:t>
+            </a:r>
+            <a:r>
+              <a:rPr lang="nb-NO" sz="3200" err="1"/>
+              <a:t>were</a:t>
+            </a:r>
+            <a:r>
+              <a:rPr lang="nb-NO" sz="3200"/>
+              <a:t> </a:t>
+            </a:r>
+            <a:r>
+              <a:rPr lang="nb-NO" sz="3200" err="1"/>
+              <a:t>produced</a:t>
+            </a:r>
+            <a:r>
+              <a:rPr lang="nb-NO" sz="3200"/>
+              <a:t> </a:t>
+            </a:r>
+            <a:r>
+              <a:rPr lang="nb-NO" sz="3200" err="1"/>
+              <a:t>following</a:t>
+            </a:r>
+            <a:r>
+              <a:rPr lang="nb-NO" sz="3200"/>
+              <a:t> a DB </a:t>
+            </a:r>
+            <a:r>
+              <a:rPr lang="nb-NO" sz="3200" err="1"/>
+              <a:t>schema</a:t>
+            </a:r>
+            <a:r>
+              <a:rPr lang="nb-NO" sz="3200"/>
+              <a:t> </a:t>
+            </a:r>
+            <a:r>
+              <a:rPr lang="nb-NO" sz="3200" err="1"/>
+              <a:t>of</a:t>
+            </a:r>
+            <a:r>
+              <a:rPr lang="nb-NO" sz="3200"/>
+              <a:t> </a:t>
+            </a:r>
+            <a:r>
+              <a:rPr lang="nb-NO" sz="3200" err="1"/>
+              <a:t>choice</a:t>
+            </a:r>
+            <a:r>
+              <a:rPr lang="nb-NO" sz="3200"/>
+              <a:t>. </a:t>
+            </a:r>
+          </a:p>
+          <a:p>
+            <a:pPr marL="457200" lvl="1" indent="0">
               <a:buNone/>
             </a:pPr>
-            <a:r>
-              <a:rPr lang="en-GB" dirty="0"/>
-              <a:t>5. Discussion</a:t>
-            </a:r>
-          </a:p>
-          <a:p>
-            <a:pPr marL="0" indent="0">
+            <a:endParaRPr lang="nb-NO"/>
+          </a:p>
+          <a:p>
+            <a:pPr marL="457200" lvl="1" indent="0">
               <a:buNone/>
             </a:pPr>
-            <a:endParaRPr lang="en-GB" dirty="0"/>
-          </a:p>
-          <a:p>
-            <a:endParaRPr lang="en-GB" dirty="0"/>
-          </a:p>
-          <a:p>
-            <a:endParaRPr lang="nb-NO" dirty="0"/>
-          </a:p>
-        </p:txBody>
-      </p:sp>
-      <p:sp>
-        <p:nvSpPr>
-          <p:cNvPr id="4" name="Right Brace 3">
-            <a:extLst>
-              <a:ext uri="{FF2B5EF4-FFF2-40B4-BE49-F238E27FC236}">
-                <a16:creationId xmlns:a16="http://schemas.microsoft.com/office/drawing/2014/main" id="{73831B58-1F0D-8B79-F8DC-55647F14F10D}"/>
-              </a:ext>
-            </a:extLst>
-          </p:cNvPr>
-          <p:cNvSpPr/>
-          <p:nvPr/>
-        </p:nvSpPr>
-        <p:spPr>
-          <a:xfrm>
-            <a:off x="4563611" y="1825625"/>
-            <a:ext cx="192947" cy="2008144"/>
-          </a:xfrm>
-          <a:prstGeom prst="rightBrace">
-            <a:avLst/>
-          </a:prstGeom>
-        </p:spPr>
-        <p:style>
-          <a:lnRef idx="2">
-            <a:schemeClr val="accent1"/>
-          </a:lnRef>
-          <a:fillRef idx="0">
-            <a:schemeClr val="accent1"/>
-          </a:fillRef>
-          <a:effectRef idx="1">
-            <a:schemeClr val="accent1"/>
-          </a:effectRef>
-          <a:fontRef idx="minor">
-            <a:schemeClr val="tx1"/>
-          </a:fontRef>
-        </p:style>
-        <p:txBody>
-          <a:bodyPr rtlCol="0" anchor="ctr"/>
-          <a:lstStyle/>
-          <a:p>
-            <a:pPr algn="ctr"/>
-            <a:endParaRPr lang="nb-NO" dirty="0"/>
-          </a:p>
-        </p:txBody>
-      </p:sp>
-      <p:sp>
-        <p:nvSpPr>
-          <p:cNvPr id="5" name="TextBox 4">
-            <a:extLst>
-              <a:ext uri="{FF2B5EF4-FFF2-40B4-BE49-F238E27FC236}">
-                <a16:creationId xmlns:a16="http://schemas.microsoft.com/office/drawing/2014/main" id="{FDFFCE57-7B5B-F6DC-4463-5C377AF1B187}"/>
-              </a:ext>
-            </a:extLst>
-          </p:cNvPr>
-          <p:cNvSpPr txBox="1"/>
-          <p:nvPr/>
-        </p:nvSpPr>
-        <p:spPr>
-          <a:xfrm>
-            <a:off x="5528345" y="2684477"/>
-            <a:ext cx="2398477" cy="369332"/>
-          </a:xfrm>
-          <a:prstGeom prst="rect">
-            <a:avLst/>
-          </a:prstGeom>
-          <a:noFill/>
-        </p:spPr>
-        <p:txBody>
-          <a:bodyPr wrap="none" rtlCol="0">
-            <a:spAutoFit/>
-          </a:bodyPr>
-          <a:lstStyle/>
-          <a:p>
-            <a:r>
-              <a:rPr lang="en-GB" dirty="0"/>
-              <a:t>Inside the </a:t>
-            </a:r>
-            <a:r>
-              <a:rPr lang="en-GB" dirty="0" err="1"/>
-              <a:t>github</a:t>
-            </a:r>
-            <a:r>
-              <a:rPr lang="en-GB" dirty="0"/>
-              <a:t> repo!</a:t>
-            </a:r>
-            <a:endParaRPr lang="nb-NO" dirty="0"/>
+            <a:endParaRPr lang="nb-NO"/>
+          </a:p>
+          <a:p>
+            <a:pPr lvl="1"/>
+            <a:endParaRPr lang="nb-NO" sz="3200"/>
+          </a:p>
+          <a:p>
+            <a:pPr marL="457200" lvl="1" indent="0">
+              <a:buNone/>
+            </a:pPr>
+            <a:endParaRPr lang="nb-NO" sz="3200"/>
           </a:p>
         </p:txBody>
       </p:sp>
     </p:spTree>
     <p:extLst>
       <p:ext uri="{BB962C8B-B14F-4D97-AF65-F5344CB8AC3E}">
-        <p14:creationId xmlns:p14="http://schemas.microsoft.com/office/powerpoint/2010/main" val="3559493706"/>
+        <p14:creationId xmlns:p14="http://schemas.microsoft.com/office/powerpoint/2010/main" val="1762233370"/>
       </p:ext>
     </p:extLst>
   </p:cSld>
@@ -3754,7 +5335,7 @@
 </p:sld>
 </file>
 
-<file path=ppt/slides/slide3.xml><?xml version="1.0" encoding="utf-8"?>
+<file path=ppt/slides/slide11.xml><?xml version="1.0" encoding="utf-8"?>
 <p:sld xmlns:a="http://schemas.openxmlformats.org/drawingml/2006/main" xmlns:r="http://schemas.openxmlformats.org/officeDocument/2006/relationships" xmlns:p="http://schemas.openxmlformats.org/presentationml/2006/main">
   <p:cSld>
     <p:spTree>
@@ -3795,17 +5376,13 @@
           <a:lstStyle/>
           <a:p>
             <a:r>
-              <a:rPr lang="en-GB" dirty="0" err="1"/>
-              <a:t>EoD</a:t>
-            </a:r>
-            <a:r>
-              <a:rPr lang="en-GB" dirty="0"/>
-              <a:t>. Discussion</a:t>
+              <a:rPr lang="en-GB"/>
+              <a:t>Discussions we’ve had</a:t>
             </a:r>
             <a:br>
-              <a:rPr lang="en-GB" dirty="0"/>
+              <a:rPr lang="en-GB"/>
             </a:br>
-            <a:endParaRPr lang="nb-NO" dirty="0"/>
+            <a:endParaRPr lang="nb-NO"/>
           </a:p>
         </p:txBody>
       </p:sp>
@@ -3825,301 +5402,881 @@
             <p:ph idx="1"/>
           </p:nvPr>
         </p:nvSpPr>
-        <p:spPr/>
+        <p:spPr>
+          <a:xfrm>
+            <a:off x="360727" y="1451294"/>
+            <a:ext cx="11635530" cy="5184397"/>
+          </a:xfrm>
+        </p:spPr>
         <p:txBody>
-          <a:bodyPr/>
+          <a:bodyPr>
+            <a:normAutofit fontScale="85000" lnSpcReduction="20000"/>
+          </a:bodyPr>
           <a:lstStyle/>
           <a:p>
-            <a:pPr lvl="0"/>
-            <a:r>
-              <a:rPr lang="nb-NO" dirty="0" err="1"/>
-              <a:t>Experiences</a:t>
-            </a:r>
-            <a:r>
-              <a:rPr lang="nb-NO" dirty="0"/>
-              <a:t> </a:t>
-            </a:r>
-            <a:r>
-              <a:rPr lang="nb-NO" dirty="0" err="1"/>
-              <a:t>using</a:t>
-            </a:r>
-            <a:r>
-              <a:rPr lang="nb-NO" dirty="0"/>
-              <a:t> </a:t>
-            </a:r>
-            <a:r>
-              <a:rPr lang="nb-NO" dirty="0" err="1"/>
+            <a:pPr marL="457200" lvl="1" indent="0">
+              <a:buNone/>
+            </a:pPr>
+            <a:r>
+              <a:rPr lang="nb-NO">
+                <a:solidFill>
+                  <a:schemeClr val="accent5">
+                    <a:lumMod val="60000"/>
+                    <a:lumOff val="40000"/>
+                  </a:schemeClr>
+                </a:solidFill>
+              </a:rPr>
+              <a:t>2) </a:t>
+            </a:r>
+            <a:r>
+              <a:rPr lang="nb-NO" err="1">
+                <a:solidFill>
+                  <a:schemeClr val="accent5">
+                    <a:lumMod val="60000"/>
+                    <a:lumOff val="40000"/>
+                  </a:schemeClr>
+                </a:solidFill>
+              </a:rPr>
+              <a:t>What</a:t>
+            </a:r>
+            <a:r>
+              <a:rPr lang="nb-NO">
+                <a:solidFill>
+                  <a:schemeClr val="accent5">
+                    <a:lumMod val="60000"/>
+                    <a:lumOff val="40000"/>
+                  </a:schemeClr>
+                </a:solidFill>
+              </a:rPr>
+              <a:t> </a:t>
+            </a:r>
+            <a:r>
+              <a:rPr lang="nb-NO" err="1">
+                <a:solidFill>
+                  <a:schemeClr val="accent5">
+                    <a:lumMod val="60000"/>
+                    <a:lumOff val="40000"/>
+                  </a:schemeClr>
+                </a:solidFill>
+              </a:rPr>
+              <a:t>are</a:t>
+            </a:r>
+            <a:r>
+              <a:rPr lang="nb-NO">
+                <a:solidFill>
+                  <a:schemeClr val="accent5">
+                    <a:lumMod val="60000"/>
+                    <a:lumOff val="40000"/>
+                  </a:schemeClr>
+                </a:solidFill>
+              </a:rPr>
+              <a:t> </a:t>
+            </a:r>
+            <a:r>
+              <a:rPr lang="nb-NO" err="1">
+                <a:solidFill>
+                  <a:schemeClr val="accent5">
+                    <a:lumMod val="60000"/>
+                    <a:lumOff val="40000"/>
+                  </a:schemeClr>
+                </a:solidFill>
+              </a:rPr>
               <a:t>the</a:t>
             </a:r>
             <a:r>
-              <a:rPr lang="nb-NO" dirty="0"/>
-              <a:t> </a:t>
-            </a:r>
-            <a:r>
-              <a:rPr lang="nb-NO" dirty="0" err="1"/>
+              <a:rPr lang="nb-NO">
+                <a:solidFill>
+                  <a:schemeClr val="accent5">
+                    <a:lumMod val="60000"/>
+                    <a:lumOff val="40000"/>
+                  </a:schemeClr>
+                </a:solidFill>
+              </a:rPr>
+              <a:t> </a:t>
+            </a:r>
+            <a:r>
+              <a:rPr lang="nb-NO" err="1">
+                <a:solidFill>
+                  <a:schemeClr val="accent5">
+                    <a:lumMod val="60000"/>
+                    <a:lumOff val="40000"/>
+                  </a:schemeClr>
+                </a:solidFill>
+              </a:rPr>
+              <a:t>benefits</a:t>
+            </a:r>
+            <a:r>
+              <a:rPr lang="nb-NO">
+                <a:solidFill>
+                  <a:schemeClr val="accent5">
+                    <a:lumMod val="60000"/>
+                    <a:lumOff val="40000"/>
+                  </a:schemeClr>
+                </a:solidFill>
+              </a:rPr>
+              <a:t> and drawbacks?</a:t>
+            </a:r>
+          </a:p>
+          <a:p>
+            <a:pPr marL="457200" lvl="1" indent="0">
+              <a:buNone/>
+            </a:pPr>
+            <a:endParaRPr lang="nb-NO" b="1"/>
+          </a:p>
+          <a:p>
+            <a:pPr marL="457200" lvl="1" indent="0">
+              <a:buNone/>
+            </a:pPr>
+            <a:r>
+              <a:rPr lang="nb-NO" b="1"/>
+              <a:t>Benefits</a:t>
+            </a:r>
+            <a:r>
+              <a:rPr lang="nb-NO"/>
+              <a:t>: </a:t>
+            </a:r>
+          </a:p>
+          <a:p>
+            <a:pPr lvl="1"/>
+            <a:r>
+              <a:rPr lang="nb-NO" err="1"/>
+              <a:t>Relatively</a:t>
+            </a:r>
+            <a:r>
+              <a:rPr lang="nb-NO"/>
+              <a:t> </a:t>
+            </a:r>
+            <a:r>
+              <a:rPr lang="nb-NO" err="1"/>
+              <a:t>easy</a:t>
+            </a:r>
+            <a:r>
+              <a:rPr lang="nb-NO"/>
+              <a:t> to </a:t>
+            </a:r>
+            <a:r>
+              <a:rPr lang="nb-NO" err="1"/>
+              <a:t>implement</a:t>
+            </a:r>
+            <a:r>
+              <a:rPr lang="nb-NO"/>
+              <a:t>/prototype due to </a:t>
+            </a:r>
+            <a:r>
+              <a:rPr lang="nb-NO" err="1"/>
+              <a:t>high</a:t>
+            </a:r>
+            <a:r>
+              <a:rPr lang="nb-NO"/>
+              <a:t> </a:t>
+            </a:r>
+            <a:r>
+              <a:rPr lang="nb-NO" err="1"/>
+              <a:t>level</a:t>
+            </a:r>
+            <a:r>
+              <a:rPr lang="nb-NO"/>
+              <a:t> </a:t>
+            </a:r>
+            <a:r>
+              <a:rPr lang="nb-NO" err="1"/>
+              <a:t>of</a:t>
+            </a:r>
+            <a:r>
+              <a:rPr lang="nb-NO"/>
+              <a:t> </a:t>
+            </a:r>
+            <a:r>
+              <a:rPr lang="nb-NO" err="1"/>
+              <a:t>abstraction</a:t>
+            </a:r>
+            <a:r>
+              <a:rPr lang="nb-NO"/>
+              <a:t> (</a:t>
+            </a:r>
+            <a:r>
+              <a:rPr lang="nb-NO" err="1"/>
+              <a:t>low-code</a:t>
+            </a:r>
+            <a:r>
+              <a:rPr lang="nb-NO"/>
+              <a:t>).</a:t>
+            </a:r>
+          </a:p>
+          <a:p>
+            <a:pPr lvl="1"/>
+            <a:r>
+              <a:rPr lang="nb-NO" err="1"/>
+              <a:t>Can</a:t>
+            </a:r>
+            <a:r>
+              <a:rPr lang="nb-NO"/>
+              <a:t> </a:t>
+            </a:r>
+            <a:r>
+              <a:rPr lang="nb-NO" err="1"/>
+              <a:t>expand</a:t>
+            </a:r>
+            <a:r>
+              <a:rPr lang="nb-NO"/>
+              <a:t> to </a:t>
+            </a:r>
+            <a:r>
+              <a:rPr lang="nb-NO" err="1"/>
+              <a:t>large</a:t>
+            </a:r>
+            <a:r>
+              <a:rPr lang="nb-NO"/>
+              <a:t> </a:t>
+            </a:r>
+            <a:r>
+              <a:rPr lang="nb-NO" err="1"/>
+              <a:t>agentic</a:t>
+            </a:r>
+            <a:r>
+              <a:rPr lang="nb-NO"/>
+              <a:t> </a:t>
+            </a:r>
+            <a:r>
+              <a:rPr lang="nb-NO" err="1"/>
+              <a:t>architectures</a:t>
+            </a:r>
+            <a:r>
+              <a:rPr lang="nb-NO"/>
+              <a:t> due to </a:t>
+            </a:r>
+            <a:r>
+              <a:rPr lang="nb-NO" err="1"/>
+              <a:t>nesting</a:t>
+            </a:r>
+            <a:r>
+              <a:rPr lang="nb-NO"/>
+              <a:t> </a:t>
+            </a:r>
+            <a:r>
+              <a:rPr lang="nb-NO" err="1"/>
+              <a:t>possiblities</a:t>
+            </a:r>
+            <a:r>
+              <a:rPr lang="nb-NO"/>
+              <a:t>: </a:t>
+            </a:r>
+            <a:r>
+              <a:rPr lang="nb-NO" err="1"/>
+              <a:t>wrapping</a:t>
+            </a:r>
+            <a:r>
+              <a:rPr lang="nb-NO"/>
+              <a:t> agents as Tools. </a:t>
+            </a:r>
+          </a:p>
+          <a:p>
+            <a:pPr lvl="1"/>
+            <a:r>
+              <a:rPr lang="nb-NO" err="1"/>
+              <a:t>LLMs</a:t>
+            </a:r>
+            <a:r>
+              <a:rPr lang="nb-NO"/>
+              <a:t> </a:t>
+            </a:r>
+            <a:r>
+              <a:rPr lang="nb-NO" err="1"/>
+              <a:t>get</a:t>
+            </a:r>
+            <a:r>
+              <a:rPr lang="nb-NO"/>
+              <a:t> </a:t>
+            </a:r>
+            <a:r>
+              <a:rPr lang="nb-NO" err="1"/>
               <a:t>tool</a:t>
             </a:r>
             <a:r>
-              <a:rPr lang="nb-NO" dirty="0"/>
-              <a:t>(s):</a:t>
-            </a:r>
-            <a:endParaRPr lang="nb-NO" sz="3600" dirty="0"/>
+              <a:rPr lang="nb-NO"/>
+              <a:t> </a:t>
+            </a:r>
+            <a:r>
+              <a:rPr lang="nb-NO" err="1"/>
+              <a:t>access</a:t>
+            </a:r>
+            <a:r>
+              <a:rPr lang="nb-NO"/>
+              <a:t> and </a:t>
+            </a:r>
+            <a:r>
+              <a:rPr lang="nb-NO" err="1"/>
+              <a:t>ability</a:t>
+            </a:r>
+            <a:r>
+              <a:rPr lang="nb-NO"/>
+              <a:t> to </a:t>
+            </a:r>
+            <a:r>
+              <a:rPr lang="nb-NO" err="1"/>
+              <a:t>perform</a:t>
+            </a:r>
+            <a:r>
+              <a:rPr lang="nb-NO"/>
+              <a:t> </a:t>
+            </a:r>
+            <a:r>
+              <a:rPr lang="nb-NO" err="1"/>
+              <a:t>actions</a:t>
+            </a:r>
+            <a:r>
+              <a:rPr lang="nb-NO"/>
+              <a:t> (</a:t>
+            </a:r>
+            <a:r>
+              <a:rPr lang="nb-NO" err="1"/>
+              <a:t>executing</a:t>
+            </a:r>
+            <a:r>
+              <a:rPr lang="nb-NO"/>
+              <a:t> </a:t>
+            </a:r>
+            <a:r>
+              <a:rPr lang="nb-NO" err="1"/>
+              <a:t>functions</a:t>
+            </a:r>
+            <a:r>
+              <a:rPr lang="nb-NO"/>
+              <a:t> e.g. API </a:t>
+            </a:r>
+            <a:r>
+              <a:rPr lang="nb-NO" err="1"/>
+              <a:t>call</a:t>
+            </a:r>
+            <a:r>
+              <a:rPr lang="nb-NO"/>
+              <a:t>). </a:t>
+            </a:r>
           </a:p>
           <a:p>
             <a:pPr lvl="1"/>
             <a:r>
-              <a:rPr lang="nb-NO" dirty="0" err="1"/>
-              <a:t>What</a:t>
-            </a:r>
-            <a:r>
-              <a:rPr lang="nb-NO" dirty="0"/>
-              <a:t> </a:t>
-            </a:r>
-            <a:r>
-              <a:rPr lang="nb-NO" dirty="0" err="1"/>
+              <a:rPr lang="nb-NO"/>
+              <a:t>Good for </a:t>
+            </a:r>
+            <a:r>
+              <a:rPr lang="nb-NO" err="1"/>
+              <a:t>building</a:t>
+            </a:r>
+            <a:r>
+              <a:rPr lang="nb-NO"/>
+              <a:t> </a:t>
+            </a:r>
+            <a:r>
+              <a:rPr lang="nb-NO" err="1"/>
+              <a:t>autonomous</a:t>
+            </a:r>
+            <a:r>
+              <a:rPr lang="nb-NO"/>
+              <a:t> </a:t>
+            </a:r>
+            <a:r>
+              <a:rPr lang="nb-NO" err="1"/>
+              <a:t>solution</a:t>
+            </a:r>
+            <a:r>
+              <a:rPr lang="nb-NO"/>
+              <a:t>.</a:t>
+            </a:r>
+          </a:p>
+          <a:p>
+            <a:pPr lvl="1"/>
+            <a:r>
+              <a:rPr lang="nb-NO"/>
+              <a:t>Knowledge </a:t>
+            </a:r>
+            <a:r>
+              <a:rPr lang="nb-NO" err="1"/>
+              <a:t>graphs</a:t>
+            </a:r>
+            <a:r>
+              <a:rPr lang="nb-NO"/>
+              <a:t> </a:t>
+            </a:r>
+            <a:r>
+              <a:rPr lang="nb-NO" err="1"/>
+              <a:t>are</a:t>
+            </a:r>
+            <a:r>
+              <a:rPr lang="nb-NO"/>
+              <a:t> versatile.</a:t>
+            </a:r>
+          </a:p>
+          <a:p>
+            <a:pPr marL="457200" lvl="1" indent="0">
+              <a:buNone/>
+            </a:pPr>
+            <a:endParaRPr lang="nb-NO" b="1"/>
+          </a:p>
+          <a:p>
+            <a:pPr marL="457200" lvl="1" indent="0">
+              <a:buNone/>
+            </a:pPr>
+            <a:r>
+              <a:rPr lang="nb-NO" b="1"/>
+              <a:t>Drawbacks</a:t>
+            </a:r>
+            <a:r>
+              <a:rPr lang="nb-NO"/>
+              <a:t>:</a:t>
+            </a:r>
+          </a:p>
+          <a:p>
+            <a:pPr lvl="1"/>
+            <a:r>
+              <a:rPr lang="nb-NO"/>
+              <a:t>Hard to </a:t>
+            </a:r>
+            <a:r>
+              <a:rPr lang="nb-NO" err="1"/>
+              <a:t>fully</a:t>
+            </a:r>
+            <a:r>
+              <a:rPr lang="nb-NO"/>
+              <a:t> </a:t>
+            </a:r>
+            <a:r>
+              <a:rPr lang="nb-NO" err="1"/>
+              <a:t>control</a:t>
+            </a:r>
+            <a:r>
+              <a:rPr lang="nb-NO"/>
+              <a:t> </a:t>
+            </a:r>
+            <a:r>
+              <a:rPr lang="nb-NO" err="1"/>
+              <a:t>behaviour</a:t>
+            </a:r>
+            <a:r>
+              <a:rPr lang="nb-NO"/>
+              <a:t> and </a:t>
+            </a:r>
+            <a:r>
+              <a:rPr lang="nb-NO" err="1"/>
+              <a:t>sensitivity</a:t>
+            </a:r>
+            <a:r>
+              <a:rPr lang="nb-NO"/>
+              <a:t> to </a:t>
+            </a:r>
+            <a:r>
+              <a:rPr lang="nb-NO" err="1"/>
+              <a:t>small</a:t>
+            </a:r>
+            <a:r>
+              <a:rPr lang="nb-NO"/>
+              <a:t> </a:t>
+            </a:r>
+            <a:r>
+              <a:rPr lang="nb-NO" err="1"/>
+              <a:t>changes</a:t>
+            </a:r>
+            <a:r>
+              <a:rPr lang="nb-NO"/>
+              <a:t>.</a:t>
+            </a:r>
+          </a:p>
+          <a:p>
+            <a:pPr lvl="1"/>
+            <a:r>
+              <a:rPr lang="nb-NO" err="1"/>
+              <a:t>Hallucinations</a:t>
+            </a:r>
+            <a:endParaRPr lang="nb-NO"/>
+          </a:p>
+          <a:p>
+            <a:pPr lvl="1"/>
+            <a:r>
+              <a:rPr lang="nb-NO"/>
+              <a:t>Debugging </a:t>
+            </a:r>
+            <a:r>
+              <a:rPr lang="nb-NO" err="1"/>
+              <a:t>takes</a:t>
+            </a:r>
+            <a:r>
+              <a:rPr lang="nb-NO"/>
+              <a:t> </a:t>
+            </a:r>
+            <a:r>
+              <a:rPr lang="nb-NO" err="1"/>
+              <a:t>some</a:t>
+            </a:r>
+            <a:r>
+              <a:rPr lang="nb-NO"/>
+              <a:t> time</a:t>
+            </a:r>
+          </a:p>
+          <a:p>
+            <a:pPr marL="457200" lvl="1" indent="0">
+              <a:buNone/>
+            </a:pPr>
+            <a:endParaRPr lang="nb-NO">
+              <a:solidFill>
+                <a:schemeClr val="accent5">
+                  <a:lumMod val="60000"/>
+                  <a:lumOff val="40000"/>
+                </a:schemeClr>
+              </a:solidFill>
+            </a:endParaRPr>
+          </a:p>
+          <a:p>
+            <a:pPr marL="457200" lvl="1" indent="0">
+              <a:buNone/>
+            </a:pPr>
+            <a:r>
+              <a:rPr lang="nb-NO">
+                <a:solidFill>
+                  <a:schemeClr val="accent5">
+                    <a:lumMod val="60000"/>
+                    <a:lumOff val="40000"/>
+                  </a:schemeClr>
+                </a:solidFill>
+              </a:rPr>
+              <a:t>3) Are </a:t>
+            </a:r>
+            <a:r>
+              <a:rPr lang="nb-NO" err="1">
+                <a:solidFill>
+                  <a:schemeClr val="accent5">
+                    <a:lumMod val="60000"/>
+                    <a:lumOff val="40000"/>
+                  </a:schemeClr>
+                </a:solidFill>
+              </a:rPr>
+              <a:t>there</a:t>
+            </a:r>
+            <a:r>
+              <a:rPr lang="nb-NO">
+                <a:solidFill>
+                  <a:schemeClr val="accent5">
+                    <a:lumMod val="60000"/>
+                    <a:lumOff val="40000"/>
+                  </a:schemeClr>
+                </a:solidFill>
+              </a:rPr>
+              <a:t> </a:t>
+            </a:r>
+            <a:r>
+              <a:rPr lang="nb-NO" err="1">
+                <a:solidFill>
+                  <a:schemeClr val="accent5">
+                    <a:lumMod val="60000"/>
+                    <a:lumOff val="40000"/>
+                  </a:schemeClr>
+                </a:solidFill>
+              </a:rPr>
+              <a:t>variations</a:t>
+            </a:r>
+            <a:r>
+              <a:rPr lang="nb-NO">
+                <a:solidFill>
+                  <a:schemeClr val="accent5">
+                    <a:lumMod val="60000"/>
+                    <a:lumOff val="40000"/>
+                  </a:schemeClr>
+                </a:solidFill>
+              </a:rPr>
+              <a:t> in </a:t>
+            </a:r>
+            <a:r>
+              <a:rPr lang="nb-NO" err="1">
+                <a:solidFill>
+                  <a:schemeClr val="accent5">
+                    <a:lumMod val="60000"/>
+                    <a:lumOff val="40000"/>
+                  </a:schemeClr>
+                </a:solidFill>
+              </a:rPr>
+              <a:t>the</a:t>
+            </a:r>
+            <a:r>
+              <a:rPr lang="nb-NO">
+                <a:solidFill>
+                  <a:schemeClr val="accent5">
+                    <a:lumMod val="60000"/>
+                    <a:lumOff val="40000"/>
+                  </a:schemeClr>
+                </a:solidFill>
+              </a:rPr>
+              <a:t> </a:t>
+            </a:r>
+            <a:r>
+              <a:rPr lang="nb-NO" err="1">
+                <a:solidFill>
+                  <a:schemeClr val="accent5">
+                    <a:lumMod val="60000"/>
+                    <a:lumOff val="40000"/>
+                  </a:schemeClr>
+                </a:solidFill>
+              </a:rPr>
+              <a:t>results</a:t>
+            </a:r>
+            <a:r>
+              <a:rPr lang="nb-NO">
+                <a:solidFill>
+                  <a:schemeClr val="accent5">
+                    <a:lumMod val="60000"/>
+                    <a:lumOff val="40000"/>
+                  </a:schemeClr>
+                </a:solidFill>
+              </a:rPr>
+              <a:t> </a:t>
+            </a:r>
+            <a:r>
+              <a:rPr lang="nb-NO" err="1">
+                <a:solidFill>
+                  <a:schemeClr val="accent5">
+                    <a:lumMod val="60000"/>
+                    <a:lumOff val="40000"/>
+                  </a:schemeClr>
+                </a:solidFill>
+              </a:rPr>
+              <a:t>among</a:t>
+            </a:r>
+            <a:r>
+              <a:rPr lang="nb-NO">
+                <a:solidFill>
+                  <a:schemeClr val="accent5">
+                    <a:lumMod val="60000"/>
+                    <a:lumOff val="40000"/>
+                  </a:schemeClr>
+                </a:solidFill>
+              </a:rPr>
+              <a:t> </a:t>
+            </a:r>
+            <a:r>
+              <a:rPr lang="nb-NO" err="1">
+                <a:solidFill>
+                  <a:schemeClr val="accent5">
+                    <a:lumMod val="60000"/>
+                    <a:lumOff val="40000"/>
+                  </a:schemeClr>
+                </a:solidFill>
+              </a:rPr>
+              <a:t>participants</a:t>
+            </a:r>
+            <a:r>
+              <a:rPr lang="nb-NO">
+                <a:solidFill>
+                  <a:schemeClr val="accent5">
+                    <a:lumMod val="60000"/>
+                    <a:lumOff val="40000"/>
+                  </a:schemeClr>
+                </a:solidFill>
+              </a:rPr>
+              <a:t> – and </a:t>
+            </a:r>
+            <a:r>
+              <a:rPr lang="nb-NO" err="1">
+                <a:solidFill>
+                  <a:schemeClr val="accent5">
+                    <a:lumMod val="60000"/>
+                    <a:lumOff val="40000"/>
+                  </a:schemeClr>
+                </a:solidFill>
+              </a:rPr>
+              <a:t>if</a:t>
+            </a:r>
+            <a:r>
+              <a:rPr lang="nb-NO">
+                <a:solidFill>
+                  <a:schemeClr val="accent5">
+                    <a:lumMod val="60000"/>
+                    <a:lumOff val="40000"/>
+                  </a:schemeClr>
+                </a:solidFill>
+              </a:rPr>
+              <a:t> so, </a:t>
+            </a:r>
+            <a:r>
+              <a:rPr lang="nb-NO" err="1">
+                <a:solidFill>
+                  <a:schemeClr val="accent5">
+                    <a:lumMod val="60000"/>
+                    <a:lumOff val="40000"/>
+                  </a:schemeClr>
+                </a:solidFill>
+              </a:rPr>
+              <a:t>why</a:t>
+            </a:r>
+            <a:r>
+              <a:rPr lang="nb-NO">
+                <a:solidFill>
+                  <a:schemeClr val="accent5">
+                    <a:lumMod val="60000"/>
+                    <a:lumOff val="40000"/>
+                  </a:schemeClr>
+                </a:solidFill>
+              </a:rPr>
+              <a:t>?</a:t>
+            </a:r>
+          </a:p>
+          <a:p>
+            <a:pPr marL="457200" lvl="1" indent="0">
+              <a:buNone/>
+            </a:pPr>
+            <a:r>
+              <a:rPr lang="nb-NO"/>
+              <a:t>In </a:t>
+            </a:r>
+            <a:r>
+              <a:rPr lang="nb-NO" err="1"/>
+              <a:t>practice</a:t>
+            </a:r>
+            <a:r>
+              <a:rPr lang="nb-NO"/>
+              <a:t> </a:t>
+            </a:r>
+            <a:r>
+              <a:rPr lang="nb-NO" err="1"/>
+              <a:t>we</a:t>
+            </a:r>
+            <a:r>
+              <a:rPr lang="nb-NO"/>
+              <a:t> </a:t>
+            </a:r>
+            <a:r>
+              <a:rPr lang="nb-NO" err="1"/>
               <a:t>did</a:t>
             </a:r>
             <a:r>
-              <a:rPr lang="nb-NO" dirty="0"/>
-              <a:t> </a:t>
-            </a:r>
-            <a:r>
-              <a:rPr lang="nb-NO" dirty="0" err="1"/>
+              <a:rPr lang="nb-NO"/>
+              <a:t> </a:t>
+            </a:r>
+            <a:r>
+              <a:rPr lang="nb-NO" err="1"/>
+              <a:t>observe</a:t>
+            </a:r>
+            <a:r>
+              <a:rPr lang="nb-NO"/>
+              <a:t> different outputs </a:t>
+            </a:r>
+            <a:r>
+              <a:rPr lang="nb-NO" err="1"/>
+              <a:t>because</a:t>
+            </a:r>
+            <a:r>
+              <a:rPr lang="nb-NO"/>
+              <a:t> </a:t>
+            </a:r>
+            <a:r>
+              <a:rPr lang="nb-NO" err="1"/>
+              <a:t>of</a:t>
+            </a:r>
+            <a:r>
+              <a:rPr lang="nb-NO"/>
+              <a:t> </a:t>
+            </a:r>
+            <a:r>
+              <a:rPr lang="nb-NO" err="1"/>
               <a:t>the</a:t>
             </a:r>
             <a:r>
-              <a:rPr lang="nb-NO" dirty="0"/>
-              <a:t> </a:t>
-            </a:r>
-            <a:r>
-              <a:rPr lang="nb-NO" dirty="0" err="1"/>
-              <a:t>participants</a:t>
-            </a:r>
-            <a:r>
-              <a:rPr lang="nb-NO" dirty="0"/>
-              <a:t> </a:t>
-            </a:r>
-            <a:r>
-              <a:rPr lang="nb-NO" dirty="0" err="1"/>
-              <a:t>produce</a:t>
-            </a:r>
-            <a:r>
-              <a:rPr lang="nb-NO" dirty="0"/>
-              <a:t>?</a:t>
-            </a:r>
-            <a:endParaRPr lang="nb-NO" sz="3200" dirty="0"/>
+              <a:rPr lang="nb-NO"/>
+              <a:t> non-</a:t>
+            </a:r>
+            <a:r>
+              <a:rPr lang="nb-NO" err="1"/>
+              <a:t>determinism</a:t>
+            </a:r>
+            <a:r>
+              <a:rPr lang="nb-NO"/>
+              <a:t> </a:t>
+            </a:r>
+            <a:r>
+              <a:rPr lang="nb-NO" err="1"/>
+              <a:t>of</a:t>
+            </a:r>
+            <a:r>
+              <a:rPr lang="nb-NO"/>
+              <a:t> </a:t>
+            </a:r>
+            <a:r>
+              <a:rPr lang="nb-NO" err="1"/>
+              <a:t>the</a:t>
+            </a:r>
+            <a:r>
+              <a:rPr lang="nb-NO"/>
+              <a:t> </a:t>
+            </a:r>
+            <a:r>
+              <a:rPr lang="nb-NO" err="1"/>
+              <a:t>tool</a:t>
+            </a:r>
+            <a:r>
+              <a:rPr lang="nb-NO"/>
+              <a:t>, </a:t>
+            </a:r>
+            <a:r>
+              <a:rPr lang="nb-NO" err="1"/>
+              <a:t>even</a:t>
+            </a:r>
+            <a:r>
+              <a:rPr lang="nb-NO"/>
+              <a:t> </a:t>
+            </a:r>
+            <a:r>
+              <a:rPr lang="nb-NO" err="1"/>
+              <a:t>when</a:t>
+            </a:r>
+            <a:r>
+              <a:rPr lang="nb-NO"/>
+              <a:t> </a:t>
+            </a:r>
+            <a:r>
+              <a:rPr lang="nb-NO" err="1"/>
+              <a:t>running</a:t>
+            </a:r>
+            <a:r>
+              <a:rPr lang="nb-NO"/>
+              <a:t> </a:t>
+            </a:r>
+            <a:r>
+              <a:rPr lang="nb-NO" err="1"/>
+              <a:t>the</a:t>
+            </a:r>
+            <a:r>
+              <a:rPr lang="nb-NO"/>
+              <a:t> same </a:t>
+            </a:r>
+            <a:r>
+              <a:rPr lang="nb-NO" err="1"/>
+              <a:t>query</a:t>
+            </a:r>
+            <a:r>
+              <a:rPr lang="nb-NO"/>
+              <a:t> and </a:t>
+            </a:r>
+            <a:r>
+              <a:rPr lang="nb-NO" err="1"/>
+              <a:t>configuration</a:t>
+            </a:r>
+            <a:r>
+              <a:rPr lang="nb-NO"/>
+              <a:t>.</a:t>
+            </a:r>
+          </a:p>
+          <a:p>
+            <a:pPr marL="457200" lvl="1" indent="0">
+              <a:buNone/>
+            </a:pPr>
+            <a:endParaRPr lang="nb-NO"/>
           </a:p>
           <a:p>
             <a:pPr lvl="1"/>
-            <a:r>
-              <a:rPr lang="nb-NO" dirty="0" err="1"/>
-              <a:t>What</a:t>
-            </a:r>
-            <a:r>
-              <a:rPr lang="nb-NO" dirty="0"/>
-              <a:t> </a:t>
-            </a:r>
-            <a:r>
-              <a:rPr lang="nb-NO" dirty="0" err="1"/>
-              <a:t>are</a:t>
-            </a:r>
-            <a:r>
-              <a:rPr lang="nb-NO" dirty="0"/>
-              <a:t> </a:t>
-            </a:r>
-            <a:r>
-              <a:rPr lang="nb-NO" dirty="0" err="1"/>
-              <a:t>the</a:t>
-            </a:r>
-            <a:r>
-              <a:rPr lang="nb-NO" dirty="0"/>
-              <a:t> </a:t>
-            </a:r>
-            <a:r>
-              <a:rPr lang="nb-NO" dirty="0" err="1"/>
-              <a:t>benefits</a:t>
-            </a:r>
-            <a:r>
-              <a:rPr lang="nb-NO" dirty="0"/>
-              <a:t> and drawbacks?</a:t>
-            </a:r>
-            <a:endParaRPr lang="nb-NO" sz="3200" dirty="0"/>
-          </a:p>
-          <a:p>
-            <a:pPr lvl="1"/>
-            <a:r>
-              <a:rPr lang="nb-NO" dirty="0"/>
-              <a:t>Are </a:t>
-            </a:r>
-            <a:r>
-              <a:rPr lang="nb-NO" dirty="0" err="1"/>
-              <a:t>there</a:t>
-            </a:r>
-            <a:r>
-              <a:rPr lang="nb-NO" dirty="0"/>
-              <a:t> </a:t>
-            </a:r>
-            <a:r>
-              <a:rPr lang="nb-NO" dirty="0" err="1"/>
-              <a:t>variations</a:t>
-            </a:r>
-            <a:r>
-              <a:rPr lang="nb-NO" dirty="0"/>
-              <a:t> in </a:t>
-            </a:r>
-            <a:r>
-              <a:rPr lang="nb-NO" dirty="0" err="1"/>
-              <a:t>the</a:t>
-            </a:r>
-            <a:r>
-              <a:rPr lang="nb-NO" dirty="0"/>
-              <a:t> </a:t>
-            </a:r>
-            <a:r>
-              <a:rPr lang="nb-NO" dirty="0" err="1"/>
-              <a:t>results</a:t>
-            </a:r>
-            <a:r>
-              <a:rPr lang="nb-NO" dirty="0"/>
-              <a:t> </a:t>
-            </a:r>
-            <a:r>
-              <a:rPr lang="nb-NO" dirty="0" err="1"/>
-              <a:t>among</a:t>
-            </a:r>
-            <a:r>
-              <a:rPr lang="nb-NO" dirty="0"/>
-              <a:t> </a:t>
-            </a:r>
-            <a:r>
-              <a:rPr lang="nb-NO" dirty="0" err="1"/>
-              <a:t>participants</a:t>
-            </a:r>
-            <a:r>
-              <a:rPr lang="nb-NO" dirty="0"/>
-              <a:t> – and </a:t>
-            </a:r>
-            <a:r>
-              <a:rPr lang="nb-NO" dirty="0" err="1"/>
-              <a:t>if</a:t>
-            </a:r>
-            <a:r>
-              <a:rPr lang="nb-NO" dirty="0"/>
-              <a:t> so, </a:t>
-            </a:r>
-            <a:r>
-              <a:rPr lang="nb-NO" dirty="0" err="1"/>
-              <a:t>why</a:t>
-            </a:r>
-            <a:r>
-              <a:rPr lang="nb-NO" dirty="0"/>
-              <a:t>?</a:t>
-            </a:r>
-            <a:endParaRPr lang="nb-NO" sz="3200" dirty="0"/>
-          </a:p>
-          <a:p>
-            <a:pPr lvl="0"/>
-            <a:r>
-              <a:rPr lang="nb-NO" dirty="0" err="1"/>
-              <a:t>What</a:t>
-            </a:r>
-            <a:r>
-              <a:rPr lang="nb-NO" dirty="0"/>
-              <a:t> </a:t>
-            </a:r>
-            <a:r>
-              <a:rPr lang="nb-NO" dirty="0" err="1"/>
-              <a:t>does</a:t>
-            </a:r>
-            <a:r>
-              <a:rPr lang="nb-NO" dirty="0"/>
-              <a:t> </a:t>
-            </a:r>
-            <a:r>
-              <a:rPr lang="nb-NO" dirty="0" err="1"/>
-              <a:t>the</a:t>
-            </a:r>
-            <a:r>
-              <a:rPr lang="nb-NO" dirty="0"/>
-              <a:t> </a:t>
-            </a:r>
-            <a:r>
-              <a:rPr lang="nb-NO" dirty="0" err="1"/>
-              <a:t>department</a:t>
-            </a:r>
-            <a:r>
-              <a:rPr lang="nb-NO" dirty="0"/>
-              <a:t> </a:t>
-            </a:r>
-            <a:r>
-              <a:rPr lang="nb-NO" dirty="0" err="1"/>
-              <a:t>need</a:t>
-            </a:r>
-            <a:r>
-              <a:rPr lang="nb-NO" dirty="0"/>
-              <a:t> to do to </a:t>
-            </a:r>
-            <a:r>
-              <a:rPr lang="nb-NO" dirty="0" err="1"/>
-              <a:t>adopt</a:t>
-            </a:r>
-            <a:r>
-              <a:rPr lang="nb-NO" dirty="0"/>
-              <a:t> </a:t>
-            </a:r>
-            <a:r>
-              <a:rPr lang="nb-NO" dirty="0" err="1"/>
-              <a:t>these</a:t>
-            </a:r>
-            <a:r>
-              <a:rPr lang="nb-NO" dirty="0"/>
-              <a:t> </a:t>
-            </a:r>
-            <a:r>
-              <a:rPr lang="nb-NO" dirty="0" err="1"/>
-              <a:t>tools</a:t>
-            </a:r>
-            <a:r>
-              <a:rPr lang="nb-NO" dirty="0"/>
-              <a:t>?</a:t>
-            </a:r>
-            <a:endParaRPr lang="nb-NO" sz="3600" dirty="0"/>
-          </a:p>
-          <a:p>
-            <a:pPr lvl="0"/>
-            <a:r>
-              <a:rPr lang="nb-NO" dirty="0" err="1"/>
-              <a:t>Any</a:t>
-            </a:r>
-            <a:r>
-              <a:rPr lang="nb-NO" dirty="0"/>
-              <a:t> </a:t>
-            </a:r>
-            <a:r>
-              <a:rPr lang="nb-NO" dirty="0" err="1"/>
-              <a:t>other</a:t>
-            </a:r>
-            <a:r>
-              <a:rPr lang="nb-NO" dirty="0"/>
-              <a:t> </a:t>
-            </a:r>
-            <a:r>
-              <a:rPr lang="nb-NO" dirty="0" err="1"/>
-              <a:t>barriers</a:t>
-            </a:r>
-            <a:r>
-              <a:rPr lang="nb-NO" dirty="0"/>
-              <a:t> to </a:t>
-            </a:r>
-            <a:r>
-              <a:rPr lang="nb-NO" dirty="0" err="1"/>
-              <a:t>implementation</a:t>
-            </a:r>
-            <a:r>
-              <a:rPr lang="nb-NO" dirty="0"/>
-              <a:t>.</a:t>
-            </a:r>
-            <a:endParaRPr lang="nb-NO" sz="3600" dirty="0"/>
+            <a:endParaRPr lang="nb-NO" sz="3200"/>
+          </a:p>
+          <a:p>
+            <a:pPr marL="457200" lvl="1" indent="0">
+              <a:buNone/>
+            </a:pPr>
+            <a:endParaRPr lang="nb-NO" sz="3200"/>
           </a:p>
         </p:txBody>
       </p:sp>
@@ -4127,6 +6284,4516 @@
     <p:extLst>
       <p:ext uri="{BB962C8B-B14F-4D97-AF65-F5344CB8AC3E}">
         <p14:creationId xmlns:p14="http://schemas.microsoft.com/office/powerpoint/2010/main" val="3373906735"/>
+      </p:ext>
+    </p:extLst>
+  </p:cSld>
+  <p:clrMapOvr>
+    <a:masterClrMapping/>
+  </p:clrMapOvr>
+</p:sld>
+</file>
+
+<file path=ppt/slides/slide12.xml><?xml version="1.0" encoding="utf-8"?>
+<p:sld xmlns:a="http://schemas.openxmlformats.org/drawingml/2006/main" xmlns:r="http://schemas.openxmlformats.org/officeDocument/2006/relationships" xmlns:p="http://schemas.openxmlformats.org/presentationml/2006/main">
+  <p:cSld>
+    <p:spTree>
+      <p:nvGrpSpPr>
+        <p:cNvPr id="1" name="">
+          <a:extLst>
+            <a:ext uri="{FF2B5EF4-FFF2-40B4-BE49-F238E27FC236}">
+              <a16:creationId xmlns:a16="http://schemas.microsoft.com/office/drawing/2014/main" id="{DE5F7E74-D29D-745E-6EA6-F9C8DC571AEE}"/>
+            </a:ext>
+          </a:extLst>
+        </p:cNvPr>
+        <p:cNvGrpSpPr/>
+        <p:nvPr/>
+      </p:nvGrpSpPr>
+      <p:grpSpPr>
+        <a:xfrm>
+          <a:off x="0" y="0"/>
+          <a:ext cx="0" cy="0"/>
+          <a:chOff x="0" y="0"/>
+          <a:chExt cx="0" cy="0"/>
+        </a:xfrm>
+      </p:grpSpPr>
+      <p:sp>
+        <p:nvSpPr>
+          <p:cNvPr id="2" name="Title 1">
+            <a:extLst>
+              <a:ext uri="{FF2B5EF4-FFF2-40B4-BE49-F238E27FC236}">
+                <a16:creationId xmlns:a16="http://schemas.microsoft.com/office/drawing/2014/main" id="{33068F23-E808-B8CF-CD40-6BC1D975311B}"/>
+              </a:ext>
+            </a:extLst>
+          </p:cNvPr>
+          <p:cNvSpPr>
+            <a:spLocks noGrp="1"/>
+          </p:cNvSpPr>
+          <p:nvPr>
+            <p:ph type="title"/>
+          </p:nvPr>
+        </p:nvSpPr>
+        <p:spPr/>
+        <p:txBody>
+          <a:bodyPr>
+            <a:normAutofit/>
+          </a:bodyPr>
+          <a:lstStyle/>
+          <a:p>
+            <a:r>
+              <a:rPr lang="en-GB"/>
+              <a:t>Discussions we’ve had</a:t>
+            </a:r>
+            <a:br>
+              <a:rPr lang="en-GB"/>
+            </a:br>
+            <a:endParaRPr lang="nb-NO"/>
+          </a:p>
+        </p:txBody>
+      </p:sp>
+      <p:sp>
+        <p:nvSpPr>
+          <p:cNvPr id="3" name="Content Placeholder 2">
+            <a:extLst>
+              <a:ext uri="{FF2B5EF4-FFF2-40B4-BE49-F238E27FC236}">
+                <a16:creationId xmlns:a16="http://schemas.microsoft.com/office/drawing/2014/main" id="{70FE6DB0-E23E-7805-391A-66293396DD31}"/>
+              </a:ext>
+            </a:extLst>
+          </p:cNvPr>
+          <p:cNvSpPr>
+            <a:spLocks noGrp="1"/>
+          </p:cNvSpPr>
+          <p:nvPr>
+            <p:ph idx="1"/>
+          </p:nvPr>
+        </p:nvSpPr>
+        <p:spPr>
+          <a:xfrm>
+            <a:off x="360727" y="1451295"/>
+            <a:ext cx="10993073" cy="4725668"/>
+          </a:xfrm>
+        </p:spPr>
+        <p:txBody>
+          <a:bodyPr>
+            <a:normAutofit/>
+          </a:bodyPr>
+          <a:lstStyle/>
+          <a:p>
+            <a:pPr marL="0" lvl="0" indent="0">
+              <a:buNone/>
+            </a:pPr>
+            <a:r>
+              <a:rPr lang="nb-NO">
+                <a:solidFill>
+                  <a:schemeClr val="accent5">
+                    <a:lumMod val="60000"/>
+                    <a:lumOff val="40000"/>
+                  </a:schemeClr>
+                </a:solidFill>
+              </a:rPr>
+              <a:t>4) </a:t>
+            </a:r>
+            <a:r>
+              <a:rPr lang="nb-NO" err="1">
+                <a:solidFill>
+                  <a:schemeClr val="accent5">
+                    <a:lumMod val="60000"/>
+                    <a:lumOff val="40000"/>
+                  </a:schemeClr>
+                </a:solidFill>
+              </a:rPr>
+              <a:t>What</a:t>
+            </a:r>
+            <a:r>
+              <a:rPr lang="nb-NO">
+                <a:solidFill>
+                  <a:schemeClr val="accent5">
+                    <a:lumMod val="60000"/>
+                    <a:lumOff val="40000"/>
+                  </a:schemeClr>
+                </a:solidFill>
+              </a:rPr>
+              <a:t> </a:t>
+            </a:r>
+            <a:r>
+              <a:rPr lang="nb-NO" err="1">
+                <a:solidFill>
+                  <a:schemeClr val="accent5">
+                    <a:lumMod val="60000"/>
+                    <a:lumOff val="40000"/>
+                  </a:schemeClr>
+                </a:solidFill>
+              </a:rPr>
+              <a:t>does</a:t>
+            </a:r>
+            <a:r>
+              <a:rPr lang="nb-NO">
+                <a:solidFill>
+                  <a:schemeClr val="accent5">
+                    <a:lumMod val="60000"/>
+                    <a:lumOff val="40000"/>
+                  </a:schemeClr>
+                </a:solidFill>
+              </a:rPr>
+              <a:t> </a:t>
+            </a:r>
+            <a:r>
+              <a:rPr lang="nb-NO" err="1">
+                <a:solidFill>
+                  <a:schemeClr val="accent5">
+                    <a:lumMod val="60000"/>
+                    <a:lumOff val="40000"/>
+                  </a:schemeClr>
+                </a:solidFill>
+              </a:rPr>
+              <a:t>the</a:t>
+            </a:r>
+            <a:r>
+              <a:rPr lang="nb-NO">
+                <a:solidFill>
+                  <a:schemeClr val="accent5">
+                    <a:lumMod val="60000"/>
+                    <a:lumOff val="40000"/>
+                  </a:schemeClr>
+                </a:solidFill>
+              </a:rPr>
+              <a:t> </a:t>
+            </a:r>
+            <a:r>
+              <a:rPr lang="nb-NO" err="1">
+                <a:solidFill>
+                  <a:schemeClr val="accent5">
+                    <a:lumMod val="60000"/>
+                    <a:lumOff val="40000"/>
+                  </a:schemeClr>
+                </a:solidFill>
+              </a:rPr>
+              <a:t>department</a:t>
+            </a:r>
+            <a:r>
+              <a:rPr lang="nb-NO">
+                <a:solidFill>
+                  <a:schemeClr val="accent5">
+                    <a:lumMod val="60000"/>
+                    <a:lumOff val="40000"/>
+                  </a:schemeClr>
+                </a:solidFill>
+              </a:rPr>
+              <a:t> </a:t>
+            </a:r>
+            <a:r>
+              <a:rPr lang="nb-NO" err="1">
+                <a:solidFill>
+                  <a:schemeClr val="accent5">
+                    <a:lumMod val="60000"/>
+                    <a:lumOff val="40000"/>
+                  </a:schemeClr>
+                </a:solidFill>
+              </a:rPr>
+              <a:t>need</a:t>
+            </a:r>
+            <a:r>
+              <a:rPr lang="nb-NO">
+                <a:solidFill>
+                  <a:schemeClr val="accent5">
+                    <a:lumMod val="60000"/>
+                    <a:lumOff val="40000"/>
+                  </a:schemeClr>
+                </a:solidFill>
+              </a:rPr>
+              <a:t> to do to </a:t>
+            </a:r>
+            <a:r>
+              <a:rPr lang="nb-NO" err="1">
+                <a:solidFill>
+                  <a:schemeClr val="accent5">
+                    <a:lumMod val="60000"/>
+                    <a:lumOff val="40000"/>
+                  </a:schemeClr>
+                </a:solidFill>
+              </a:rPr>
+              <a:t>adopt</a:t>
+            </a:r>
+            <a:r>
+              <a:rPr lang="nb-NO">
+                <a:solidFill>
+                  <a:schemeClr val="accent5">
+                    <a:lumMod val="60000"/>
+                    <a:lumOff val="40000"/>
+                  </a:schemeClr>
+                </a:solidFill>
+              </a:rPr>
+              <a:t> </a:t>
+            </a:r>
+            <a:r>
+              <a:rPr lang="nb-NO" err="1">
+                <a:solidFill>
+                  <a:schemeClr val="accent5">
+                    <a:lumMod val="60000"/>
+                    <a:lumOff val="40000"/>
+                  </a:schemeClr>
+                </a:solidFill>
+              </a:rPr>
+              <a:t>these</a:t>
+            </a:r>
+            <a:r>
+              <a:rPr lang="nb-NO">
+                <a:solidFill>
+                  <a:schemeClr val="accent5">
+                    <a:lumMod val="60000"/>
+                    <a:lumOff val="40000"/>
+                  </a:schemeClr>
+                </a:solidFill>
+              </a:rPr>
+              <a:t> </a:t>
+            </a:r>
+            <a:r>
+              <a:rPr lang="nb-NO" err="1">
+                <a:solidFill>
+                  <a:schemeClr val="accent5">
+                    <a:lumMod val="60000"/>
+                    <a:lumOff val="40000"/>
+                  </a:schemeClr>
+                </a:solidFill>
+              </a:rPr>
+              <a:t>tools</a:t>
+            </a:r>
+            <a:r>
+              <a:rPr lang="nb-NO">
+                <a:solidFill>
+                  <a:schemeClr val="accent5">
+                    <a:lumMod val="60000"/>
+                    <a:lumOff val="40000"/>
+                  </a:schemeClr>
+                </a:solidFill>
+              </a:rPr>
+              <a:t>?</a:t>
+            </a:r>
+          </a:p>
+          <a:p>
+            <a:pPr marL="0" lvl="0" indent="0">
+              <a:buNone/>
+            </a:pPr>
+            <a:r>
+              <a:rPr lang="nb-NO" sz="3600"/>
+              <a:t>   </a:t>
+            </a:r>
+            <a:r>
+              <a:rPr lang="nb-NO" sz="2400" err="1"/>
+              <a:t>Mostly</a:t>
+            </a:r>
+            <a:r>
+              <a:rPr lang="nb-NO" sz="2400"/>
+              <a:t> </a:t>
+            </a:r>
+            <a:r>
+              <a:rPr lang="nb-NO" sz="2400" err="1"/>
+              <a:t>motivation</a:t>
+            </a:r>
+            <a:r>
+              <a:rPr lang="nb-NO" sz="2400"/>
+              <a:t> to do so </a:t>
+            </a:r>
+            <a:r>
+              <a:rPr lang="nb-NO" sz="2400">
+                <a:sym typeface="Wingdings" panose="05000000000000000000" pitchFamily="2" charset="2"/>
+              </a:rPr>
+              <a:t> and </a:t>
+            </a:r>
+            <a:r>
+              <a:rPr lang="nb-NO" sz="2400" err="1">
+                <a:sym typeface="Wingdings" panose="05000000000000000000" pitchFamily="2" charset="2"/>
+              </a:rPr>
+              <a:t>some</a:t>
+            </a:r>
+            <a:r>
+              <a:rPr lang="nb-NO" sz="2400">
+                <a:sym typeface="Wingdings" panose="05000000000000000000" pitchFamily="2" charset="2"/>
+              </a:rPr>
+              <a:t> time/resources </a:t>
+            </a:r>
+            <a:r>
+              <a:rPr lang="nb-NO" sz="2400" err="1">
+                <a:sym typeface="Wingdings" panose="05000000000000000000" pitchFamily="2" charset="2"/>
+              </a:rPr>
+              <a:t>set</a:t>
+            </a:r>
+            <a:r>
+              <a:rPr lang="nb-NO" sz="2400">
+                <a:sym typeface="Wingdings" panose="05000000000000000000" pitchFamily="2" charset="2"/>
+              </a:rPr>
+              <a:t> </a:t>
+            </a:r>
+            <a:r>
+              <a:rPr lang="nb-NO" sz="2400" err="1">
+                <a:sym typeface="Wingdings" panose="05000000000000000000" pitchFamily="2" charset="2"/>
+              </a:rPr>
+              <a:t>aside</a:t>
+            </a:r>
+            <a:r>
+              <a:rPr lang="nb-NO" sz="2400">
+                <a:sym typeface="Wingdings" panose="05000000000000000000" pitchFamily="2" charset="2"/>
+              </a:rPr>
+              <a:t> for setting it up.</a:t>
+            </a:r>
+            <a:endParaRPr lang="nb-NO" sz="3600"/>
+          </a:p>
+          <a:p>
+            <a:pPr lvl="0"/>
+            <a:endParaRPr lang="nb-NO" sz="3600"/>
+          </a:p>
+          <a:p>
+            <a:pPr marL="0" lvl="0" indent="0">
+              <a:buNone/>
+            </a:pPr>
+            <a:endParaRPr lang="nb-NO">
+              <a:solidFill>
+                <a:schemeClr val="accent5">
+                  <a:lumMod val="60000"/>
+                  <a:lumOff val="40000"/>
+                </a:schemeClr>
+              </a:solidFill>
+            </a:endParaRPr>
+          </a:p>
+          <a:p>
+            <a:pPr marL="0" lvl="0" indent="0">
+              <a:buNone/>
+            </a:pPr>
+            <a:r>
+              <a:rPr lang="nb-NO">
+                <a:solidFill>
+                  <a:schemeClr val="accent5">
+                    <a:lumMod val="60000"/>
+                    <a:lumOff val="40000"/>
+                  </a:schemeClr>
+                </a:solidFill>
+              </a:rPr>
+              <a:t>5) </a:t>
+            </a:r>
+            <a:r>
+              <a:rPr lang="nb-NO" err="1">
+                <a:solidFill>
+                  <a:schemeClr val="accent5">
+                    <a:lumMod val="60000"/>
+                    <a:lumOff val="40000"/>
+                  </a:schemeClr>
+                </a:solidFill>
+              </a:rPr>
+              <a:t>Any</a:t>
+            </a:r>
+            <a:r>
+              <a:rPr lang="nb-NO">
+                <a:solidFill>
+                  <a:schemeClr val="accent5">
+                    <a:lumMod val="60000"/>
+                    <a:lumOff val="40000"/>
+                  </a:schemeClr>
+                </a:solidFill>
+              </a:rPr>
+              <a:t> </a:t>
+            </a:r>
+            <a:r>
+              <a:rPr lang="nb-NO" err="1">
+                <a:solidFill>
+                  <a:schemeClr val="accent5">
+                    <a:lumMod val="60000"/>
+                    <a:lumOff val="40000"/>
+                  </a:schemeClr>
+                </a:solidFill>
+              </a:rPr>
+              <a:t>other</a:t>
+            </a:r>
+            <a:r>
+              <a:rPr lang="nb-NO">
+                <a:solidFill>
+                  <a:schemeClr val="accent5">
+                    <a:lumMod val="60000"/>
+                    <a:lumOff val="40000"/>
+                  </a:schemeClr>
+                </a:solidFill>
+              </a:rPr>
+              <a:t> </a:t>
+            </a:r>
+            <a:r>
+              <a:rPr lang="nb-NO" err="1">
+                <a:solidFill>
+                  <a:schemeClr val="accent5">
+                    <a:lumMod val="60000"/>
+                    <a:lumOff val="40000"/>
+                  </a:schemeClr>
+                </a:solidFill>
+              </a:rPr>
+              <a:t>barriers</a:t>
+            </a:r>
+            <a:r>
+              <a:rPr lang="nb-NO">
+                <a:solidFill>
+                  <a:schemeClr val="accent5">
+                    <a:lumMod val="60000"/>
+                    <a:lumOff val="40000"/>
+                  </a:schemeClr>
+                </a:solidFill>
+              </a:rPr>
+              <a:t> to </a:t>
+            </a:r>
+            <a:r>
+              <a:rPr lang="nb-NO" err="1">
+                <a:solidFill>
+                  <a:schemeClr val="accent5">
+                    <a:lumMod val="60000"/>
+                    <a:lumOff val="40000"/>
+                  </a:schemeClr>
+                </a:solidFill>
+              </a:rPr>
+              <a:t>implementation</a:t>
+            </a:r>
+            <a:r>
+              <a:rPr lang="nb-NO">
+                <a:solidFill>
+                  <a:schemeClr val="accent5">
+                    <a:lumMod val="60000"/>
+                    <a:lumOff val="40000"/>
+                  </a:schemeClr>
+                </a:solidFill>
+              </a:rPr>
+              <a:t>.</a:t>
+            </a:r>
+          </a:p>
+          <a:p>
+            <a:pPr lvl="1"/>
+            <a:r>
+              <a:rPr lang="nb-NO" err="1"/>
+              <a:t>Difficult</a:t>
+            </a:r>
+            <a:r>
+              <a:rPr lang="nb-NO"/>
+              <a:t> to </a:t>
+            </a:r>
+            <a:r>
+              <a:rPr lang="nb-NO" err="1"/>
+              <a:t>setup</a:t>
+            </a:r>
+            <a:r>
+              <a:rPr lang="nb-NO"/>
+              <a:t> in </a:t>
+            </a:r>
+            <a:r>
+              <a:rPr lang="nb-NO" err="1"/>
+              <a:t>short</a:t>
+            </a:r>
+            <a:r>
+              <a:rPr lang="nb-NO"/>
+              <a:t> time (</a:t>
+            </a:r>
+            <a:r>
+              <a:rPr lang="nb-NO" err="1"/>
+              <a:t>issues</a:t>
+            </a:r>
+            <a:r>
+              <a:rPr lang="nb-NO"/>
+              <a:t> </a:t>
+            </a:r>
+            <a:r>
+              <a:rPr lang="nb-NO" err="1"/>
+              <a:t>encountered</a:t>
+            </a:r>
+            <a:r>
+              <a:rPr lang="nb-NO"/>
+              <a:t> </a:t>
+            </a:r>
+            <a:r>
+              <a:rPr lang="nb-NO" err="1"/>
+              <a:t>with</a:t>
+            </a:r>
+            <a:r>
+              <a:rPr lang="nb-NO"/>
+              <a:t> </a:t>
+            </a:r>
+            <a:r>
+              <a:rPr lang="nb-NO" err="1"/>
+              <a:t>venvs</a:t>
+            </a:r>
+            <a:r>
+              <a:rPr lang="nb-NO"/>
+              <a:t>, databases restarting, </a:t>
+            </a:r>
+            <a:r>
+              <a:rPr lang="nb-NO" err="1"/>
+              <a:t>versioning</a:t>
+            </a:r>
+            <a:r>
+              <a:rPr lang="nb-NO"/>
+              <a:t> …)</a:t>
+            </a:r>
+          </a:p>
+          <a:p>
+            <a:pPr lvl="1"/>
+            <a:r>
+              <a:rPr lang="nb-NO"/>
+              <a:t>Autogen has </a:t>
+            </a:r>
+            <a:r>
+              <a:rPr lang="nb-NO" err="1"/>
+              <a:t>some</a:t>
+            </a:r>
+            <a:r>
+              <a:rPr lang="nb-NO"/>
+              <a:t> </a:t>
+            </a:r>
+            <a:r>
+              <a:rPr lang="nb-NO" err="1"/>
+              <a:t>implementation</a:t>
+            </a:r>
+            <a:r>
+              <a:rPr lang="nb-NO"/>
+              <a:t> </a:t>
+            </a:r>
+            <a:r>
+              <a:rPr lang="nb-NO" err="1"/>
+              <a:t>particularities</a:t>
+            </a:r>
+            <a:r>
+              <a:rPr lang="nb-NO"/>
+              <a:t> </a:t>
+            </a:r>
+            <a:r>
+              <a:rPr lang="nb-NO" err="1"/>
+              <a:t>which</a:t>
+            </a:r>
+            <a:r>
+              <a:rPr lang="nb-NO"/>
+              <a:t> </a:t>
+            </a:r>
+            <a:r>
+              <a:rPr lang="nb-NO" err="1"/>
+              <a:t>sometimes</a:t>
+            </a:r>
+            <a:r>
+              <a:rPr lang="nb-NO"/>
+              <a:t> </a:t>
+            </a:r>
+            <a:r>
+              <a:rPr lang="nb-NO" err="1"/>
+              <a:t>requires</a:t>
+            </a:r>
+            <a:r>
+              <a:rPr lang="nb-NO"/>
+              <a:t> </a:t>
+            </a:r>
+            <a:r>
+              <a:rPr lang="nb-NO" err="1"/>
+              <a:t>some</a:t>
+            </a:r>
+            <a:r>
+              <a:rPr lang="nb-NO"/>
+              <a:t> </a:t>
+            </a:r>
+            <a:r>
+              <a:rPr lang="nb-NO" err="1"/>
+              <a:t>tinkering</a:t>
+            </a:r>
+            <a:r>
+              <a:rPr lang="nb-NO"/>
+              <a:t>/</a:t>
+            </a:r>
+            <a:r>
+              <a:rPr lang="nb-NO" err="1"/>
+              <a:t>workarounds</a:t>
+            </a:r>
+            <a:r>
+              <a:rPr lang="nb-NO"/>
+              <a:t> (</a:t>
+            </a:r>
+            <a:r>
+              <a:rPr lang="nb-NO" err="1"/>
+              <a:t>forcing</a:t>
+            </a:r>
+            <a:r>
+              <a:rPr lang="nb-NO"/>
+              <a:t> agents, not </a:t>
+            </a:r>
+            <a:r>
+              <a:rPr lang="nb-NO" err="1"/>
+              <a:t>being</a:t>
+            </a:r>
+            <a:r>
+              <a:rPr lang="nb-NO"/>
+              <a:t> </a:t>
+            </a:r>
+            <a:r>
+              <a:rPr lang="nb-NO" err="1"/>
+              <a:t>able</a:t>
+            </a:r>
+            <a:r>
+              <a:rPr lang="nb-NO"/>
+              <a:t> to </a:t>
+            </a:r>
+            <a:r>
+              <a:rPr lang="nb-NO" err="1"/>
+              <a:t>access</a:t>
+            </a:r>
+            <a:r>
+              <a:rPr lang="nb-NO"/>
+              <a:t> moderators, </a:t>
+            </a:r>
+            <a:r>
+              <a:rPr lang="nb-NO" err="1"/>
+              <a:t>no</a:t>
+            </a:r>
+            <a:r>
+              <a:rPr lang="nb-NO"/>
+              <a:t> </a:t>
+            </a:r>
+            <a:r>
+              <a:rPr lang="nb-NO" err="1"/>
+              <a:t>structured</a:t>
+            </a:r>
+            <a:r>
+              <a:rPr lang="nb-NO"/>
+              <a:t> inputs - just outputs). </a:t>
+            </a:r>
+          </a:p>
+          <a:p>
+            <a:pPr marL="0" lvl="0" indent="0">
+              <a:buNone/>
+            </a:pPr>
+            <a:endParaRPr lang="nb-NO" sz="3600"/>
+          </a:p>
+          <a:p>
+            <a:pPr lvl="1"/>
+            <a:endParaRPr lang="nb-NO" sz="3200"/>
+          </a:p>
+          <a:p>
+            <a:pPr marL="457200" lvl="1" indent="0">
+              <a:buNone/>
+            </a:pPr>
+            <a:endParaRPr lang="nb-NO" sz="3200"/>
+          </a:p>
+        </p:txBody>
+      </p:sp>
+    </p:spTree>
+    <p:extLst>
+      <p:ext uri="{BB962C8B-B14F-4D97-AF65-F5344CB8AC3E}">
+        <p14:creationId xmlns:p14="http://schemas.microsoft.com/office/powerpoint/2010/main" val="1198931030"/>
+      </p:ext>
+    </p:extLst>
+  </p:cSld>
+  <p:clrMapOvr>
+    <a:masterClrMapping/>
+  </p:clrMapOvr>
+</p:sld>
+</file>
+
+<file path=ppt/slides/slide13.xml><?xml version="1.0" encoding="utf-8"?>
+<p:sld xmlns:a="http://schemas.openxmlformats.org/drawingml/2006/main" xmlns:r="http://schemas.openxmlformats.org/officeDocument/2006/relationships" xmlns:p="http://schemas.openxmlformats.org/presentationml/2006/main">
+  <p:cSld>
+    <p:spTree>
+      <p:nvGrpSpPr>
+        <p:cNvPr id="1" name="">
+          <a:extLst>
+            <a:ext uri="{FF2B5EF4-FFF2-40B4-BE49-F238E27FC236}">
+              <a16:creationId xmlns:a16="http://schemas.microsoft.com/office/drawing/2014/main" id="{CA0850AF-58E0-EC30-5890-12A1E013F562}"/>
+            </a:ext>
+          </a:extLst>
+        </p:cNvPr>
+        <p:cNvGrpSpPr/>
+        <p:nvPr/>
+      </p:nvGrpSpPr>
+      <p:grpSpPr>
+        <a:xfrm>
+          <a:off x="0" y="0"/>
+          <a:ext cx="0" cy="0"/>
+          <a:chOff x="0" y="0"/>
+          <a:chExt cx="0" cy="0"/>
+        </a:xfrm>
+      </p:grpSpPr>
+      <p:sp>
+        <p:nvSpPr>
+          <p:cNvPr id="5" name="Content Placeholder 4">
+            <a:extLst>
+              <a:ext uri="{FF2B5EF4-FFF2-40B4-BE49-F238E27FC236}">
+                <a16:creationId xmlns:a16="http://schemas.microsoft.com/office/drawing/2014/main" id="{B2EB0FAA-183A-25B8-6308-084777D95B46}"/>
+              </a:ext>
+            </a:extLst>
+          </p:cNvPr>
+          <p:cNvSpPr>
+            <a:spLocks noGrp="1"/>
+          </p:cNvSpPr>
+          <p:nvPr>
+            <p:ph idx="1"/>
+          </p:nvPr>
+        </p:nvSpPr>
+        <p:spPr>
+          <a:xfrm>
+            <a:off x="4052931" y="2924073"/>
+            <a:ext cx="4086138" cy="1009854"/>
+          </a:xfrm>
+        </p:spPr>
+        <p:txBody>
+          <a:bodyPr>
+            <a:normAutofit fontScale="77500" lnSpcReduction="20000"/>
+          </a:bodyPr>
+          <a:lstStyle/>
+          <a:p>
+            <a:pPr marL="0" indent="0">
+              <a:buNone/>
+            </a:pPr>
+            <a:r>
+              <a:rPr lang="en-GB" sz="5400">
+                <a:solidFill>
+                  <a:schemeClr val="accent5">
+                    <a:lumMod val="60000"/>
+                    <a:lumOff val="40000"/>
+                  </a:schemeClr>
+                </a:solidFill>
+              </a:rPr>
+              <a:t>THANK YOU ❣️</a:t>
+            </a:r>
+            <a:endParaRPr lang="nb-NO" sz="5400">
+              <a:solidFill>
+                <a:schemeClr val="accent5">
+                  <a:lumMod val="60000"/>
+                  <a:lumOff val="40000"/>
+                </a:schemeClr>
+              </a:solidFill>
+            </a:endParaRPr>
+          </a:p>
+        </p:txBody>
+      </p:sp>
+    </p:spTree>
+    <p:extLst>
+      <p:ext uri="{BB962C8B-B14F-4D97-AF65-F5344CB8AC3E}">
+        <p14:creationId xmlns:p14="http://schemas.microsoft.com/office/powerpoint/2010/main" val="1971890539"/>
+      </p:ext>
+    </p:extLst>
+  </p:cSld>
+  <p:clrMapOvr>
+    <a:masterClrMapping/>
+  </p:clrMapOvr>
+</p:sld>
+</file>
+
+<file path=ppt/slides/slide2.xml><?xml version="1.0" encoding="utf-8"?>
+<p:sld xmlns:a="http://schemas.openxmlformats.org/drawingml/2006/main" xmlns:r="http://schemas.openxmlformats.org/officeDocument/2006/relationships" xmlns:p="http://schemas.openxmlformats.org/presentationml/2006/main">
+  <p:cSld>
+    <p:spTree>
+      <p:nvGrpSpPr>
+        <p:cNvPr id="1" name="">
+          <a:extLst>
+            <a:ext uri="{FF2B5EF4-FFF2-40B4-BE49-F238E27FC236}">
+              <a16:creationId xmlns:a16="http://schemas.microsoft.com/office/drawing/2014/main" id="{956AD05F-737D-FA00-04DA-849555DBB257}"/>
+            </a:ext>
+          </a:extLst>
+        </p:cNvPr>
+        <p:cNvGrpSpPr/>
+        <p:nvPr/>
+      </p:nvGrpSpPr>
+      <p:grpSpPr>
+        <a:xfrm>
+          <a:off x="0" y="0"/>
+          <a:ext cx="0" cy="0"/>
+          <a:chOff x="0" y="0"/>
+          <a:chExt cx="0" cy="0"/>
+        </a:xfrm>
+      </p:grpSpPr>
+      <p:sp>
+        <p:nvSpPr>
+          <p:cNvPr id="2" name="Title 1">
+            <a:extLst>
+              <a:ext uri="{FF2B5EF4-FFF2-40B4-BE49-F238E27FC236}">
+                <a16:creationId xmlns:a16="http://schemas.microsoft.com/office/drawing/2014/main" id="{34B97BB2-595D-D812-47CB-ACA0B271F760}"/>
+              </a:ext>
+            </a:extLst>
+          </p:cNvPr>
+          <p:cNvSpPr>
+            <a:spLocks noGrp="1"/>
+          </p:cNvSpPr>
+          <p:nvPr>
+            <p:ph type="title"/>
+          </p:nvPr>
+        </p:nvSpPr>
+        <p:spPr/>
+        <p:txBody>
+          <a:bodyPr/>
+          <a:lstStyle/>
+          <a:p>
+            <a:r>
+              <a:rPr lang="en-GB"/>
+              <a:t>Workshop goals</a:t>
+            </a:r>
+            <a:endParaRPr lang="nb-NO"/>
+          </a:p>
+        </p:txBody>
+      </p:sp>
+      <p:sp>
+        <p:nvSpPr>
+          <p:cNvPr id="3" name="Content Placeholder 2">
+            <a:extLst>
+              <a:ext uri="{FF2B5EF4-FFF2-40B4-BE49-F238E27FC236}">
+                <a16:creationId xmlns:a16="http://schemas.microsoft.com/office/drawing/2014/main" id="{7B56B4C6-9322-EC07-AEB4-08E501F5A8DF}"/>
+              </a:ext>
+            </a:extLst>
+          </p:cNvPr>
+          <p:cNvSpPr>
+            <a:spLocks noGrp="1"/>
+          </p:cNvSpPr>
+          <p:nvPr>
+            <p:ph idx="1"/>
+          </p:nvPr>
+        </p:nvSpPr>
+        <p:spPr>
+          <a:xfrm>
+            <a:off x="838200" y="1579440"/>
+            <a:ext cx="10515600" cy="4351338"/>
+          </a:xfrm>
+        </p:spPr>
+        <p:txBody>
+          <a:bodyPr>
+            <a:normAutofit/>
+          </a:bodyPr>
+          <a:lstStyle/>
+          <a:p>
+            <a:pPr marL="0" indent="0">
+              <a:buNone/>
+            </a:pPr>
+            <a:endParaRPr lang="en-GB"/>
+          </a:p>
+          <a:p>
+            <a:pPr marL="0" indent="0">
+              <a:buNone/>
+            </a:pPr>
+            <a:endParaRPr lang="en-GB"/>
+          </a:p>
+          <a:p>
+            <a:pPr marL="514350" indent="-514350">
+              <a:buAutoNum type="arabicParenR"/>
+            </a:pPr>
+            <a:r>
+              <a:rPr lang="en-GB"/>
+              <a:t>Build Smart Agents with </a:t>
+            </a:r>
+            <a:r>
+              <a:rPr lang="en-GB" b="1" err="1"/>
+              <a:t>AutoGen</a:t>
+            </a:r>
+            <a:r>
+              <a:rPr lang="en-GB" b="1"/>
+              <a:t> </a:t>
+            </a:r>
+            <a:r>
+              <a:rPr lang="en-GB"/>
+              <a:t>following </a:t>
+            </a:r>
+            <a:r>
+              <a:rPr lang="en-GB" b="1"/>
+              <a:t>Agentic Design Patterns</a:t>
+            </a:r>
+            <a:endParaRPr lang="en-GB"/>
+          </a:p>
+          <a:p>
+            <a:pPr marL="514350" indent="-514350">
+              <a:buAutoNum type="arabicParenR" startAt="2"/>
+            </a:pPr>
+            <a:r>
+              <a:rPr lang="en-GB" b="1"/>
+              <a:t>Multi-Agent Systems </a:t>
+            </a:r>
+            <a:r>
+              <a:rPr lang="en-GB"/>
+              <a:t>combined with by </a:t>
+            </a:r>
+            <a:r>
+              <a:rPr lang="en-GB" b="1"/>
+              <a:t>Knowledge Graphs</a:t>
+            </a:r>
+            <a:r>
+              <a:rPr lang="en-GB"/>
+              <a:t> and </a:t>
+            </a:r>
+            <a:r>
+              <a:rPr lang="en-GB" b="1"/>
+              <a:t>Heterogenous Databases</a:t>
+            </a:r>
+            <a:r>
+              <a:rPr lang="en-GB"/>
+              <a:t> for </a:t>
+            </a:r>
+            <a:r>
+              <a:rPr lang="en-GB" b="1"/>
+              <a:t>Increased Observability and Monitoring</a:t>
+            </a:r>
+          </a:p>
+          <a:p>
+            <a:pPr marL="514350" indent="-514350">
+              <a:buAutoNum type="arabicParenR" startAt="2"/>
+            </a:pPr>
+            <a:r>
+              <a:rPr lang="en-GB" b="1"/>
+              <a:t>AI-based </a:t>
+            </a:r>
+            <a:r>
+              <a:rPr lang="en-GB" b="1" err="1"/>
+              <a:t>Assisstant</a:t>
+            </a:r>
+            <a:r>
+              <a:rPr lang="en-GB"/>
+              <a:t> for </a:t>
+            </a:r>
+            <a:r>
+              <a:rPr lang="en-GB" b="1"/>
+              <a:t>Cognitive Digital Twins</a:t>
+            </a:r>
+            <a:endParaRPr lang="en-GB"/>
+          </a:p>
+          <a:p>
+            <a:endParaRPr lang="en-GB"/>
+          </a:p>
+          <a:p>
+            <a:endParaRPr lang="nb-NO"/>
+          </a:p>
+        </p:txBody>
+      </p:sp>
+    </p:spTree>
+    <p:extLst>
+      <p:ext uri="{BB962C8B-B14F-4D97-AF65-F5344CB8AC3E}">
+        <p14:creationId xmlns:p14="http://schemas.microsoft.com/office/powerpoint/2010/main" val="1230631313"/>
+      </p:ext>
+    </p:extLst>
+  </p:cSld>
+  <p:clrMapOvr>
+    <a:masterClrMapping/>
+  </p:clrMapOvr>
+</p:sld>
+</file>
+
+<file path=ppt/slides/slide3.xml><?xml version="1.0" encoding="utf-8"?>
+<p:sld xmlns:a="http://schemas.openxmlformats.org/drawingml/2006/main" xmlns:r="http://schemas.openxmlformats.org/officeDocument/2006/relationships" xmlns:p="http://schemas.openxmlformats.org/presentationml/2006/main">
+  <p:cSld>
+    <p:spTree>
+      <p:nvGrpSpPr>
+        <p:cNvPr id="1" name="">
+          <a:extLst>
+            <a:ext uri="{FF2B5EF4-FFF2-40B4-BE49-F238E27FC236}">
+              <a16:creationId xmlns:a16="http://schemas.microsoft.com/office/drawing/2014/main" id="{590C63CC-F1D5-A490-163F-12EA04A2A849}"/>
+            </a:ext>
+          </a:extLst>
+        </p:cNvPr>
+        <p:cNvGrpSpPr/>
+        <p:nvPr/>
+      </p:nvGrpSpPr>
+      <p:grpSpPr>
+        <a:xfrm>
+          <a:off x="0" y="0"/>
+          <a:ext cx="0" cy="0"/>
+          <a:chOff x="0" y="0"/>
+          <a:chExt cx="0" cy="0"/>
+        </a:xfrm>
+      </p:grpSpPr>
+      <p:sp>
+        <p:nvSpPr>
+          <p:cNvPr id="2" name="Title 1">
+            <a:extLst>
+              <a:ext uri="{FF2B5EF4-FFF2-40B4-BE49-F238E27FC236}">
+                <a16:creationId xmlns:a16="http://schemas.microsoft.com/office/drawing/2014/main" id="{FEF21048-E361-75A2-F9E8-8BDB25F02485}"/>
+              </a:ext>
+            </a:extLst>
+          </p:cNvPr>
+          <p:cNvSpPr>
+            <a:spLocks noGrp="1"/>
+          </p:cNvSpPr>
+          <p:nvPr>
+            <p:ph type="title"/>
+          </p:nvPr>
+        </p:nvSpPr>
+        <p:spPr>
+          <a:xfrm>
+            <a:off x="321217" y="0"/>
+            <a:ext cx="10515600" cy="1325563"/>
+          </a:xfrm>
+        </p:spPr>
+        <p:txBody>
+          <a:bodyPr/>
+          <a:lstStyle/>
+          <a:p>
+            <a:r>
+              <a:rPr lang="en-GB"/>
+              <a:t>Built-in </a:t>
+            </a:r>
+            <a:r>
+              <a:rPr lang="en-GB" b="1" err="1"/>
+              <a:t>Autogen</a:t>
+            </a:r>
+            <a:r>
+              <a:rPr lang="en-GB"/>
+              <a:t> Agents</a:t>
+            </a:r>
+            <a:endParaRPr lang="nb-NO"/>
+          </a:p>
+        </p:txBody>
+      </p:sp>
+      <p:pic>
+        <p:nvPicPr>
+          <p:cNvPr id="7" name="Content Placeholder 6">
+            <a:extLst>
+              <a:ext uri="{FF2B5EF4-FFF2-40B4-BE49-F238E27FC236}">
+                <a16:creationId xmlns:a16="http://schemas.microsoft.com/office/drawing/2014/main" id="{03A7A828-B834-F418-FFD6-22E86B287E47}"/>
+              </a:ext>
+            </a:extLst>
+          </p:cNvPr>
+          <p:cNvPicPr>
+            <a:picLocks noGrp="1" noChangeAspect="1"/>
+          </p:cNvPicPr>
+          <p:nvPr>
+            <p:ph idx="1"/>
+          </p:nvPr>
+        </p:nvPicPr>
+        <p:blipFill>
+          <a:blip r:embed="rId3">
+            <a:extLst>
+              <a:ext uri="{28A0092B-C50C-407E-A947-70E740481C1C}">
+                <a14:useLocalDpi xmlns:a14="http://schemas.microsoft.com/office/drawing/2010/main" val="0"/>
+              </a:ext>
+            </a:extLst>
+          </a:blip>
+          <a:stretch>
+            <a:fillRect/>
+          </a:stretch>
+        </p:blipFill>
+        <p:spPr>
+          <a:xfrm>
+            <a:off x="321217" y="1129271"/>
+            <a:ext cx="11767279" cy="2593643"/>
+          </a:xfrm>
+          <a:effectLst>
+            <a:glow rad="101600">
+              <a:schemeClr val="accent5">
+                <a:satMod val="175000"/>
+                <a:alpha val="40000"/>
+              </a:schemeClr>
+            </a:glow>
+          </a:effectLst>
+        </p:spPr>
+      </p:pic>
+      <p:sp>
+        <p:nvSpPr>
+          <p:cNvPr id="8" name="Title 1">
+            <a:extLst>
+              <a:ext uri="{FF2B5EF4-FFF2-40B4-BE49-F238E27FC236}">
+                <a16:creationId xmlns:a16="http://schemas.microsoft.com/office/drawing/2014/main" id="{BA58588A-3E05-9D00-1221-802555612833}"/>
+              </a:ext>
+            </a:extLst>
+          </p:cNvPr>
+          <p:cNvSpPr txBox="1">
+            <a:spLocks/>
+          </p:cNvSpPr>
+          <p:nvPr/>
+        </p:nvSpPr>
+        <p:spPr>
+          <a:xfrm>
+            <a:off x="321217" y="3526622"/>
+            <a:ext cx="10515600" cy="1325563"/>
+          </a:xfrm>
+          <a:prstGeom prst="rect">
+            <a:avLst/>
+          </a:prstGeom>
+        </p:spPr>
+        <p:txBody>
+          <a:bodyPr vert="horz" lIns="91440" tIns="45720" rIns="91440" bIns="45720" rtlCol="0" anchor="ctr">
+            <a:normAutofit/>
+          </a:bodyPr>
+          <a:lstStyle>
+            <a:lvl1pPr algn="l" defTabSz="914400" rtl="0" eaLnBrk="1" latinLnBrk="0" hangingPunct="1">
+              <a:lnSpc>
+                <a:spcPct val="90000"/>
+              </a:lnSpc>
+              <a:spcBef>
+                <a:spcPct val="0"/>
+              </a:spcBef>
+              <a:buNone/>
+              <a:defRPr sz="4400" kern="1200">
+                <a:solidFill>
+                  <a:schemeClr val="tx1"/>
+                </a:solidFill>
+                <a:latin typeface="+mj-lt"/>
+                <a:ea typeface="+mj-ea"/>
+                <a:cs typeface="+mj-cs"/>
+              </a:defRPr>
+            </a:lvl1pPr>
+          </a:lstStyle>
+          <a:p>
+            <a:r>
+              <a:rPr lang="en-GB" b="1" err="1"/>
+              <a:t>Autogen</a:t>
+            </a:r>
+            <a:r>
+              <a:rPr lang="en-GB"/>
+              <a:t> Teams</a:t>
+            </a:r>
+            <a:endParaRPr lang="nb-NO"/>
+          </a:p>
+        </p:txBody>
+      </p:sp>
+      <p:pic>
+        <p:nvPicPr>
+          <p:cNvPr id="10" name="Picture 9">
+            <a:extLst>
+              <a:ext uri="{FF2B5EF4-FFF2-40B4-BE49-F238E27FC236}">
+                <a16:creationId xmlns:a16="http://schemas.microsoft.com/office/drawing/2014/main" id="{CC517768-C298-3290-D44E-EC7250A0384E}"/>
+              </a:ext>
+            </a:extLst>
+          </p:cNvPr>
+          <p:cNvPicPr>
+            <a:picLocks noChangeAspect="1"/>
+          </p:cNvPicPr>
+          <p:nvPr/>
+        </p:nvPicPr>
+        <p:blipFill>
+          <a:blip r:embed="rId4">
+            <a:extLst>
+              <a:ext uri="{28A0092B-C50C-407E-A947-70E740481C1C}">
+                <a14:useLocalDpi xmlns:a14="http://schemas.microsoft.com/office/drawing/2010/main" val="0"/>
+              </a:ext>
+            </a:extLst>
+          </a:blip>
+          <a:stretch>
+            <a:fillRect/>
+          </a:stretch>
+        </p:blipFill>
+        <p:spPr>
+          <a:xfrm>
+            <a:off x="321217" y="4653565"/>
+            <a:ext cx="11549566" cy="1500450"/>
+          </a:xfrm>
+          <a:prstGeom prst="rect">
+            <a:avLst/>
+          </a:prstGeom>
+          <a:effectLst>
+            <a:glow rad="101600">
+              <a:schemeClr val="accent5">
+                <a:satMod val="175000"/>
+                <a:alpha val="40000"/>
+              </a:schemeClr>
+            </a:glow>
+          </a:effectLst>
+        </p:spPr>
+      </p:pic>
+    </p:spTree>
+    <p:extLst>
+      <p:ext uri="{BB962C8B-B14F-4D97-AF65-F5344CB8AC3E}">
+        <p14:creationId xmlns:p14="http://schemas.microsoft.com/office/powerpoint/2010/main" val="3062124621"/>
+      </p:ext>
+    </p:extLst>
+  </p:cSld>
+  <p:clrMapOvr>
+    <a:masterClrMapping/>
+  </p:clrMapOvr>
+</p:sld>
+</file>
+
+<file path=ppt/slides/slide4.xml><?xml version="1.0" encoding="utf-8"?>
+<p:sld xmlns:a="http://schemas.openxmlformats.org/drawingml/2006/main" xmlns:r="http://schemas.openxmlformats.org/officeDocument/2006/relationships" xmlns:p="http://schemas.openxmlformats.org/presentationml/2006/main">
+  <p:cSld>
+    <p:spTree>
+      <p:nvGrpSpPr>
+        <p:cNvPr id="1" name="">
+          <a:extLst>
+            <a:ext uri="{FF2B5EF4-FFF2-40B4-BE49-F238E27FC236}">
+              <a16:creationId xmlns:a16="http://schemas.microsoft.com/office/drawing/2014/main" id="{0495D4FE-66A0-C6F5-6D08-8F8CFBC9D329}"/>
+            </a:ext>
+          </a:extLst>
+        </p:cNvPr>
+        <p:cNvGrpSpPr/>
+        <p:nvPr/>
+      </p:nvGrpSpPr>
+      <p:grpSpPr>
+        <a:xfrm>
+          <a:off x="0" y="0"/>
+          <a:ext cx="0" cy="0"/>
+          <a:chOff x="0" y="0"/>
+          <a:chExt cx="0" cy="0"/>
+        </a:xfrm>
+      </p:grpSpPr>
+      <p:sp>
+        <p:nvSpPr>
+          <p:cNvPr id="2" name="Title 1">
+            <a:extLst>
+              <a:ext uri="{FF2B5EF4-FFF2-40B4-BE49-F238E27FC236}">
+                <a16:creationId xmlns:a16="http://schemas.microsoft.com/office/drawing/2014/main" id="{99B3045E-1FDC-3C69-8C64-9AC17A8FF679}"/>
+              </a:ext>
+            </a:extLst>
+          </p:cNvPr>
+          <p:cNvSpPr>
+            <a:spLocks noGrp="1"/>
+          </p:cNvSpPr>
+          <p:nvPr>
+            <p:ph type="title"/>
+          </p:nvPr>
+        </p:nvSpPr>
+        <p:spPr/>
+        <p:txBody>
+          <a:bodyPr/>
+          <a:lstStyle/>
+          <a:p>
+            <a:r>
+              <a:rPr lang="en-GB"/>
+              <a:t>Motivation &amp; Case</a:t>
+            </a:r>
+            <a:endParaRPr lang="nb-NO"/>
+          </a:p>
+        </p:txBody>
+      </p:sp>
+      <p:sp>
+        <p:nvSpPr>
+          <p:cNvPr id="5" name="Content Placeholder 4">
+            <a:extLst>
+              <a:ext uri="{FF2B5EF4-FFF2-40B4-BE49-F238E27FC236}">
+                <a16:creationId xmlns:a16="http://schemas.microsoft.com/office/drawing/2014/main" id="{C4313049-B6AD-97F8-D483-FE216CC3F405}"/>
+              </a:ext>
+            </a:extLst>
+          </p:cNvPr>
+          <p:cNvSpPr>
+            <a:spLocks noGrp="1"/>
+          </p:cNvSpPr>
+          <p:nvPr>
+            <p:ph idx="1"/>
+          </p:nvPr>
+        </p:nvSpPr>
+        <p:spPr>
+          <a:xfrm>
+            <a:off x="838200" y="1573823"/>
+            <a:ext cx="10515600" cy="4603140"/>
+          </a:xfrm>
+        </p:spPr>
+        <p:txBody>
+          <a:bodyPr/>
+          <a:lstStyle/>
+          <a:p>
+            <a:r>
+              <a:rPr lang="en-GB" u="sng"/>
+              <a:t>Problem statement</a:t>
+            </a:r>
+            <a:r>
+              <a:rPr lang="en-GB"/>
+              <a:t>:  many interconnected devices that collect, monitor, and exchange data. As networks grow in size and complexity, the </a:t>
+            </a:r>
+            <a:r>
+              <a:rPr lang="en-GB">
+                <a:solidFill>
+                  <a:srgbClr val="FF0000"/>
+                </a:solidFill>
+              </a:rPr>
+              <a:t>volume and heterogeneity of data they generate pose challenges</a:t>
+            </a:r>
+            <a:r>
+              <a:rPr lang="en-GB"/>
+              <a:t> for the effective management of IoT systems.</a:t>
+            </a:r>
+          </a:p>
+          <a:p>
+            <a:endParaRPr lang="en-GB"/>
+          </a:p>
+          <a:p>
+            <a:r>
+              <a:rPr lang="en-GB" u="sng"/>
+              <a:t>Solution</a:t>
+            </a:r>
+            <a:r>
+              <a:rPr lang="en-GB"/>
+              <a:t>: increase system observability using a </a:t>
+            </a:r>
+            <a:r>
+              <a:rPr lang="en-GB" b="1"/>
+              <a:t>combination</a:t>
+            </a:r>
+            <a:r>
+              <a:rPr lang="en-GB"/>
+              <a:t> of </a:t>
+            </a:r>
+            <a:r>
+              <a:rPr lang="en-GB" b="1"/>
+              <a:t>Multi-Agent Systems</a:t>
+            </a:r>
+            <a:r>
+              <a:rPr lang="en-GB"/>
+              <a:t>, </a:t>
+            </a:r>
+            <a:r>
+              <a:rPr lang="en-GB" b="1"/>
+              <a:t>Large Language Models</a:t>
+            </a:r>
+            <a:r>
+              <a:rPr lang="en-GB"/>
+              <a:t> and </a:t>
+            </a:r>
+            <a:r>
+              <a:rPr lang="en-GB" b="1"/>
+              <a:t>Knowledge Graphs</a:t>
+            </a:r>
+            <a:r>
+              <a:rPr lang="en-GB"/>
+              <a:t>.</a:t>
+            </a:r>
+          </a:p>
+          <a:p>
+            <a:endParaRPr lang="nb-NO"/>
+          </a:p>
+        </p:txBody>
+      </p:sp>
+    </p:spTree>
+    <p:extLst>
+      <p:ext uri="{BB962C8B-B14F-4D97-AF65-F5344CB8AC3E}">
+        <p14:creationId xmlns:p14="http://schemas.microsoft.com/office/powerpoint/2010/main" val="3519001183"/>
+      </p:ext>
+    </p:extLst>
+  </p:cSld>
+  <p:clrMapOvr>
+    <a:masterClrMapping/>
+  </p:clrMapOvr>
+</p:sld>
+</file>
+
+<file path=ppt/slides/slide5.xml><?xml version="1.0" encoding="utf-8"?>
+<p:sld xmlns:a="http://schemas.openxmlformats.org/drawingml/2006/main" xmlns:r="http://schemas.openxmlformats.org/officeDocument/2006/relationships" xmlns:p="http://schemas.openxmlformats.org/presentationml/2006/main">
+  <p:cSld>
+    <p:spTree>
+      <p:nvGrpSpPr>
+        <p:cNvPr id="1" name="">
+          <a:extLst>
+            <a:ext uri="{FF2B5EF4-FFF2-40B4-BE49-F238E27FC236}">
+              <a16:creationId xmlns:a16="http://schemas.microsoft.com/office/drawing/2014/main" id="{81F5AA49-98B6-BD8F-6842-0223CCDCFB4A}"/>
+            </a:ext>
+          </a:extLst>
+        </p:cNvPr>
+        <p:cNvGrpSpPr/>
+        <p:nvPr/>
+      </p:nvGrpSpPr>
+      <p:grpSpPr>
+        <a:xfrm>
+          <a:off x="0" y="0"/>
+          <a:ext cx="0" cy="0"/>
+          <a:chOff x="0" y="0"/>
+          <a:chExt cx="0" cy="0"/>
+        </a:xfrm>
+      </p:grpSpPr>
+      <p:sp>
+        <p:nvSpPr>
+          <p:cNvPr id="2" name="Title 1">
+            <a:extLst>
+              <a:ext uri="{FF2B5EF4-FFF2-40B4-BE49-F238E27FC236}">
+                <a16:creationId xmlns:a16="http://schemas.microsoft.com/office/drawing/2014/main" id="{296D1E1B-1F80-7416-68CB-2EDE83CF9448}"/>
+              </a:ext>
+            </a:extLst>
+          </p:cNvPr>
+          <p:cNvSpPr>
+            <a:spLocks noGrp="1"/>
+          </p:cNvSpPr>
+          <p:nvPr>
+            <p:ph type="title"/>
+          </p:nvPr>
+        </p:nvSpPr>
+        <p:spPr/>
+        <p:txBody>
+          <a:bodyPr/>
+          <a:lstStyle/>
+          <a:p>
+            <a:r>
+              <a:rPr lang="en-GB"/>
+              <a:t>Motivation &amp; Case</a:t>
+            </a:r>
+            <a:endParaRPr lang="nb-NO"/>
+          </a:p>
+        </p:txBody>
+      </p:sp>
+      <p:pic>
+        <p:nvPicPr>
+          <p:cNvPr id="9" name="Picture 8" descr="Diagram of a graph&#10;&#10;AI-generated content may be incorrect.">
+            <a:extLst>
+              <a:ext uri="{FF2B5EF4-FFF2-40B4-BE49-F238E27FC236}">
+                <a16:creationId xmlns:a16="http://schemas.microsoft.com/office/drawing/2014/main" id="{67F6D59F-E01D-2244-7153-3115DB82C644}"/>
+              </a:ext>
+            </a:extLst>
+          </p:cNvPr>
+          <p:cNvPicPr>
+            <a:picLocks noChangeAspect="1"/>
+          </p:cNvPicPr>
+          <p:nvPr/>
+        </p:nvPicPr>
+        <p:blipFill>
+          <a:blip r:embed="rId2">
+            <a:extLst>
+              <a:ext uri="{28A0092B-C50C-407E-A947-70E740481C1C}">
+                <a14:useLocalDpi xmlns:a14="http://schemas.microsoft.com/office/drawing/2010/main" val="0"/>
+              </a:ext>
+            </a:extLst>
+          </a:blip>
+          <a:stretch>
+            <a:fillRect/>
+          </a:stretch>
+        </p:blipFill>
+        <p:spPr>
+          <a:xfrm>
+            <a:off x="287419" y="2071688"/>
+            <a:ext cx="5351381" cy="3353952"/>
+          </a:xfrm>
+          <a:prstGeom prst="rect">
+            <a:avLst/>
+          </a:prstGeom>
+        </p:spPr>
+      </p:pic>
+      <p:pic>
+        <p:nvPicPr>
+          <p:cNvPr id="11" name="Picture 10" descr="A diagram of a diagram&#10;&#10;AI-generated content may be incorrect.">
+            <a:extLst>
+              <a:ext uri="{FF2B5EF4-FFF2-40B4-BE49-F238E27FC236}">
+                <a16:creationId xmlns:a16="http://schemas.microsoft.com/office/drawing/2014/main" id="{40B7E609-1D4C-39B8-B961-2361B80B1A03}"/>
+              </a:ext>
+            </a:extLst>
+          </p:cNvPr>
+          <p:cNvPicPr>
+            <a:picLocks noChangeAspect="1"/>
+          </p:cNvPicPr>
+          <p:nvPr/>
+        </p:nvPicPr>
+        <p:blipFill>
+          <a:blip r:embed="rId3">
+            <a:extLst>
+              <a:ext uri="{28A0092B-C50C-407E-A947-70E740481C1C}">
+                <a14:useLocalDpi xmlns:a14="http://schemas.microsoft.com/office/drawing/2010/main" val="0"/>
+              </a:ext>
+            </a:extLst>
+          </a:blip>
+          <a:stretch>
+            <a:fillRect/>
+          </a:stretch>
+        </p:blipFill>
+        <p:spPr>
+          <a:xfrm>
+            <a:off x="6096000" y="1987381"/>
+            <a:ext cx="5638800" cy="2692851"/>
+          </a:xfrm>
+          <a:prstGeom prst="rect">
+            <a:avLst/>
+          </a:prstGeom>
+        </p:spPr>
+      </p:pic>
+      <p:sp>
+        <p:nvSpPr>
+          <p:cNvPr id="12" name="TextBox 11">
+            <a:extLst>
+              <a:ext uri="{FF2B5EF4-FFF2-40B4-BE49-F238E27FC236}">
+                <a16:creationId xmlns:a16="http://schemas.microsoft.com/office/drawing/2014/main" id="{F346D95D-CACC-9C14-7935-13C2B7C165BD}"/>
+              </a:ext>
+            </a:extLst>
+          </p:cNvPr>
+          <p:cNvSpPr txBox="1"/>
+          <p:nvPr/>
+        </p:nvSpPr>
+        <p:spPr>
+          <a:xfrm>
+            <a:off x="1691671" y="1598355"/>
+            <a:ext cx="2542876" cy="369332"/>
+          </a:xfrm>
+          <a:prstGeom prst="rect">
+            <a:avLst/>
+          </a:prstGeom>
+          <a:noFill/>
+        </p:spPr>
+        <p:txBody>
+          <a:bodyPr wrap="none" rtlCol="0">
+            <a:spAutoFit/>
+          </a:bodyPr>
+          <a:lstStyle/>
+          <a:p>
+            <a:r>
+              <a:rPr lang="en-GB" b="1"/>
+              <a:t>a. Knowledge Creation</a:t>
+            </a:r>
+            <a:endParaRPr lang="nb-NO" b="1"/>
+          </a:p>
+        </p:txBody>
+      </p:sp>
+      <p:sp>
+        <p:nvSpPr>
+          <p:cNvPr id="13" name="TextBox 12">
+            <a:extLst>
+              <a:ext uri="{FF2B5EF4-FFF2-40B4-BE49-F238E27FC236}">
+                <a16:creationId xmlns:a16="http://schemas.microsoft.com/office/drawing/2014/main" id="{BB78C7D5-B9AD-3F5A-65C0-67E2F566BE34}"/>
+              </a:ext>
+            </a:extLst>
+          </p:cNvPr>
+          <p:cNvSpPr txBox="1"/>
+          <p:nvPr/>
+        </p:nvSpPr>
+        <p:spPr>
+          <a:xfrm>
+            <a:off x="7021204" y="1506022"/>
+            <a:ext cx="4332596" cy="369332"/>
+          </a:xfrm>
+          <a:prstGeom prst="rect">
+            <a:avLst/>
+          </a:prstGeom>
+          <a:noFill/>
+        </p:spPr>
+        <p:txBody>
+          <a:bodyPr wrap="none" rtlCol="0">
+            <a:spAutoFit/>
+          </a:bodyPr>
+          <a:lstStyle/>
+          <a:p>
+            <a:r>
+              <a:rPr lang="en-GB" b="1"/>
+              <a:t>b. Knowledge Extraction + Data analysis</a:t>
+            </a:r>
+            <a:endParaRPr lang="nb-NO" b="1"/>
+          </a:p>
+        </p:txBody>
+      </p:sp>
+    </p:spTree>
+    <p:extLst>
+      <p:ext uri="{BB962C8B-B14F-4D97-AF65-F5344CB8AC3E}">
+        <p14:creationId xmlns:p14="http://schemas.microsoft.com/office/powerpoint/2010/main" val="830137114"/>
+      </p:ext>
+    </p:extLst>
+  </p:cSld>
+  <p:clrMapOvr>
+    <a:masterClrMapping/>
+  </p:clrMapOvr>
+</p:sld>
+</file>
+
+<file path=ppt/slides/slide6.xml><?xml version="1.0" encoding="utf-8"?>
+<p:sld xmlns:a="http://schemas.openxmlformats.org/drawingml/2006/main" xmlns:r="http://schemas.openxmlformats.org/officeDocument/2006/relationships" xmlns:p="http://schemas.openxmlformats.org/presentationml/2006/main">
+  <p:cSld>
+    <p:spTree>
+      <p:nvGrpSpPr>
+        <p:cNvPr id="1" name="">
+          <a:extLst>
+            <a:ext uri="{FF2B5EF4-FFF2-40B4-BE49-F238E27FC236}">
+              <a16:creationId xmlns:a16="http://schemas.microsoft.com/office/drawing/2014/main" id="{DECDB656-0AEF-965B-771A-52B9AC27E041}"/>
+            </a:ext>
+          </a:extLst>
+        </p:cNvPr>
+        <p:cNvGrpSpPr/>
+        <p:nvPr/>
+      </p:nvGrpSpPr>
+      <p:grpSpPr>
+        <a:xfrm>
+          <a:off x="0" y="0"/>
+          <a:ext cx="0" cy="0"/>
+          <a:chOff x="0" y="0"/>
+          <a:chExt cx="0" cy="0"/>
+        </a:xfrm>
+      </p:grpSpPr>
+      <p:sp>
+        <p:nvSpPr>
+          <p:cNvPr id="2" name="Title 1">
+            <a:extLst>
+              <a:ext uri="{FF2B5EF4-FFF2-40B4-BE49-F238E27FC236}">
+                <a16:creationId xmlns:a16="http://schemas.microsoft.com/office/drawing/2014/main" id="{58216FC4-1449-73CD-DA31-D8EE0A638F04}"/>
+              </a:ext>
+            </a:extLst>
+          </p:cNvPr>
+          <p:cNvSpPr>
+            <a:spLocks noGrp="1"/>
+          </p:cNvSpPr>
+          <p:nvPr>
+            <p:ph type="title"/>
+          </p:nvPr>
+        </p:nvSpPr>
+        <p:spPr/>
+        <p:txBody>
+          <a:bodyPr/>
+          <a:lstStyle/>
+          <a:p>
+            <a:r>
+              <a:rPr lang="en-GB"/>
+              <a:t>Motivation &amp; Case</a:t>
+            </a:r>
+            <a:endParaRPr lang="nb-NO"/>
+          </a:p>
+        </p:txBody>
+      </p:sp>
+      <p:pic>
+        <p:nvPicPr>
+          <p:cNvPr id="9" name="Picture 8" descr="Diagram of a graph&#10;&#10;AI-generated content may be incorrect.">
+            <a:extLst>
+              <a:ext uri="{FF2B5EF4-FFF2-40B4-BE49-F238E27FC236}">
+                <a16:creationId xmlns:a16="http://schemas.microsoft.com/office/drawing/2014/main" id="{F0756A66-7FD3-9143-B6D0-B5ECB8BAB1BF}"/>
+              </a:ext>
+            </a:extLst>
+          </p:cNvPr>
+          <p:cNvPicPr>
+            <a:picLocks noChangeAspect="1"/>
+          </p:cNvPicPr>
+          <p:nvPr/>
+        </p:nvPicPr>
+        <p:blipFill>
+          <a:blip r:embed="rId2">
+            <a:extLst>
+              <a:ext uri="{28A0092B-C50C-407E-A947-70E740481C1C}">
+                <a14:useLocalDpi xmlns:a14="http://schemas.microsoft.com/office/drawing/2010/main" val="0"/>
+              </a:ext>
+            </a:extLst>
+          </a:blip>
+          <a:stretch>
+            <a:fillRect/>
+          </a:stretch>
+        </p:blipFill>
+        <p:spPr>
+          <a:xfrm>
+            <a:off x="287419" y="2071688"/>
+            <a:ext cx="5351381" cy="3353952"/>
+          </a:xfrm>
+          <a:prstGeom prst="rect">
+            <a:avLst/>
+          </a:prstGeom>
+        </p:spPr>
+      </p:pic>
+      <p:pic>
+        <p:nvPicPr>
+          <p:cNvPr id="11" name="Picture 10" descr="A diagram of a diagram&#10;&#10;AI-generated content may be incorrect.">
+            <a:extLst>
+              <a:ext uri="{FF2B5EF4-FFF2-40B4-BE49-F238E27FC236}">
+                <a16:creationId xmlns:a16="http://schemas.microsoft.com/office/drawing/2014/main" id="{E39403B4-87A8-7455-E5B8-AAD7C8B3DF65}"/>
+              </a:ext>
+            </a:extLst>
+          </p:cNvPr>
+          <p:cNvPicPr>
+            <a:picLocks noChangeAspect="1"/>
+          </p:cNvPicPr>
+          <p:nvPr/>
+        </p:nvPicPr>
+        <p:blipFill>
+          <a:blip r:embed="rId3">
+            <a:extLst>
+              <a:ext uri="{28A0092B-C50C-407E-A947-70E740481C1C}">
+                <a14:useLocalDpi xmlns:a14="http://schemas.microsoft.com/office/drawing/2010/main" val="0"/>
+              </a:ext>
+            </a:extLst>
+          </a:blip>
+          <a:stretch>
+            <a:fillRect/>
+          </a:stretch>
+        </p:blipFill>
+        <p:spPr>
+          <a:xfrm>
+            <a:off x="6096000" y="1987381"/>
+            <a:ext cx="5638800" cy="2692851"/>
+          </a:xfrm>
+          <a:prstGeom prst="rect">
+            <a:avLst/>
+          </a:prstGeom>
+        </p:spPr>
+      </p:pic>
+      <p:sp>
+        <p:nvSpPr>
+          <p:cNvPr id="12" name="TextBox 11">
+            <a:extLst>
+              <a:ext uri="{FF2B5EF4-FFF2-40B4-BE49-F238E27FC236}">
+                <a16:creationId xmlns:a16="http://schemas.microsoft.com/office/drawing/2014/main" id="{00396311-B279-47B5-FC1C-E06A6073310A}"/>
+              </a:ext>
+            </a:extLst>
+          </p:cNvPr>
+          <p:cNvSpPr txBox="1"/>
+          <p:nvPr/>
+        </p:nvSpPr>
+        <p:spPr>
+          <a:xfrm>
+            <a:off x="1691671" y="1598355"/>
+            <a:ext cx="2542876" cy="369332"/>
+          </a:xfrm>
+          <a:prstGeom prst="rect">
+            <a:avLst/>
+          </a:prstGeom>
+          <a:noFill/>
+        </p:spPr>
+        <p:txBody>
+          <a:bodyPr wrap="none" rtlCol="0">
+            <a:spAutoFit/>
+          </a:bodyPr>
+          <a:lstStyle/>
+          <a:p>
+            <a:r>
+              <a:rPr lang="en-GB" b="1"/>
+              <a:t>a. Knowledge Creation</a:t>
+            </a:r>
+            <a:endParaRPr lang="nb-NO" b="1"/>
+          </a:p>
+        </p:txBody>
+      </p:sp>
+      <p:sp>
+        <p:nvSpPr>
+          <p:cNvPr id="13" name="TextBox 12">
+            <a:extLst>
+              <a:ext uri="{FF2B5EF4-FFF2-40B4-BE49-F238E27FC236}">
+                <a16:creationId xmlns:a16="http://schemas.microsoft.com/office/drawing/2014/main" id="{3C3B534E-02FC-AE29-20F5-5CD94AED39D2}"/>
+              </a:ext>
+            </a:extLst>
+          </p:cNvPr>
+          <p:cNvSpPr txBox="1"/>
+          <p:nvPr/>
+        </p:nvSpPr>
+        <p:spPr>
+          <a:xfrm>
+            <a:off x="7021204" y="1506022"/>
+            <a:ext cx="4332596" cy="369332"/>
+          </a:xfrm>
+          <a:prstGeom prst="rect">
+            <a:avLst/>
+          </a:prstGeom>
+          <a:noFill/>
+        </p:spPr>
+        <p:txBody>
+          <a:bodyPr wrap="none" rtlCol="0">
+            <a:spAutoFit/>
+          </a:bodyPr>
+          <a:lstStyle/>
+          <a:p>
+            <a:r>
+              <a:rPr lang="en-GB" b="1"/>
+              <a:t>b. Knowledge Extraction + Data analysis</a:t>
+            </a:r>
+            <a:endParaRPr lang="nb-NO" b="1"/>
+          </a:p>
+        </p:txBody>
+      </p:sp>
+      <p:sp>
+        <p:nvSpPr>
+          <p:cNvPr id="14" name="TextBox 13">
+            <a:extLst>
+              <a:ext uri="{FF2B5EF4-FFF2-40B4-BE49-F238E27FC236}">
+                <a16:creationId xmlns:a16="http://schemas.microsoft.com/office/drawing/2014/main" id="{E958EECE-C9AE-614C-C5BA-520674EB46AC}"/>
+              </a:ext>
+            </a:extLst>
+          </p:cNvPr>
+          <p:cNvSpPr txBox="1"/>
+          <p:nvPr/>
+        </p:nvSpPr>
+        <p:spPr>
+          <a:xfrm>
+            <a:off x="3243943" y="5514252"/>
+            <a:ext cx="6043642" cy="584775"/>
+          </a:xfrm>
+          <a:prstGeom prst="rect">
+            <a:avLst/>
+          </a:prstGeom>
+          <a:noFill/>
+        </p:spPr>
+        <p:txBody>
+          <a:bodyPr wrap="none" rtlCol="0">
+            <a:spAutoFit/>
+          </a:bodyPr>
+          <a:lstStyle/>
+          <a:p>
+            <a:r>
+              <a:rPr lang="en-GB" sz="3200" b="1"/>
+              <a:t>How to do this (efficiently too)? </a:t>
+            </a:r>
+            <a:endParaRPr lang="nb-NO" sz="3200" b="1"/>
+          </a:p>
+        </p:txBody>
+      </p:sp>
+    </p:spTree>
+    <p:extLst>
+      <p:ext uri="{BB962C8B-B14F-4D97-AF65-F5344CB8AC3E}">
+        <p14:creationId xmlns:p14="http://schemas.microsoft.com/office/powerpoint/2010/main" val="2381808421"/>
+      </p:ext>
+    </p:extLst>
+  </p:cSld>
+  <p:clrMapOvr>
+    <a:masterClrMapping/>
+  </p:clrMapOvr>
+</p:sld>
+</file>
+
+<file path=ppt/slides/slide7.xml><?xml version="1.0" encoding="utf-8"?>
+<p:sld xmlns:a="http://schemas.openxmlformats.org/drawingml/2006/main" xmlns:r="http://schemas.openxmlformats.org/officeDocument/2006/relationships" xmlns:p="http://schemas.openxmlformats.org/presentationml/2006/main">
+  <p:cSld>
+    <p:spTree>
+      <p:nvGrpSpPr>
+        <p:cNvPr id="1" name="">
+          <a:extLst>
+            <a:ext uri="{FF2B5EF4-FFF2-40B4-BE49-F238E27FC236}">
+              <a16:creationId xmlns:a16="http://schemas.microsoft.com/office/drawing/2014/main" id="{E28F5431-3E97-6BD5-A632-3F77FACC030B}"/>
+            </a:ext>
+          </a:extLst>
+        </p:cNvPr>
+        <p:cNvGrpSpPr/>
+        <p:nvPr/>
+      </p:nvGrpSpPr>
+      <p:grpSpPr>
+        <a:xfrm>
+          <a:off x="0" y="0"/>
+          <a:ext cx="0" cy="0"/>
+          <a:chOff x="0" y="0"/>
+          <a:chExt cx="0" cy="0"/>
+        </a:xfrm>
+      </p:grpSpPr>
+      <p:sp>
+        <p:nvSpPr>
+          <p:cNvPr id="2" name="Title 1">
+            <a:extLst>
+              <a:ext uri="{FF2B5EF4-FFF2-40B4-BE49-F238E27FC236}">
+                <a16:creationId xmlns:a16="http://schemas.microsoft.com/office/drawing/2014/main" id="{99B00596-AECD-E80B-AE13-9F87AE95412F}"/>
+              </a:ext>
+            </a:extLst>
+          </p:cNvPr>
+          <p:cNvSpPr>
+            <a:spLocks noGrp="1"/>
+          </p:cNvSpPr>
+          <p:nvPr>
+            <p:ph type="title"/>
+          </p:nvPr>
+        </p:nvSpPr>
+        <p:spPr/>
+        <p:txBody>
+          <a:bodyPr/>
+          <a:lstStyle/>
+          <a:p>
+            <a:r>
+              <a:rPr lang="en-GB"/>
+              <a:t>Setup</a:t>
+            </a:r>
+            <a:endParaRPr lang="nb-NO"/>
+          </a:p>
+        </p:txBody>
+      </p:sp>
+      <p:sp>
+        <p:nvSpPr>
+          <p:cNvPr id="3" name="TextBox 2">
+            <a:extLst>
+              <a:ext uri="{FF2B5EF4-FFF2-40B4-BE49-F238E27FC236}">
+                <a16:creationId xmlns:a16="http://schemas.microsoft.com/office/drawing/2014/main" id="{DD688EE6-22E0-701D-55EB-DF2C06802881}"/>
+              </a:ext>
+            </a:extLst>
+          </p:cNvPr>
+          <p:cNvSpPr txBox="1"/>
+          <p:nvPr/>
+        </p:nvSpPr>
+        <p:spPr>
+          <a:xfrm>
+            <a:off x="838200" y="2039031"/>
+            <a:ext cx="9895114" cy="3108543"/>
+          </a:xfrm>
+          <a:prstGeom prst="rect">
+            <a:avLst/>
+          </a:prstGeom>
+          <a:noFill/>
+        </p:spPr>
+        <p:txBody>
+          <a:bodyPr wrap="square" rtlCol="0">
+            <a:spAutoFit/>
+          </a:bodyPr>
+          <a:lstStyle/>
+          <a:p>
+            <a:pPr marL="342900" indent="-342900">
+              <a:buAutoNum type="arabicParenR"/>
+            </a:pPr>
+            <a:r>
+              <a:rPr lang="en-GB" sz="2800"/>
+              <a:t>Connection to databases (</a:t>
+            </a:r>
+            <a:r>
+              <a:rPr lang="en-GB" sz="2800" err="1"/>
+              <a:t>e.g</a:t>
+            </a:r>
+            <a:r>
+              <a:rPr lang="en-GB" sz="2800"/>
+              <a:t> </a:t>
+            </a:r>
+            <a:r>
+              <a:rPr lang="en-GB" sz="2800" err="1"/>
+              <a:t>MinIO</a:t>
+            </a:r>
+            <a:r>
+              <a:rPr lang="en-GB" sz="2800"/>
+              <a:t>, </a:t>
+            </a:r>
+            <a:r>
+              <a:rPr lang="en-GB" sz="2800" err="1"/>
+              <a:t>InfluxDB</a:t>
+            </a:r>
+            <a:r>
+              <a:rPr lang="en-GB" sz="2800"/>
+              <a:t>, Neo4j)</a:t>
+            </a:r>
+          </a:p>
+          <a:p>
+            <a:pPr marL="342900" indent="-342900">
+              <a:buAutoNum type="arabicParenR"/>
+            </a:pPr>
+            <a:endParaRPr lang="en-GB" sz="2800"/>
+          </a:p>
+          <a:p>
+            <a:pPr marL="342900" indent="-342900">
+              <a:buAutoNum type="arabicParenR"/>
+            </a:pPr>
+            <a:r>
+              <a:rPr lang="en-GB" sz="2800"/>
+              <a:t>Multi-agent framework (e.g. </a:t>
+            </a:r>
+            <a:r>
+              <a:rPr lang="en-GB" sz="2800" err="1"/>
+              <a:t>AutoGen</a:t>
+            </a:r>
+            <a:r>
+              <a:rPr lang="en-GB" sz="2800"/>
+              <a:t>)</a:t>
+            </a:r>
+          </a:p>
+          <a:p>
+            <a:pPr marL="342900" indent="-342900">
+              <a:buAutoNum type="arabicParenR"/>
+            </a:pPr>
+            <a:endParaRPr lang="en-GB" sz="2800"/>
+          </a:p>
+          <a:p>
+            <a:pPr marL="342900" indent="-342900">
+              <a:buAutoNum type="arabicParenR"/>
+            </a:pPr>
+            <a:r>
+              <a:rPr lang="en-GB" sz="2800"/>
+              <a:t>LLM access (e.g. via OpenAI API, </a:t>
+            </a:r>
+            <a:r>
+              <a:rPr lang="en-GB" sz="2800" err="1"/>
+              <a:t>Ollama</a:t>
+            </a:r>
+            <a:r>
+              <a:rPr lang="en-GB" sz="2800"/>
+              <a:t>)</a:t>
+            </a:r>
+          </a:p>
+          <a:p>
+            <a:pPr marL="342900" indent="-342900">
+              <a:buAutoNum type="arabicParenR"/>
+            </a:pPr>
+            <a:endParaRPr lang="en-GB" sz="2800"/>
+          </a:p>
+          <a:p>
+            <a:pPr marL="342900" indent="-342900">
+              <a:buAutoNum type="arabicParenR"/>
+            </a:pPr>
+            <a:r>
+              <a:rPr lang="en-GB" sz="2800"/>
+              <a:t>Data</a:t>
+            </a:r>
+          </a:p>
+        </p:txBody>
+      </p:sp>
+    </p:spTree>
+    <p:extLst>
+      <p:ext uri="{BB962C8B-B14F-4D97-AF65-F5344CB8AC3E}">
+        <p14:creationId xmlns:p14="http://schemas.microsoft.com/office/powerpoint/2010/main" val="3435594461"/>
+      </p:ext>
+    </p:extLst>
+  </p:cSld>
+  <p:clrMapOvr>
+    <a:masterClrMapping/>
+  </p:clrMapOvr>
+</p:sld>
+</file>
+
+<file path=ppt/slides/slide8.xml><?xml version="1.0" encoding="utf-8"?>
+<p:sld xmlns:a="http://schemas.openxmlformats.org/drawingml/2006/main" xmlns:r="http://schemas.openxmlformats.org/officeDocument/2006/relationships" xmlns:p="http://schemas.openxmlformats.org/presentationml/2006/main">
+  <p:cSld>
+    <p:spTree>
+      <p:nvGrpSpPr>
+        <p:cNvPr id="1" name="">
+          <a:extLst>
+            <a:ext uri="{FF2B5EF4-FFF2-40B4-BE49-F238E27FC236}">
+              <a16:creationId xmlns:a16="http://schemas.microsoft.com/office/drawing/2014/main" id="{36C4941A-88F4-1091-EB15-5945E9DC497C}"/>
+            </a:ext>
+          </a:extLst>
+        </p:cNvPr>
+        <p:cNvGrpSpPr/>
+        <p:nvPr/>
+      </p:nvGrpSpPr>
+      <p:grpSpPr>
+        <a:xfrm>
+          <a:off x="0" y="0"/>
+          <a:ext cx="0" cy="0"/>
+          <a:chOff x="0" y="0"/>
+          <a:chExt cx="0" cy="0"/>
+        </a:xfrm>
+      </p:grpSpPr>
+      <p:sp>
+        <p:nvSpPr>
+          <p:cNvPr id="2" name="Title 1">
+            <a:extLst>
+              <a:ext uri="{FF2B5EF4-FFF2-40B4-BE49-F238E27FC236}">
+                <a16:creationId xmlns:a16="http://schemas.microsoft.com/office/drawing/2014/main" id="{288F3ABB-8E15-D44C-A7AA-77C0C3B27628}"/>
+              </a:ext>
+            </a:extLst>
+          </p:cNvPr>
+          <p:cNvSpPr>
+            <a:spLocks noGrp="1"/>
+          </p:cNvSpPr>
+          <p:nvPr>
+            <p:ph type="title"/>
+          </p:nvPr>
+        </p:nvSpPr>
+        <p:spPr>
+          <a:xfrm>
+            <a:off x="251671" y="0"/>
+            <a:ext cx="10515600" cy="1325563"/>
+          </a:xfrm>
+        </p:spPr>
+        <p:txBody>
+          <a:bodyPr/>
+          <a:lstStyle/>
+          <a:p>
+            <a:r>
+              <a:rPr lang="en-GB"/>
+              <a:t>Demonstration</a:t>
+            </a:r>
+            <a:endParaRPr lang="nb-NO"/>
+          </a:p>
+        </p:txBody>
+      </p:sp>
+      <p:sp>
+        <p:nvSpPr>
+          <p:cNvPr id="5" name="TextBox 4">
+            <a:extLst>
+              <a:ext uri="{FF2B5EF4-FFF2-40B4-BE49-F238E27FC236}">
+                <a16:creationId xmlns:a16="http://schemas.microsoft.com/office/drawing/2014/main" id="{69396315-6ACA-B8DE-6C04-97E290E0CCDF}"/>
+              </a:ext>
+            </a:extLst>
+          </p:cNvPr>
+          <p:cNvSpPr txBox="1"/>
+          <p:nvPr/>
+        </p:nvSpPr>
+        <p:spPr>
+          <a:xfrm>
+            <a:off x="6096000" y="1184246"/>
+            <a:ext cx="5696123" cy="646331"/>
+          </a:xfrm>
+          <a:prstGeom prst="rect">
+            <a:avLst/>
+          </a:prstGeom>
+          <a:noFill/>
+        </p:spPr>
+        <p:txBody>
+          <a:bodyPr wrap="square" rtlCol="0">
+            <a:spAutoFit/>
+          </a:bodyPr>
+          <a:lstStyle/>
+          <a:p>
+            <a:pPr latinLnBrk="1"/>
+            <a:endParaRPr lang="nb-NO"/>
+          </a:p>
+          <a:p>
+            <a:pPr latinLnBrk="1"/>
+            <a:endParaRPr lang="nb-NO"/>
+          </a:p>
+        </p:txBody>
+      </p:sp>
+      <p:pic>
+        <p:nvPicPr>
+          <p:cNvPr id="3" name="Picture 2">
+            <a:extLst>
+              <a:ext uri="{FF2B5EF4-FFF2-40B4-BE49-F238E27FC236}">
+                <a16:creationId xmlns:a16="http://schemas.microsoft.com/office/drawing/2014/main" id="{C210DFDC-33B0-BDF6-0FD3-CFEE194F0F97}"/>
+              </a:ext>
+            </a:extLst>
+          </p:cNvPr>
+          <p:cNvPicPr>
+            <a:picLocks noChangeAspect="1"/>
+          </p:cNvPicPr>
+          <p:nvPr/>
+        </p:nvPicPr>
+        <p:blipFill>
+          <a:blip r:embed="rId3"/>
+          <a:stretch>
+            <a:fillRect/>
+          </a:stretch>
+        </p:blipFill>
+        <p:spPr>
+          <a:xfrm>
+            <a:off x="4097530" y="0"/>
+            <a:ext cx="6975566" cy="6858000"/>
+          </a:xfrm>
+          <a:prstGeom prst="rect">
+            <a:avLst/>
+          </a:prstGeom>
+        </p:spPr>
+      </p:pic>
+    </p:spTree>
+    <p:extLst>
+      <p:ext uri="{BB962C8B-B14F-4D97-AF65-F5344CB8AC3E}">
+        <p14:creationId xmlns:p14="http://schemas.microsoft.com/office/powerpoint/2010/main" val="3686194882"/>
+      </p:ext>
+    </p:extLst>
+  </p:cSld>
+  <p:clrMapOvr>
+    <a:masterClrMapping/>
+  </p:clrMapOvr>
+</p:sld>
+</file>
+
+<file path=ppt/slides/slide9.xml><?xml version="1.0" encoding="utf-8"?>
+<p:sld xmlns:a="http://schemas.openxmlformats.org/drawingml/2006/main" xmlns:r="http://schemas.openxmlformats.org/officeDocument/2006/relationships" xmlns:p="http://schemas.openxmlformats.org/presentationml/2006/main">
+  <p:cSld>
+    <p:spTree>
+      <p:nvGrpSpPr>
+        <p:cNvPr id="1" name="">
+          <a:extLst>
+            <a:ext uri="{FF2B5EF4-FFF2-40B4-BE49-F238E27FC236}">
+              <a16:creationId xmlns:a16="http://schemas.microsoft.com/office/drawing/2014/main" id="{4AA0A2B9-62A9-C6FD-AA2F-D59040E4BB6C}"/>
+            </a:ext>
+          </a:extLst>
+        </p:cNvPr>
+        <p:cNvGrpSpPr/>
+        <p:nvPr/>
+      </p:nvGrpSpPr>
+      <p:grpSpPr>
+        <a:xfrm>
+          <a:off x="0" y="0"/>
+          <a:ext cx="0" cy="0"/>
+          <a:chOff x="0" y="0"/>
+          <a:chExt cx="0" cy="0"/>
+        </a:xfrm>
+      </p:grpSpPr>
+      <p:sp>
+        <p:nvSpPr>
+          <p:cNvPr id="2" name="Title 1">
+            <a:extLst>
+              <a:ext uri="{FF2B5EF4-FFF2-40B4-BE49-F238E27FC236}">
+                <a16:creationId xmlns:a16="http://schemas.microsoft.com/office/drawing/2014/main" id="{5C622FF5-336F-00DF-516E-A86C504AE1EB}"/>
+              </a:ext>
+            </a:extLst>
+          </p:cNvPr>
+          <p:cNvSpPr>
+            <a:spLocks noGrp="1"/>
+          </p:cNvSpPr>
+          <p:nvPr>
+            <p:ph type="title"/>
+          </p:nvPr>
+        </p:nvSpPr>
+        <p:spPr>
+          <a:xfrm>
+            <a:off x="251671" y="0"/>
+            <a:ext cx="10515600" cy="1325563"/>
+          </a:xfrm>
+        </p:spPr>
+        <p:txBody>
+          <a:bodyPr/>
+          <a:lstStyle/>
+          <a:p>
+            <a:r>
+              <a:rPr lang="en-GB"/>
+              <a:t>Demonstration</a:t>
+            </a:r>
+            <a:endParaRPr lang="nb-NO"/>
+          </a:p>
+        </p:txBody>
+      </p:sp>
+      <p:sp>
+        <p:nvSpPr>
+          <p:cNvPr id="4" name="TextBox 3">
+            <a:extLst>
+              <a:ext uri="{FF2B5EF4-FFF2-40B4-BE49-F238E27FC236}">
+                <a16:creationId xmlns:a16="http://schemas.microsoft.com/office/drawing/2014/main" id="{0B452961-7C22-AA99-FC57-E50E9A494828}"/>
+              </a:ext>
+            </a:extLst>
+          </p:cNvPr>
+          <p:cNvSpPr txBox="1"/>
+          <p:nvPr/>
+        </p:nvSpPr>
+        <p:spPr>
+          <a:xfrm>
+            <a:off x="251671" y="1317071"/>
+            <a:ext cx="5696123" cy="6032421"/>
+          </a:xfrm>
+          <a:prstGeom prst="rect">
+            <a:avLst/>
+          </a:prstGeom>
+          <a:noFill/>
+        </p:spPr>
+        <p:txBody>
+          <a:bodyPr wrap="square" rtlCol="0">
+            <a:spAutoFit/>
+          </a:bodyPr>
+          <a:lstStyle/>
+          <a:p>
+            <a:pPr latinLnBrk="1"/>
+            <a:r>
+              <a:rPr lang="nb-NO" sz="1400" b="1">
+                <a:solidFill>
+                  <a:schemeClr val="tx2">
+                    <a:lumMod val="90000"/>
+                    <a:lumOff val="10000"/>
+                  </a:schemeClr>
+                </a:solidFill>
+              </a:rPr>
+              <a:t>1. User: </a:t>
+            </a:r>
+            <a:r>
+              <a:rPr lang="nb-NO" sz="1400" b="1" err="1">
+                <a:solidFill>
+                  <a:schemeClr val="tx2">
+                    <a:lumMod val="90000"/>
+                    <a:lumOff val="10000"/>
+                  </a:schemeClr>
+                </a:solidFill>
+              </a:rPr>
+              <a:t>What</a:t>
+            </a:r>
+            <a:r>
+              <a:rPr lang="nb-NO" sz="1400" b="1">
+                <a:solidFill>
+                  <a:schemeClr val="tx2">
+                    <a:lumMod val="90000"/>
+                    <a:lumOff val="10000"/>
+                  </a:schemeClr>
+                </a:solidFill>
+              </a:rPr>
+              <a:t> is </a:t>
+            </a:r>
+            <a:r>
+              <a:rPr lang="nb-NO" sz="1400" b="1" err="1">
+                <a:solidFill>
+                  <a:schemeClr val="tx2">
+                    <a:lumMod val="90000"/>
+                    <a:lumOff val="10000"/>
+                  </a:schemeClr>
+                </a:solidFill>
+              </a:rPr>
+              <a:t>the</a:t>
+            </a:r>
+            <a:r>
+              <a:rPr lang="nb-NO" sz="1400" b="1">
+                <a:solidFill>
+                  <a:schemeClr val="tx2">
+                    <a:lumMod val="90000"/>
+                    <a:lumOff val="10000"/>
+                  </a:schemeClr>
+                </a:solidFill>
+              </a:rPr>
+              <a:t> </a:t>
+            </a:r>
+            <a:r>
+              <a:rPr lang="nb-NO" sz="1400" b="1" err="1">
+                <a:solidFill>
+                  <a:schemeClr val="tx2">
+                    <a:lumMod val="90000"/>
+                    <a:lumOff val="10000"/>
+                  </a:schemeClr>
+                </a:solidFill>
+              </a:rPr>
+              <a:t>summary</a:t>
+            </a:r>
+            <a:r>
+              <a:rPr lang="nb-NO" sz="1400" b="1">
+                <a:solidFill>
+                  <a:schemeClr val="tx2">
+                    <a:lumMod val="90000"/>
+                    <a:lumOff val="10000"/>
+                  </a:schemeClr>
+                </a:solidFill>
+              </a:rPr>
+              <a:t> </a:t>
+            </a:r>
+            <a:r>
+              <a:rPr lang="nb-NO" sz="1400" b="1" err="1">
+                <a:solidFill>
+                  <a:schemeClr val="tx2">
+                    <a:lumMod val="90000"/>
+                    <a:lumOff val="10000"/>
+                  </a:schemeClr>
+                </a:solidFill>
+              </a:rPr>
+              <a:t>of</a:t>
+            </a:r>
+            <a:r>
+              <a:rPr lang="nb-NO" sz="1400" b="1">
+                <a:solidFill>
+                  <a:schemeClr val="tx2">
+                    <a:lumMod val="90000"/>
+                    <a:lumOff val="10000"/>
+                  </a:schemeClr>
+                </a:solidFill>
+              </a:rPr>
+              <a:t> </a:t>
+            </a:r>
+            <a:r>
+              <a:rPr lang="nb-NO" sz="1400" b="1" err="1">
+                <a:solidFill>
+                  <a:schemeClr val="tx2">
+                    <a:lumMod val="90000"/>
+                    <a:lumOff val="10000"/>
+                  </a:schemeClr>
+                </a:solidFill>
+              </a:rPr>
+              <a:t>the</a:t>
+            </a:r>
+            <a:r>
+              <a:rPr lang="nb-NO" sz="1400" b="1">
+                <a:solidFill>
+                  <a:schemeClr val="tx2">
+                    <a:lumMod val="90000"/>
+                    <a:lumOff val="10000"/>
+                  </a:schemeClr>
+                </a:solidFill>
+              </a:rPr>
+              <a:t> </a:t>
+            </a:r>
+            <a:r>
+              <a:rPr lang="nb-NO" sz="1400" b="1" err="1">
+                <a:solidFill>
+                  <a:schemeClr val="tx2">
+                    <a:lumMod val="90000"/>
+                    <a:lumOff val="10000"/>
+                  </a:schemeClr>
+                </a:solidFill>
+              </a:rPr>
+              <a:t>static</a:t>
+            </a:r>
+            <a:r>
+              <a:rPr lang="nb-NO" sz="1400" b="1">
+                <a:solidFill>
+                  <a:schemeClr val="tx2">
+                    <a:lumMod val="90000"/>
+                    <a:lumOff val="10000"/>
+                  </a:schemeClr>
+                </a:solidFill>
+              </a:rPr>
+              <a:t> PCAP in CMS?</a:t>
+            </a:r>
+          </a:p>
+          <a:p>
+            <a:pPr latinLnBrk="1"/>
+            <a:r>
+              <a:rPr lang="nb-NO" sz="1400"/>
+              <a:t>2. The </a:t>
+            </a:r>
+            <a:r>
+              <a:rPr lang="nb-NO" sz="1400" err="1"/>
+              <a:t>static</a:t>
+            </a:r>
+            <a:r>
+              <a:rPr lang="nb-NO" sz="1400"/>
+              <a:t> PCAP data </a:t>
+            </a:r>
+            <a:r>
+              <a:rPr lang="nb-NO" sz="1400" err="1"/>
+              <a:t>linked</a:t>
+            </a:r>
+            <a:r>
+              <a:rPr lang="nb-NO" sz="1400"/>
+              <a:t> to </a:t>
+            </a:r>
+            <a:r>
+              <a:rPr lang="nb-NO" sz="1400" err="1"/>
+              <a:t>the</a:t>
+            </a:r>
+            <a:r>
+              <a:rPr lang="nb-NO" sz="1400"/>
+              <a:t> CMS </a:t>
+            </a:r>
+            <a:r>
+              <a:rPr lang="nb-NO" sz="1400" err="1"/>
+              <a:t>asset</a:t>
+            </a:r>
+            <a:r>
+              <a:rPr lang="nb-NO" sz="1400"/>
+              <a:t> </a:t>
+            </a:r>
+            <a:r>
+              <a:rPr lang="nb-NO" sz="1400" err="1"/>
+              <a:t>can</a:t>
+            </a:r>
+            <a:r>
+              <a:rPr lang="nb-NO" sz="1400"/>
+              <a:t> be </a:t>
+            </a:r>
+            <a:r>
+              <a:rPr lang="nb-NO" sz="1400" err="1"/>
+              <a:t>found</a:t>
+            </a:r>
+            <a:r>
+              <a:rPr lang="nb-NO" sz="1400"/>
+              <a:t> at </a:t>
+            </a:r>
+            <a:r>
+              <a:rPr lang="nb-NO" sz="1400" err="1"/>
+              <a:t>the</a:t>
+            </a:r>
+            <a:r>
+              <a:rPr lang="nb-NO" sz="1400"/>
+              <a:t> </a:t>
+            </a:r>
+            <a:r>
+              <a:rPr lang="nb-NO" sz="1400" err="1"/>
+              <a:t>endpoint</a:t>
+            </a:r>
+            <a:r>
+              <a:rPr lang="nb-NO" sz="1400"/>
+              <a:t>: </a:t>
+            </a:r>
+            <a:r>
+              <a:rPr lang="nb-NO" sz="1400" err="1"/>
+              <a:t>static-cms</a:t>
+            </a:r>
+            <a:r>
+              <a:rPr lang="nb-NO" sz="1400"/>
+              <a:t>. If </a:t>
+            </a:r>
+            <a:r>
+              <a:rPr lang="nb-NO" sz="1400" err="1"/>
+              <a:t>you</a:t>
+            </a:r>
+            <a:r>
+              <a:rPr lang="nb-NO" sz="1400"/>
+              <a:t> </a:t>
+            </a:r>
+            <a:r>
+              <a:rPr lang="nb-NO" sz="1400" err="1"/>
+              <a:t>need</a:t>
+            </a:r>
+            <a:r>
+              <a:rPr lang="nb-NO" sz="1400"/>
+              <a:t> a </a:t>
+            </a:r>
+            <a:r>
+              <a:rPr lang="nb-NO" sz="1400" err="1"/>
+              <a:t>summary</a:t>
+            </a:r>
+            <a:r>
+              <a:rPr lang="nb-NO" sz="1400"/>
+              <a:t> or </a:t>
+            </a:r>
+            <a:r>
+              <a:rPr lang="nb-NO" sz="1400" err="1"/>
+              <a:t>content</a:t>
+            </a:r>
+            <a:r>
+              <a:rPr lang="nb-NO" sz="1400"/>
+              <a:t> from </a:t>
+            </a:r>
+            <a:r>
+              <a:rPr lang="nb-NO" sz="1400" err="1"/>
+              <a:t>this</a:t>
+            </a:r>
+            <a:r>
+              <a:rPr lang="nb-NO" sz="1400"/>
+              <a:t> </a:t>
+            </a:r>
+            <a:r>
+              <a:rPr lang="nb-NO" sz="1400" err="1"/>
+              <a:t>static</a:t>
+            </a:r>
+            <a:r>
+              <a:rPr lang="nb-NO" sz="1400"/>
+              <a:t> PCAP, </a:t>
+            </a:r>
+            <a:r>
+              <a:rPr lang="nb-NO" sz="1400" err="1"/>
+              <a:t>please</a:t>
+            </a:r>
+            <a:r>
+              <a:rPr lang="nb-NO" sz="1400"/>
+              <a:t> </a:t>
+            </a:r>
+            <a:r>
+              <a:rPr lang="nb-NO" sz="1400" err="1"/>
+              <a:t>access</a:t>
+            </a:r>
+            <a:r>
+              <a:rPr lang="nb-NO" sz="1400"/>
+              <a:t> </a:t>
+            </a:r>
+            <a:r>
+              <a:rPr lang="nb-NO" sz="1400" err="1"/>
+              <a:t>this</a:t>
+            </a:r>
+            <a:r>
+              <a:rPr lang="nb-NO" sz="1400"/>
+              <a:t> </a:t>
+            </a:r>
+            <a:r>
+              <a:rPr lang="nb-NO" sz="1400" err="1"/>
+              <a:t>bucket</a:t>
+            </a:r>
+            <a:r>
+              <a:rPr lang="nb-NO" sz="1400"/>
+              <a:t>.</a:t>
+            </a:r>
+          </a:p>
+          <a:p>
+            <a:pPr latinLnBrk="1"/>
+            <a:r>
+              <a:rPr lang="nb-NO" sz="1400" b="1"/>
+              <a:t>3. [</a:t>
+            </a:r>
+            <a:r>
+              <a:rPr lang="nb-NO" sz="1400" b="1" err="1"/>
+              <a:t>MinIO</a:t>
+            </a:r>
+            <a:r>
+              <a:rPr lang="nb-NO" sz="1400" b="1"/>
+              <a:t>] ✅ File '20230511_Denial_of_Charge_IdTag_filtered_pcaplabelled.pcap' </a:t>
+            </a:r>
+            <a:r>
+              <a:rPr lang="nb-NO" sz="1400" b="1" err="1"/>
+              <a:t>downloaded</a:t>
+            </a:r>
+            <a:r>
+              <a:rPr lang="nb-NO" sz="1400" b="1"/>
+              <a:t> to </a:t>
+            </a:r>
+            <a:r>
+              <a:rPr lang="nb-NO" sz="1400" b="1" err="1"/>
+              <a:t>data_exports</a:t>
+            </a:r>
+            <a:r>
+              <a:rPr lang="nb-NO" sz="1400" b="1"/>
+              <a:t>\20230511_Denial_of_Charge_IdTag_filtered_pcaplabelled.pcap</a:t>
+            </a:r>
+          </a:p>
+          <a:p>
+            <a:pPr latinLnBrk="1"/>
+            <a:r>
+              <a:rPr lang="nb-NO" sz="1400"/>
+              <a:t>4-. import </a:t>
+            </a:r>
+            <a:r>
+              <a:rPr lang="nb-NO" sz="1400" err="1"/>
+              <a:t>pyshark</a:t>
+            </a:r>
+            <a:endParaRPr lang="nb-NO" sz="1400"/>
+          </a:p>
+          <a:p>
+            <a:pPr latinLnBrk="1"/>
+            <a:r>
+              <a:rPr lang="nb-NO" sz="1400" err="1"/>
+              <a:t>def</a:t>
+            </a:r>
+            <a:r>
+              <a:rPr lang="nb-NO" sz="1400"/>
+              <a:t> </a:t>
+            </a:r>
+            <a:r>
+              <a:rPr lang="nb-NO" sz="1400" err="1"/>
+              <a:t>summarize_pcap</a:t>
+            </a:r>
+            <a:r>
+              <a:rPr lang="nb-NO" sz="1400"/>
+              <a:t>(</a:t>
+            </a:r>
+            <a:r>
+              <a:rPr lang="nb-NO" sz="1400" err="1"/>
+              <a:t>file_path</a:t>
+            </a:r>
+            <a:r>
+              <a:rPr lang="nb-NO" sz="1400"/>
+              <a:t>):</a:t>
+            </a:r>
+          </a:p>
+          <a:p>
+            <a:pPr latinLnBrk="1"/>
+            <a:r>
+              <a:rPr lang="nb-NO" sz="1400"/>
+              <a:t>    </a:t>
+            </a:r>
+            <a:r>
+              <a:rPr lang="nb-NO" sz="1400" err="1"/>
+              <a:t>cap</a:t>
+            </a:r>
+            <a:r>
+              <a:rPr lang="nb-NO" sz="1400"/>
+              <a:t> = </a:t>
+            </a:r>
+            <a:r>
+              <a:rPr lang="nb-NO" sz="1400" err="1"/>
+              <a:t>pyshark.FileCapture</a:t>
+            </a:r>
+            <a:r>
+              <a:rPr lang="nb-NO" sz="1400"/>
+              <a:t>(</a:t>
+            </a:r>
+            <a:r>
+              <a:rPr lang="nb-NO" sz="1400" err="1"/>
+              <a:t>file_path</a:t>
+            </a:r>
+            <a:r>
+              <a:rPr lang="nb-NO" sz="1400"/>
+              <a:t>, </a:t>
+            </a:r>
+            <a:r>
+              <a:rPr lang="nb-NO" sz="1400" err="1"/>
+              <a:t>only_summaries</a:t>
+            </a:r>
+            <a:r>
+              <a:rPr lang="nb-NO" sz="1400"/>
+              <a:t>=True)</a:t>
+            </a:r>
+          </a:p>
+          <a:p>
+            <a:pPr latinLnBrk="1"/>
+            <a:r>
+              <a:rPr lang="nb-NO" sz="1400"/>
+              <a:t>(…)</a:t>
+            </a:r>
+          </a:p>
+          <a:p>
+            <a:pPr latinLnBrk="1"/>
+            <a:r>
+              <a:rPr lang="nb-NO" sz="1400" err="1"/>
+              <a:t>def</a:t>
+            </a:r>
+            <a:r>
+              <a:rPr lang="nb-NO" sz="1400"/>
+              <a:t> </a:t>
+            </a:r>
+            <a:r>
+              <a:rPr lang="nb-NO" sz="1400" err="1"/>
+              <a:t>main</a:t>
+            </a:r>
+            <a:r>
+              <a:rPr lang="nb-NO" sz="1400"/>
+              <a:t>():</a:t>
+            </a:r>
+          </a:p>
+          <a:p>
+            <a:pPr latinLnBrk="1"/>
+            <a:r>
+              <a:rPr lang="nb-NO" sz="1400"/>
+              <a:t>    </a:t>
+            </a:r>
+            <a:r>
+              <a:rPr lang="nb-NO" sz="1400" err="1"/>
+              <a:t>file_path</a:t>
+            </a:r>
+            <a:r>
+              <a:rPr lang="nb-NO" sz="1400"/>
+              <a:t> = </a:t>
+            </a:r>
+            <a:r>
+              <a:rPr lang="nb-NO" sz="1400" err="1"/>
+              <a:t>r"data_exports</a:t>
+            </a:r>
+            <a:r>
+              <a:rPr lang="nb-NO" sz="1400"/>
+              <a:t>\20230511_Denial_of_Charge_IdTag_filtered_pcaplabelled.pcap"</a:t>
+            </a:r>
+          </a:p>
+          <a:p>
+            <a:pPr latinLnBrk="1"/>
+            <a:r>
+              <a:rPr lang="nb-NO" sz="1400"/>
+              <a:t>    </a:t>
+            </a:r>
+            <a:r>
+              <a:rPr lang="nb-NO" sz="1400" err="1"/>
+              <a:t>summarize_pcap</a:t>
+            </a:r>
+            <a:r>
+              <a:rPr lang="nb-NO" sz="1400"/>
+              <a:t>(</a:t>
+            </a:r>
+            <a:r>
+              <a:rPr lang="nb-NO" sz="1400" err="1"/>
+              <a:t>file_path</a:t>
+            </a:r>
+            <a:r>
+              <a:rPr lang="nb-NO" sz="1400"/>
+              <a:t>)</a:t>
+            </a:r>
+          </a:p>
+          <a:p>
+            <a:pPr latinLnBrk="1"/>
+            <a:r>
+              <a:rPr lang="nb-NO" sz="1400" b="1">
+                <a:solidFill>
+                  <a:srgbClr val="000000"/>
+                </a:solidFill>
+                <a:latin typeface="Aptos" panose="020B0004020202020204" pitchFamily="34" charset="0"/>
+              </a:rPr>
+              <a:t>5. Your </a:t>
+            </a:r>
+            <a:r>
+              <a:rPr lang="nb-NO" sz="1400" b="1" err="1">
+                <a:solidFill>
+                  <a:srgbClr val="000000"/>
+                </a:solidFill>
+                <a:latin typeface="Aptos" panose="020B0004020202020204" pitchFamily="34" charset="0"/>
+              </a:rPr>
+              <a:t>code</a:t>
+            </a:r>
+            <a:r>
+              <a:rPr lang="nb-NO" sz="1400" b="1">
+                <a:solidFill>
+                  <a:srgbClr val="000000"/>
+                </a:solidFill>
+                <a:latin typeface="Aptos" panose="020B0004020202020204" pitchFamily="34" charset="0"/>
+              </a:rPr>
+              <a:t> is </a:t>
+            </a:r>
+            <a:r>
+              <a:rPr lang="nb-NO" sz="1400" b="1" err="1">
+                <a:solidFill>
+                  <a:srgbClr val="000000"/>
+                </a:solidFill>
+                <a:latin typeface="Aptos" panose="020B0004020202020204" pitchFamily="34" charset="0"/>
+              </a:rPr>
+              <a:t>well-structured</a:t>
+            </a:r>
+            <a:r>
+              <a:rPr lang="nb-NO" sz="1400" b="1">
+                <a:solidFill>
+                  <a:srgbClr val="000000"/>
+                </a:solidFill>
+                <a:latin typeface="Aptos" panose="020B0004020202020204" pitchFamily="34" charset="0"/>
+              </a:rPr>
+              <a:t> for </a:t>
+            </a:r>
+            <a:r>
+              <a:rPr lang="nb-NO" sz="1400" b="1" err="1">
+                <a:solidFill>
+                  <a:srgbClr val="000000"/>
+                </a:solidFill>
+                <a:latin typeface="Aptos" panose="020B0004020202020204" pitchFamily="34" charset="0"/>
+              </a:rPr>
+              <a:t>summarizing</a:t>
+            </a:r>
+            <a:r>
+              <a:rPr lang="nb-NO" sz="1400" b="1">
+                <a:solidFill>
+                  <a:srgbClr val="000000"/>
+                </a:solidFill>
+                <a:latin typeface="Aptos" panose="020B0004020202020204" pitchFamily="34" charset="0"/>
+              </a:rPr>
+              <a:t> a PCAP file. </a:t>
+            </a:r>
+            <a:r>
+              <a:rPr lang="nb-NO" sz="1400" b="1" err="1">
+                <a:solidFill>
+                  <a:srgbClr val="000000"/>
+                </a:solidFill>
+                <a:latin typeface="Aptos" panose="020B0004020202020204" pitchFamily="34" charset="0"/>
+              </a:rPr>
+              <a:t>Here’s</a:t>
+            </a:r>
+            <a:r>
+              <a:rPr lang="nb-NO" sz="1400" b="1">
+                <a:solidFill>
+                  <a:srgbClr val="000000"/>
+                </a:solidFill>
+                <a:latin typeface="Aptos" panose="020B0004020202020204" pitchFamily="34" charset="0"/>
+              </a:rPr>
+              <a:t> </a:t>
+            </a:r>
+            <a:r>
+              <a:rPr lang="nb-NO" sz="1400" b="1" err="1">
+                <a:solidFill>
+                  <a:srgbClr val="000000"/>
+                </a:solidFill>
+                <a:latin typeface="Aptos" panose="020B0004020202020204" pitchFamily="34" charset="0"/>
+              </a:rPr>
+              <a:t>what</a:t>
+            </a:r>
+            <a:r>
+              <a:rPr lang="nb-NO" sz="1400" b="1">
+                <a:solidFill>
+                  <a:srgbClr val="000000"/>
+                </a:solidFill>
+                <a:latin typeface="Aptos" panose="020B0004020202020204" pitchFamily="34" charset="0"/>
+              </a:rPr>
+              <a:t> it </a:t>
+            </a:r>
+            <a:r>
+              <a:rPr lang="nb-NO" sz="1400" b="1" err="1">
+                <a:solidFill>
+                  <a:srgbClr val="000000"/>
+                </a:solidFill>
+                <a:latin typeface="Aptos" panose="020B0004020202020204" pitchFamily="34" charset="0"/>
+              </a:rPr>
+              <a:t>will</a:t>
+            </a:r>
+            <a:r>
+              <a:rPr lang="nb-NO" sz="1400" b="1">
+                <a:solidFill>
+                  <a:srgbClr val="000000"/>
+                </a:solidFill>
+                <a:latin typeface="Aptos" panose="020B0004020202020204" pitchFamily="34" charset="0"/>
+              </a:rPr>
+              <a:t> do for </a:t>
+            </a:r>
+            <a:r>
+              <a:rPr lang="nb-NO" sz="1400" b="1" err="1">
+                <a:solidFill>
+                  <a:srgbClr val="000000"/>
+                </a:solidFill>
+                <a:latin typeface="Aptos" panose="020B0004020202020204" pitchFamily="34" charset="0"/>
+              </a:rPr>
+              <a:t>data_exports</a:t>
+            </a:r>
+            <a:r>
+              <a:rPr lang="nb-NO" sz="1400" b="1">
+                <a:solidFill>
+                  <a:srgbClr val="000000"/>
+                </a:solidFill>
+                <a:latin typeface="Aptos" panose="020B0004020202020204" pitchFamily="34" charset="0"/>
+              </a:rPr>
+              <a:t>\20230511_Denial_of_Charge_IdTag_filtered_pcaplabelled.pcap:</a:t>
+            </a:r>
+            <a:endParaRPr lang="nb-NO" sz="1400" b="1"/>
+          </a:p>
+          <a:p>
+            <a:pPr latinLnBrk="1"/>
+            <a:r>
+              <a:rPr lang="nb-NO" sz="1400" b="1">
+                <a:solidFill>
+                  <a:srgbClr val="000000"/>
+                </a:solidFill>
+                <a:latin typeface="Aptos" panose="020B0004020202020204" pitchFamily="34" charset="0"/>
+              </a:rPr>
+              <a:t>- Count all </a:t>
+            </a:r>
+            <a:r>
+              <a:rPr lang="nb-NO" sz="1400" b="1" err="1">
+                <a:solidFill>
+                  <a:srgbClr val="000000"/>
+                </a:solidFill>
+                <a:latin typeface="Aptos" panose="020B0004020202020204" pitchFamily="34" charset="0"/>
+              </a:rPr>
+              <a:t>packets</a:t>
+            </a:r>
+            <a:r>
+              <a:rPr lang="nb-NO" sz="1400" b="1">
+                <a:solidFill>
+                  <a:srgbClr val="000000"/>
+                </a:solidFill>
+                <a:latin typeface="Aptos" panose="020B0004020202020204" pitchFamily="34" charset="0"/>
+              </a:rPr>
+              <a:t>.</a:t>
+            </a:r>
+            <a:endParaRPr lang="nb-NO" sz="1400" b="1"/>
+          </a:p>
+          <a:p>
+            <a:pPr latinLnBrk="1"/>
+            <a:r>
+              <a:rPr lang="nb-NO" sz="1400" b="1">
+                <a:solidFill>
+                  <a:srgbClr val="000000"/>
+                </a:solidFill>
+                <a:latin typeface="Aptos" panose="020B0004020202020204" pitchFamily="34" charset="0"/>
+              </a:rPr>
+              <a:t>- Count </a:t>
+            </a:r>
+            <a:r>
+              <a:rPr lang="nb-NO" sz="1400" b="1" err="1">
+                <a:solidFill>
+                  <a:srgbClr val="000000"/>
+                </a:solidFill>
+                <a:latin typeface="Aptos" panose="020B0004020202020204" pitchFamily="34" charset="0"/>
+              </a:rPr>
+              <a:t>frequency</a:t>
+            </a:r>
+            <a:r>
+              <a:rPr lang="nb-NO" sz="1400" b="1">
+                <a:solidFill>
+                  <a:srgbClr val="000000"/>
+                </a:solidFill>
+                <a:latin typeface="Aptos" panose="020B0004020202020204" pitchFamily="34" charset="0"/>
+              </a:rPr>
+              <a:t> </a:t>
+            </a:r>
+            <a:r>
+              <a:rPr lang="nb-NO" sz="1400" b="1" err="1">
+                <a:solidFill>
+                  <a:srgbClr val="000000"/>
+                </a:solidFill>
+                <a:latin typeface="Aptos" panose="020B0004020202020204" pitchFamily="34" charset="0"/>
+              </a:rPr>
+              <a:t>of</a:t>
+            </a:r>
+            <a:r>
+              <a:rPr lang="nb-NO" sz="1400" b="1">
+                <a:solidFill>
+                  <a:srgbClr val="000000"/>
+                </a:solidFill>
+                <a:latin typeface="Aptos" panose="020B0004020202020204" pitchFamily="34" charset="0"/>
+              </a:rPr>
+              <a:t> </a:t>
+            </a:r>
+            <a:r>
+              <a:rPr lang="nb-NO" sz="1400" b="1" err="1">
+                <a:solidFill>
+                  <a:srgbClr val="000000"/>
+                </a:solidFill>
+                <a:latin typeface="Aptos" panose="020B0004020202020204" pitchFamily="34" charset="0"/>
+              </a:rPr>
+              <a:t>protocols</a:t>
+            </a:r>
+            <a:r>
+              <a:rPr lang="nb-NO" sz="1400" b="1">
+                <a:solidFill>
+                  <a:srgbClr val="000000"/>
+                </a:solidFill>
+                <a:latin typeface="Aptos" panose="020B0004020202020204" pitchFamily="34" charset="0"/>
+              </a:rPr>
+              <a:t>.</a:t>
+            </a:r>
+            <a:endParaRPr lang="nb-NO" sz="1400" b="1"/>
+          </a:p>
+          <a:p>
+            <a:pPr latinLnBrk="1"/>
+            <a:r>
+              <a:rPr lang="nb-NO" sz="1400" b="1">
+                <a:solidFill>
+                  <a:srgbClr val="000000"/>
+                </a:solidFill>
+                <a:latin typeface="Aptos" panose="020B0004020202020204" pitchFamily="34" charset="0"/>
+              </a:rPr>
+              <a:t>- List </a:t>
+            </a:r>
+            <a:r>
+              <a:rPr lang="nb-NO" sz="1400" b="1" err="1">
+                <a:solidFill>
+                  <a:srgbClr val="000000"/>
+                </a:solidFill>
+                <a:latin typeface="Aptos" panose="020B0004020202020204" pitchFamily="34" charset="0"/>
+              </a:rPr>
+              <a:t>unique</a:t>
+            </a:r>
+            <a:r>
+              <a:rPr lang="nb-NO" sz="1400" b="1">
+                <a:solidFill>
+                  <a:srgbClr val="000000"/>
+                </a:solidFill>
+                <a:latin typeface="Aptos" panose="020B0004020202020204" pitchFamily="34" charset="0"/>
+              </a:rPr>
+              <a:t> </a:t>
+            </a:r>
+            <a:r>
+              <a:rPr lang="nb-NO" sz="1400" b="1" err="1">
+                <a:solidFill>
+                  <a:srgbClr val="000000"/>
+                </a:solidFill>
+                <a:latin typeface="Aptos" panose="020B0004020202020204" pitchFamily="34" charset="0"/>
+              </a:rPr>
+              <a:t>source</a:t>
+            </a:r>
+            <a:r>
+              <a:rPr lang="nb-NO" sz="1400" b="1">
+                <a:solidFill>
+                  <a:srgbClr val="000000"/>
+                </a:solidFill>
+                <a:latin typeface="Aptos" panose="020B0004020202020204" pitchFamily="34" charset="0"/>
+              </a:rPr>
+              <a:t> and </a:t>
+            </a:r>
+            <a:r>
+              <a:rPr lang="nb-NO" sz="1400" b="1" err="1">
+                <a:solidFill>
+                  <a:srgbClr val="000000"/>
+                </a:solidFill>
+                <a:latin typeface="Aptos" panose="020B0004020202020204" pitchFamily="34" charset="0"/>
+              </a:rPr>
+              <a:t>destination</a:t>
+            </a:r>
+            <a:r>
+              <a:rPr lang="nb-NO" sz="1400" b="1">
+                <a:solidFill>
+                  <a:srgbClr val="000000"/>
+                </a:solidFill>
+                <a:latin typeface="Aptos" panose="020B0004020202020204" pitchFamily="34" charset="0"/>
+              </a:rPr>
+              <a:t> IP </a:t>
+            </a:r>
+            <a:r>
+              <a:rPr lang="nb-NO" sz="1400" b="1" err="1">
+                <a:solidFill>
+                  <a:srgbClr val="000000"/>
+                </a:solidFill>
+                <a:latin typeface="Aptos" panose="020B0004020202020204" pitchFamily="34" charset="0"/>
+              </a:rPr>
+              <a:t>addresses</a:t>
+            </a:r>
+            <a:r>
+              <a:rPr lang="nb-NO" sz="1400" b="1">
+                <a:solidFill>
+                  <a:srgbClr val="000000"/>
+                </a:solidFill>
+                <a:latin typeface="Aptos" panose="020B0004020202020204" pitchFamily="34" charset="0"/>
+              </a:rPr>
+              <a:t> (</a:t>
+            </a:r>
+            <a:r>
+              <a:rPr lang="nb-NO" sz="1400" b="1" err="1">
+                <a:solidFill>
+                  <a:srgbClr val="000000"/>
+                </a:solidFill>
+                <a:latin typeface="Aptos" panose="020B0004020202020204" pitchFamily="34" charset="0"/>
+              </a:rPr>
+              <a:t>with</a:t>
+            </a:r>
+            <a:r>
+              <a:rPr lang="nb-NO" sz="1400" b="1">
+                <a:solidFill>
+                  <a:srgbClr val="000000"/>
+                </a:solidFill>
+                <a:latin typeface="Aptos" panose="020B0004020202020204" pitchFamily="34" charset="0"/>
+              </a:rPr>
+              <a:t> 5 samples </a:t>
+            </a:r>
+            <a:r>
+              <a:rPr lang="nb-NO" sz="1400" b="1" err="1">
+                <a:solidFill>
+                  <a:srgbClr val="000000"/>
+                </a:solidFill>
+                <a:latin typeface="Aptos" panose="020B0004020202020204" pitchFamily="34" charset="0"/>
+              </a:rPr>
+              <a:t>each</a:t>
+            </a:r>
+            <a:r>
+              <a:rPr lang="nb-NO" sz="1400" b="1">
+                <a:solidFill>
+                  <a:srgbClr val="000000"/>
+                </a:solidFill>
+                <a:latin typeface="Aptos" panose="020B0004020202020204" pitchFamily="34" charset="0"/>
+              </a:rPr>
+              <a:t>)</a:t>
+            </a:r>
+            <a:endParaRPr lang="nb-NO" sz="1400" b="1"/>
+          </a:p>
+          <a:p>
+            <a:pPr latinLnBrk="1"/>
+            <a:r>
+              <a:rPr lang="nb-NO" sz="1400" b="1">
+                <a:solidFill>
+                  <a:srgbClr val="000000"/>
+                </a:solidFill>
+                <a:latin typeface="Aptos" panose="020B0004020202020204" pitchFamily="34" charset="0"/>
+              </a:rPr>
+              <a:t>(…) If </a:t>
+            </a:r>
+            <a:r>
+              <a:rPr lang="nb-NO" sz="1400" b="1" err="1">
+                <a:solidFill>
+                  <a:srgbClr val="000000"/>
+                </a:solidFill>
+                <a:latin typeface="Aptos" panose="020B0004020202020204" pitchFamily="34" charset="0"/>
+              </a:rPr>
+              <a:t>you</a:t>
+            </a:r>
+            <a:r>
+              <a:rPr lang="nb-NO" sz="1400" b="1">
+                <a:solidFill>
+                  <a:srgbClr val="000000"/>
+                </a:solidFill>
+                <a:latin typeface="Aptos" panose="020B0004020202020204" pitchFamily="34" charset="0"/>
+              </a:rPr>
+              <a:t> </a:t>
+            </a:r>
+            <a:r>
+              <a:rPr lang="nb-NO" sz="1400" b="1" err="1">
+                <a:solidFill>
+                  <a:srgbClr val="000000"/>
+                </a:solidFill>
+                <a:latin typeface="Aptos" panose="020B0004020202020204" pitchFamily="34" charset="0"/>
+              </a:rPr>
+              <a:t>want</a:t>
+            </a:r>
+            <a:r>
+              <a:rPr lang="nb-NO" sz="1400" b="1">
+                <a:solidFill>
+                  <a:srgbClr val="000000"/>
+                </a:solidFill>
+                <a:latin typeface="Aptos" panose="020B0004020202020204" pitchFamily="34" charset="0"/>
+              </a:rPr>
+              <a:t> to </a:t>
+            </a:r>
+            <a:r>
+              <a:rPr lang="nb-NO" sz="1400" b="1" err="1">
+                <a:solidFill>
+                  <a:srgbClr val="000000"/>
+                </a:solidFill>
+                <a:latin typeface="Aptos" panose="020B0004020202020204" pitchFamily="34" charset="0"/>
+              </a:rPr>
+              <a:t>extend</a:t>
+            </a:r>
+            <a:r>
+              <a:rPr lang="nb-NO" sz="1400" b="1">
+                <a:solidFill>
+                  <a:srgbClr val="000000"/>
+                </a:solidFill>
+                <a:latin typeface="Aptos" panose="020B0004020202020204" pitchFamily="34" charset="0"/>
+              </a:rPr>
+              <a:t> </a:t>
+            </a:r>
+            <a:r>
+              <a:rPr lang="nb-NO" sz="1400" b="1" err="1">
+                <a:solidFill>
+                  <a:srgbClr val="000000"/>
+                </a:solidFill>
+                <a:latin typeface="Aptos" panose="020B0004020202020204" pitchFamily="34" charset="0"/>
+              </a:rPr>
+              <a:t>the</a:t>
+            </a:r>
+            <a:r>
+              <a:rPr lang="nb-NO" sz="1400" b="1">
+                <a:solidFill>
+                  <a:srgbClr val="000000"/>
+                </a:solidFill>
+                <a:latin typeface="Aptos" panose="020B0004020202020204" pitchFamily="34" charset="0"/>
+              </a:rPr>
+              <a:t> </a:t>
+            </a:r>
+            <a:r>
+              <a:rPr lang="nb-NO" sz="1400" b="1" err="1">
+                <a:solidFill>
+                  <a:srgbClr val="000000"/>
+                </a:solidFill>
+                <a:latin typeface="Aptos" panose="020B0004020202020204" pitchFamily="34" charset="0"/>
+              </a:rPr>
+              <a:t>summary</a:t>
+            </a:r>
+            <a:r>
+              <a:rPr lang="nb-NO" sz="1400" b="1">
+                <a:solidFill>
+                  <a:srgbClr val="000000"/>
+                </a:solidFill>
+                <a:latin typeface="Aptos" panose="020B0004020202020204" pitchFamily="34" charset="0"/>
+              </a:rPr>
+              <a:t> (for </a:t>
+            </a:r>
+            <a:r>
+              <a:rPr lang="nb-NO" sz="1400" b="1" err="1">
+                <a:solidFill>
+                  <a:srgbClr val="000000"/>
+                </a:solidFill>
+                <a:latin typeface="Aptos" panose="020B0004020202020204" pitchFamily="34" charset="0"/>
+              </a:rPr>
+              <a:t>example</a:t>
+            </a:r>
+            <a:r>
+              <a:rPr lang="nb-NO" sz="1400" b="1">
+                <a:solidFill>
+                  <a:srgbClr val="000000"/>
+                </a:solidFill>
+                <a:latin typeface="Aptos" panose="020B0004020202020204" pitchFamily="34" charset="0"/>
+              </a:rPr>
+              <a:t>, </a:t>
+            </a:r>
+            <a:r>
+              <a:rPr lang="nb-NO" sz="1400" b="1" err="1">
+                <a:solidFill>
+                  <a:srgbClr val="000000"/>
+                </a:solidFill>
+                <a:latin typeface="Aptos" panose="020B0004020202020204" pitchFamily="34" charset="0"/>
+              </a:rPr>
+              <a:t>adding</a:t>
+            </a:r>
+            <a:r>
+              <a:rPr lang="nb-NO" sz="1400" b="1">
+                <a:solidFill>
+                  <a:srgbClr val="000000"/>
+                </a:solidFill>
+                <a:latin typeface="Aptos" panose="020B0004020202020204" pitchFamily="34" charset="0"/>
+              </a:rPr>
+              <a:t> port </a:t>
+            </a:r>
+            <a:r>
+              <a:rPr lang="nb-NO" sz="1400" b="1" err="1">
+                <a:solidFill>
+                  <a:srgbClr val="000000"/>
+                </a:solidFill>
+                <a:latin typeface="Aptos" panose="020B0004020202020204" pitchFamily="34" charset="0"/>
+              </a:rPr>
+              <a:t>information</a:t>
+            </a:r>
+            <a:r>
+              <a:rPr lang="nb-NO" sz="1400" b="1">
+                <a:solidFill>
+                  <a:srgbClr val="000000"/>
+                </a:solidFill>
+                <a:latin typeface="Aptos" panose="020B0004020202020204" pitchFamily="34" charset="0"/>
+              </a:rPr>
+              <a:t> or time </a:t>
+            </a:r>
+            <a:r>
+              <a:rPr lang="nb-NO" sz="1400" b="1" err="1">
+                <a:solidFill>
+                  <a:srgbClr val="000000"/>
+                </a:solidFill>
+                <a:latin typeface="Aptos" panose="020B0004020202020204" pitchFamily="34" charset="0"/>
+              </a:rPr>
+              <a:t>duration</a:t>
+            </a:r>
+            <a:r>
+              <a:rPr lang="nb-NO" sz="1400" b="1">
+                <a:solidFill>
+                  <a:srgbClr val="000000"/>
+                </a:solidFill>
+                <a:latin typeface="Aptos" panose="020B0004020202020204" pitchFamily="34" charset="0"/>
+              </a:rPr>
+              <a:t>), let </a:t>
+            </a:r>
+            <a:r>
+              <a:rPr lang="nb-NO" sz="1400" b="1" err="1">
+                <a:solidFill>
+                  <a:srgbClr val="000000"/>
+                </a:solidFill>
+                <a:latin typeface="Aptos" panose="020B0004020202020204" pitchFamily="34" charset="0"/>
+              </a:rPr>
+              <a:t>me</a:t>
+            </a:r>
+            <a:r>
+              <a:rPr lang="nb-NO" sz="1400" b="1">
+                <a:solidFill>
+                  <a:srgbClr val="000000"/>
+                </a:solidFill>
+                <a:latin typeface="Aptos" panose="020B0004020202020204" pitchFamily="34" charset="0"/>
+              </a:rPr>
+              <a:t> </a:t>
+            </a:r>
+            <a:r>
+              <a:rPr lang="nb-NO" sz="1400" b="1" err="1">
+                <a:solidFill>
+                  <a:srgbClr val="000000"/>
+                </a:solidFill>
+                <a:latin typeface="Aptos" panose="020B0004020202020204" pitchFamily="34" charset="0"/>
+              </a:rPr>
+              <a:t>know</a:t>
+            </a:r>
+            <a:r>
+              <a:rPr lang="nb-NO" sz="1400" b="1">
+                <a:solidFill>
+                  <a:srgbClr val="000000"/>
+                </a:solidFill>
+                <a:latin typeface="Aptos" panose="020B0004020202020204" pitchFamily="34" charset="0"/>
+              </a:rPr>
+              <a:t>!</a:t>
+            </a:r>
+            <a:endParaRPr lang="nb-NO" sz="1400" b="1"/>
+          </a:p>
+          <a:p>
+            <a:pPr latinLnBrk="1"/>
+            <a:endParaRPr lang="nb-NO" sz="1400"/>
+          </a:p>
+          <a:p>
+            <a:pPr latinLnBrk="1"/>
+            <a:endParaRPr lang="nb-NO"/>
+          </a:p>
+          <a:p>
+            <a:pPr latinLnBrk="1"/>
+            <a:endParaRPr lang="nb-NO"/>
+          </a:p>
+        </p:txBody>
+      </p:sp>
+      <p:sp>
+        <p:nvSpPr>
+          <p:cNvPr id="5" name="TextBox 4">
+            <a:extLst>
+              <a:ext uri="{FF2B5EF4-FFF2-40B4-BE49-F238E27FC236}">
+                <a16:creationId xmlns:a16="http://schemas.microsoft.com/office/drawing/2014/main" id="{F9C3B493-5D61-DE4A-19A4-FA70AB21B4FF}"/>
+              </a:ext>
+            </a:extLst>
+          </p:cNvPr>
+          <p:cNvSpPr txBox="1"/>
+          <p:nvPr/>
+        </p:nvSpPr>
+        <p:spPr>
+          <a:xfrm>
+            <a:off x="6096000" y="1184246"/>
+            <a:ext cx="5696123" cy="646331"/>
+          </a:xfrm>
+          <a:prstGeom prst="rect">
+            <a:avLst/>
+          </a:prstGeom>
+          <a:noFill/>
+        </p:spPr>
+        <p:txBody>
+          <a:bodyPr wrap="square" rtlCol="0">
+            <a:spAutoFit/>
+          </a:bodyPr>
+          <a:lstStyle/>
+          <a:p>
+            <a:pPr latinLnBrk="1"/>
+            <a:endParaRPr lang="nb-NO"/>
+          </a:p>
+          <a:p>
+            <a:pPr latinLnBrk="1"/>
+            <a:endParaRPr lang="nb-NO"/>
+          </a:p>
+        </p:txBody>
+      </p:sp>
+      <p:sp>
+        <p:nvSpPr>
+          <p:cNvPr id="8" name="TextBox 7">
+            <a:extLst>
+              <a:ext uri="{FF2B5EF4-FFF2-40B4-BE49-F238E27FC236}">
+                <a16:creationId xmlns:a16="http://schemas.microsoft.com/office/drawing/2014/main" id="{6C58347D-A206-504D-BE2B-9D9A629961BB}"/>
+              </a:ext>
+            </a:extLst>
+          </p:cNvPr>
+          <p:cNvSpPr txBox="1"/>
+          <p:nvPr/>
+        </p:nvSpPr>
+        <p:spPr>
+          <a:xfrm>
+            <a:off x="6096000" y="1184246"/>
+            <a:ext cx="6094602" cy="5401479"/>
+          </a:xfrm>
+          <a:prstGeom prst="rect">
+            <a:avLst/>
+          </a:prstGeom>
+          <a:noFill/>
+        </p:spPr>
+        <p:txBody>
+          <a:bodyPr wrap="square">
+            <a:spAutoFit/>
+          </a:bodyPr>
+          <a:lstStyle/>
+          <a:p>
+            <a:pPr marL="0" algn="l" rtl="0" eaLnBrk="1" latinLnBrk="1" hangingPunct="1">
+              <a:buNone/>
+            </a:pPr>
+            <a:r>
+              <a:rPr lang="nb-NO" sz="1500" b="1" kern="1200">
+                <a:solidFill>
+                  <a:srgbClr val="000000"/>
+                </a:solidFill>
+                <a:effectLst/>
+                <a:latin typeface="Aptos" panose="020B0004020202020204" pitchFamily="34" charset="0"/>
+                <a:ea typeface="+mn-ea"/>
+                <a:cs typeface="+mn-cs"/>
+              </a:rPr>
+              <a:t>6. </a:t>
+            </a:r>
+            <a:r>
+              <a:rPr lang="nb-NO" sz="1500" b="1" kern="1200" err="1">
+                <a:solidFill>
+                  <a:srgbClr val="000000"/>
+                </a:solidFill>
+                <a:effectLst/>
+                <a:latin typeface="Aptos" panose="020B0004020202020204" pitchFamily="34" charset="0"/>
+                <a:ea typeface="+mn-ea"/>
+                <a:cs typeface="+mn-cs"/>
+              </a:rPr>
+              <a:t>Summary</a:t>
+            </a:r>
+            <a:r>
+              <a:rPr lang="nb-NO" sz="1500" b="1" kern="1200">
+                <a:solidFill>
+                  <a:srgbClr val="000000"/>
+                </a:solidFill>
+                <a:effectLst/>
+                <a:latin typeface="Aptos" panose="020B0004020202020204" pitchFamily="34" charset="0"/>
+                <a:ea typeface="+mn-ea"/>
+                <a:cs typeface="+mn-cs"/>
+              </a:rPr>
+              <a:t> </a:t>
+            </a:r>
+            <a:r>
+              <a:rPr lang="nb-NO" sz="1500" b="1" kern="1200" err="1">
+                <a:solidFill>
+                  <a:srgbClr val="000000"/>
+                </a:solidFill>
+                <a:effectLst/>
+                <a:latin typeface="Aptos" panose="020B0004020202020204" pitchFamily="34" charset="0"/>
+                <a:ea typeface="+mn-ea"/>
+                <a:cs typeface="+mn-cs"/>
+              </a:rPr>
+              <a:t>of</a:t>
+            </a:r>
+            <a:r>
+              <a:rPr lang="nb-NO" sz="1500" b="1" kern="1200">
+                <a:solidFill>
+                  <a:srgbClr val="000000"/>
+                </a:solidFill>
+                <a:effectLst/>
+                <a:latin typeface="Aptos" panose="020B0004020202020204" pitchFamily="34" charset="0"/>
+                <a:ea typeface="+mn-ea"/>
+                <a:cs typeface="+mn-cs"/>
+              </a:rPr>
+              <a:t> PCAP: </a:t>
+            </a:r>
+            <a:r>
+              <a:rPr lang="nb-NO" sz="1500" b="1" kern="1200" err="1">
+                <a:solidFill>
+                  <a:srgbClr val="000000"/>
+                </a:solidFill>
+                <a:effectLst/>
+                <a:latin typeface="Aptos" panose="020B0004020202020204" pitchFamily="34" charset="0"/>
+                <a:ea typeface="+mn-ea"/>
+                <a:cs typeface="+mn-cs"/>
+              </a:rPr>
+              <a:t>data_exports</a:t>
+            </a:r>
+            <a:r>
+              <a:rPr lang="nb-NO" sz="1500" b="1" kern="1200">
+                <a:solidFill>
+                  <a:srgbClr val="000000"/>
+                </a:solidFill>
+                <a:effectLst/>
+                <a:latin typeface="Aptos" panose="020B0004020202020204" pitchFamily="34" charset="0"/>
+                <a:ea typeface="+mn-ea"/>
+                <a:cs typeface="+mn-cs"/>
+              </a:rPr>
+              <a:t>\20230511_Denial_of_Charge_IdTag_filtered_pcaplabelled.pcap</a:t>
+            </a:r>
+            <a:endParaRPr lang="nb-NO" sz="1500" b="1">
+              <a:effectLst/>
+            </a:endParaRPr>
+          </a:p>
+          <a:p>
+            <a:pPr marL="0" algn="l" rtl="0" eaLnBrk="1" latinLnBrk="1" hangingPunct="1">
+              <a:buNone/>
+            </a:pPr>
+            <a:r>
+              <a:rPr lang="nb-NO" sz="1500" b="1" kern="1200">
+                <a:solidFill>
+                  <a:srgbClr val="000000"/>
+                </a:solidFill>
+                <a:effectLst/>
+                <a:latin typeface="Aptos" panose="020B0004020202020204" pitchFamily="34" charset="0"/>
+                <a:ea typeface="+mn-ea"/>
+                <a:cs typeface="+mn-cs"/>
+              </a:rPr>
+              <a:t>Total </a:t>
+            </a:r>
+            <a:r>
+              <a:rPr lang="nb-NO" sz="1500" b="1" kern="1200" err="1">
+                <a:solidFill>
+                  <a:srgbClr val="000000"/>
+                </a:solidFill>
+                <a:effectLst/>
+                <a:latin typeface="Aptos" panose="020B0004020202020204" pitchFamily="34" charset="0"/>
+                <a:ea typeface="+mn-ea"/>
+                <a:cs typeface="+mn-cs"/>
+              </a:rPr>
+              <a:t>packets</a:t>
+            </a:r>
+            <a:r>
+              <a:rPr lang="nb-NO" sz="1500" b="1" kern="1200">
+                <a:solidFill>
+                  <a:srgbClr val="000000"/>
+                </a:solidFill>
+                <a:effectLst/>
+                <a:latin typeface="Aptos" panose="020B0004020202020204" pitchFamily="34" charset="0"/>
+                <a:ea typeface="+mn-ea"/>
+                <a:cs typeface="+mn-cs"/>
+              </a:rPr>
+              <a:t>: 14321</a:t>
+            </a:r>
+            <a:endParaRPr lang="nb-NO" sz="1500" b="1">
+              <a:effectLst/>
+            </a:endParaRPr>
+          </a:p>
+          <a:p>
+            <a:pPr marL="0" algn="l" rtl="0" eaLnBrk="1" latinLnBrk="1" hangingPunct="1">
+              <a:buNone/>
+            </a:pPr>
+            <a:r>
+              <a:rPr lang="nb-NO" sz="1500" b="1" kern="1200" err="1">
+                <a:solidFill>
+                  <a:srgbClr val="000000"/>
+                </a:solidFill>
+                <a:effectLst/>
+                <a:latin typeface="Aptos" panose="020B0004020202020204" pitchFamily="34" charset="0"/>
+                <a:ea typeface="+mn-ea"/>
+                <a:cs typeface="+mn-cs"/>
+              </a:rPr>
+              <a:t>Protocols</a:t>
+            </a:r>
+            <a:r>
+              <a:rPr lang="nb-NO" sz="1500" b="1" kern="1200">
+                <a:solidFill>
+                  <a:srgbClr val="000000"/>
+                </a:solidFill>
+                <a:effectLst/>
+                <a:latin typeface="Aptos" panose="020B0004020202020204" pitchFamily="34" charset="0"/>
+                <a:ea typeface="+mn-ea"/>
+                <a:cs typeface="+mn-cs"/>
+              </a:rPr>
+              <a:t>: {'TCP': 9124, 'UDP': 5021, 'ARP': 159, 'ICMP': 15, 'DNS': 2}</a:t>
+            </a:r>
+            <a:endParaRPr lang="nb-NO" sz="1500" b="1">
+              <a:effectLst/>
+            </a:endParaRPr>
+          </a:p>
+          <a:p>
+            <a:pPr marL="0" algn="l" rtl="0" eaLnBrk="1" latinLnBrk="1" hangingPunct="1">
+              <a:buNone/>
+            </a:pPr>
+            <a:r>
+              <a:rPr lang="nb-NO" sz="1500" b="1" kern="1200" err="1">
+                <a:solidFill>
+                  <a:srgbClr val="000000"/>
+                </a:solidFill>
+                <a:effectLst/>
+                <a:latin typeface="Aptos" panose="020B0004020202020204" pitchFamily="34" charset="0"/>
+                <a:ea typeface="+mn-ea"/>
+                <a:cs typeface="+mn-cs"/>
+              </a:rPr>
+              <a:t>Unique</a:t>
+            </a:r>
+            <a:r>
+              <a:rPr lang="nb-NO" sz="1500" b="1" kern="1200">
+                <a:solidFill>
+                  <a:srgbClr val="000000"/>
+                </a:solidFill>
+                <a:effectLst/>
+                <a:latin typeface="Aptos" panose="020B0004020202020204" pitchFamily="34" charset="0"/>
+                <a:ea typeface="+mn-ea"/>
+                <a:cs typeface="+mn-cs"/>
+              </a:rPr>
+              <a:t> Source IPs: 26</a:t>
+            </a:r>
+            <a:endParaRPr lang="nb-NO" sz="1500" b="1">
+              <a:effectLst/>
+            </a:endParaRPr>
+          </a:p>
+          <a:p>
+            <a:pPr marL="0" algn="l" rtl="0" eaLnBrk="1" latinLnBrk="1" hangingPunct="1">
+              <a:buNone/>
+            </a:pPr>
+            <a:r>
+              <a:rPr lang="nb-NO" sz="1500" b="1" kern="1200" err="1">
+                <a:solidFill>
+                  <a:srgbClr val="000000"/>
+                </a:solidFill>
+                <a:effectLst/>
+                <a:latin typeface="Aptos" panose="020B0004020202020204" pitchFamily="34" charset="0"/>
+                <a:ea typeface="+mn-ea"/>
+                <a:cs typeface="+mn-cs"/>
+              </a:rPr>
+              <a:t>Unique</a:t>
+            </a:r>
+            <a:r>
+              <a:rPr lang="nb-NO" sz="1500" b="1" kern="1200">
+                <a:solidFill>
+                  <a:srgbClr val="000000"/>
+                </a:solidFill>
+                <a:effectLst/>
+                <a:latin typeface="Aptos" panose="020B0004020202020204" pitchFamily="34" charset="0"/>
+                <a:ea typeface="+mn-ea"/>
+                <a:cs typeface="+mn-cs"/>
+              </a:rPr>
+              <a:t> </a:t>
+            </a:r>
+            <a:r>
+              <a:rPr lang="nb-NO" sz="1500" b="1" kern="1200" err="1">
+                <a:solidFill>
+                  <a:srgbClr val="000000"/>
+                </a:solidFill>
+                <a:effectLst/>
+                <a:latin typeface="Aptos" panose="020B0004020202020204" pitchFamily="34" charset="0"/>
+                <a:ea typeface="+mn-ea"/>
+                <a:cs typeface="+mn-cs"/>
+              </a:rPr>
+              <a:t>Destination</a:t>
+            </a:r>
+            <a:r>
+              <a:rPr lang="nb-NO" sz="1500" b="1" kern="1200">
+                <a:solidFill>
+                  <a:srgbClr val="000000"/>
+                </a:solidFill>
+                <a:effectLst/>
+                <a:latin typeface="Aptos" panose="020B0004020202020204" pitchFamily="34" charset="0"/>
+                <a:ea typeface="+mn-ea"/>
+                <a:cs typeface="+mn-cs"/>
+              </a:rPr>
+              <a:t> IPs: 19</a:t>
+            </a:r>
+            <a:endParaRPr lang="nb-NO" sz="1500" b="1">
+              <a:effectLst/>
+            </a:endParaRPr>
+          </a:p>
+          <a:p>
+            <a:pPr marL="0" algn="l" rtl="0" eaLnBrk="1" latinLnBrk="1" hangingPunct="1">
+              <a:buNone/>
+            </a:pPr>
+            <a:r>
+              <a:rPr lang="nb-NO" sz="1500" b="1" kern="1200">
+                <a:solidFill>
+                  <a:srgbClr val="000000"/>
+                </a:solidFill>
+                <a:effectLst/>
+                <a:latin typeface="Aptos" panose="020B0004020202020204" pitchFamily="34" charset="0"/>
+                <a:ea typeface="+mn-ea"/>
+                <a:cs typeface="+mn-cs"/>
+              </a:rPr>
+              <a:t>Sample Source IPs: ['192.168.1.10', '192.168.1.5', '192.168.1.1', '10.0.0.2', '172.16.0.8']</a:t>
+            </a:r>
+            <a:endParaRPr lang="nb-NO" sz="1500" b="1">
+              <a:effectLst/>
+            </a:endParaRPr>
+          </a:p>
+          <a:p>
+            <a:pPr marL="0" algn="l" rtl="0" eaLnBrk="1" latinLnBrk="1" hangingPunct="1">
+              <a:buNone/>
+            </a:pPr>
+            <a:r>
+              <a:rPr lang="nb-NO" sz="1500" b="1" kern="1200">
+                <a:solidFill>
+                  <a:srgbClr val="000000"/>
+                </a:solidFill>
+                <a:effectLst/>
+                <a:latin typeface="Aptos" panose="020B0004020202020204" pitchFamily="34" charset="0"/>
+                <a:ea typeface="+mn-ea"/>
+                <a:cs typeface="+mn-cs"/>
+              </a:rPr>
+              <a:t>Sample </a:t>
+            </a:r>
+            <a:r>
+              <a:rPr lang="nb-NO" sz="1500" b="1" kern="1200" err="1">
+                <a:solidFill>
+                  <a:srgbClr val="000000"/>
+                </a:solidFill>
+                <a:effectLst/>
+                <a:latin typeface="Aptos" panose="020B0004020202020204" pitchFamily="34" charset="0"/>
+                <a:ea typeface="+mn-ea"/>
+                <a:cs typeface="+mn-cs"/>
+              </a:rPr>
+              <a:t>Destination</a:t>
+            </a:r>
+            <a:r>
+              <a:rPr lang="nb-NO" sz="1500" b="1" kern="1200">
+                <a:solidFill>
+                  <a:srgbClr val="000000"/>
+                </a:solidFill>
+                <a:effectLst/>
+                <a:latin typeface="Aptos" panose="020B0004020202020204" pitchFamily="34" charset="0"/>
+                <a:ea typeface="+mn-ea"/>
+                <a:cs typeface="+mn-cs"/>
+              </a:rPr>
+              <a:t> IPs: ['192.168.1.1', '192.168.1.10', '192.168.1.5', '10.0.0.2', '172.16.0.1’]</a:t>
+            </a:r>
+            <a:endParaRPr lang="nb-NO" sz="1500" b="1">
+              <a:effectLst/>
+            </a:endParaRPr>
+          </a:p>
+          <a:p>
+            <a:pPr marL="0" algn="l" rtl="0" eaLnBrk="1" latinLnBrk="1" hangingPunct="1">
+              <a:buNone/>
+            </a:pPr>
+            <a:r>
+              <a:rPr lang="nb-NO" sz="1500">
+                <a:solidFill>
+                  <a:srgbClr val="000000"/>
+                </a:solidFill>
+                <a:latin typeface="Aptos" panose="020B0004020202020204" pitchFamily="34" charset="0"/>
+              </a:rPr>
+              <a:t>7. </a:t>
+            </a:r>
+            <a:r>
+              <a:rPr lang="nb-NO" sz="1500" kern="1200">
+                <a:solidFill>
+                  <a:srgbClr val="000000"/>
+                </a:solidFill>
+                <a:effectLst/>
+                <a:latin typeface="Aptos" panose="020B0004020202020204" pitchFamily="34" charset="0"/>
+                <a:ea typeface="+mn-ea"/>
+                <a:cs typeface="+mn-cs"/>
+              </a:rPr>
+              <a:t>Plan </a:t>
+            </a:r>
+            <a:r>
+              <a:rPr lang="nb-NO" sz="1500" kern="1200" err="1">
+                <a:solidFill>
+                  <a:srgbClr val="000000"/>
+                </a:solidFill>
+                <a:effectLst/>
+                <a:latin typeface="Aptos" panose="020B0004020202020204" pitchFamily="34" charset="0"/>
+                <a:ea typeface="+mn-ea"/>
+                <a:cs typeface="+mn-cs"/>
+              </a:rPr>
+              <a:t>execution</a:t>
+            </a:r>
+            <a:r>
+              <a:rPr lang="nb-NO" sz="1500" kern="1200">
+                <a:solidFill>
+                  <a:srgbClr val="000000"/>
+                </a:solidFill>
+                <a:effectLst/>
+                <a:latin typeface="Aptos" panose="020B0004020202020204" pitchFamily="34" charset="0"/>
+                <a:ea typeface="+mn-ea"/>
+                <a:cs typeface="+mn-cs"/>
+              </a:rPr>
+              <a:t> </a:t>
+            </a:r>
+            <a:r>
+              <a:rPr lang="nb-NO" sz="1500" kern="1200" err="1">
+                <a:solidFill>
+                  <a:srgbClr val="000000"/>
+                </a:solidFill>
+                <a:effectLst/>
+                <a:latin typeface="Aptos" panose="020B0004020202020204" pitchFamily="34" charset="0"/>
+                <a:ea typeface="+mn-ea"/>
+                <a:cs typeface="+mn-cs"/>
+              </a:rPr>
+              <a:t>summary</a:t>
+            </a:r>
+            <a:r>
+              <a:rPr lang="nb-NO" sz="1500" kern="1200">
+                <a:solidFill>
+                  <a:srgbClr val="000000"/>
+                </a:solidFill>
+                <a:effectLst/>
+                <a:latin typeface="Aptos" panose="020B0004020202020204" pitchFamily="34" charset="0"/>
+                <a:ea typeface="+mn-ea"/>
+                <a:cs typeface="+mn-cs"/>
+              </a:rPr>
+              <a:t>:</a:t>
+            </a:r>
+            <a:endParaRPr lang="nb-NO" sz="1500">
+              <a:effectLst/>
+            </a:endParaRPr>
+          </a:p>
+          <a:p>
+            <a:pPr marL="0" algn="l" rtl="0" eaLnBrk="1" latinLnBrk="1" hangingPunct="1">
+              <a:buNone/>
+            </a:pPr>
+            <a:r>
+              <a:rPr lang="nb-NO" sz="1500" kern="1200">
+                <a:solidFill>
+                  <a:srgbClr val="000000"/>
+                </a:solidFill>
+                <a:effectLst/>
+                <a:latin typeface="Aptos" panose="020B0004020202020204" pitchFamily="34" charset="0"/>
+                <a:ea typeface="+mn-ea"/>
+                <a:cs typeface="+mn-cs"/>
+              </a:rPr>
+              <a:t>1. </a:t>
+            </a:r>
+            <a:r>
+              <a:rPr lang="nb-NO" sz="1500" kern="1200" err="1">
+                <a:solidFill>
+                  <a:srgbClr val="000000"/>
+                </a:solidFill>
+                <a:effectLst/>
+                <a:latin typeface="Aptos" panose="020B0004020202020204" pitchFamily="34" charset="0"/>
+                <a:ea typeface="+mn-ea"/>
+                <a:cs typeface="+mn-cs"/>
+              </a:rPr>
+              <a:t>graph_operator_agent</a:t>
+            </a:r>
+            <a:r>
+              <a:rPr lang="nb-NO" sz="1500" kern="1200">
+                <a:solidFill>
+                  <a:srgbClr val="000000"/>
+                </a:solidFill>
+                <a:effectLst/>
+                <a:latin typeface="Aptos" panose="020B0004020202020204" pitchFamily="34" charset="0"/>
+                <a:ea typeface="+mn-ea"/>
+                <a:cs typeface="+mn-cs"/>
+              </a:rPr>
+              <a:t>: </a:t>
+            </a:r>
+            <a:r>
+              <a:rPr lang="nb-NO" sz="1500" kern="1200" err="1">
+                <a:solidFill>
+                  <a:srgbClr val="000000"/>
+                </a:solidFill>
+                <a:effectLst/>
+                <a:latin typeface="Aptos" panose="020B0004020202020204" pitchFamily="34" charset="0"/>
+                <a:ea typeface="+mn-ea"/>
+                <a:cs typeface="+mn-cs"/>
+              </a:rPr>
+              <a:t>Located</a:t>
+            </a:r>
+            <a:r>
+              <a:rPr lang="nb-NO" sz="1500" kern="1200">
+                <a:solidFill>
+                  <a:srgbClr val="000000"/>
+                </a:solidFill>
+                <a:effectLst/>
+                <a:latin typeface="Aptos" panose="020B0004020202020204" pitchFamily="34" charset="0"/>
+                <a:ea typeface="+mn-ea"/>
+                <a:cs typeface="+mn-cs"/>
+              </a:rPr>
+              <a:t> </a:t>
+            </a:r>
+            <a:r>
+              <a:rPr lang="nb-NO" sz="1500" kern="1200" err="1">
+                <a:solidFill>
+                  <a:srgbClr val="000000"/>
+                </a:solidFill>
+                <a:effectLst/>
+                <a:latin typeface="Aptos" panose="020B0004020202020204" pitchFamily="34" charset="0"/>
+                <a:ea typeface="+mn-ea"/>
+                <a:cs typeface="+mn-cs"/>
+              </a:rPr>
+              <a:t>the</a:t>
+            </a:r>
+            <a:r>
+              <a:rPr lang="nb-NO" sz="1500" kern="1200">
+                <a:solidFill>
+                  <a:srgbClr val="000000"/>
+                </a:solidFill>
+                <a:effectLst/>
+                <a:latin typeface="Aptos" panose="020B0004020202020204" pitchFamily="34" charset="0"/>
+                <a:ea typeface="+mn-ea"/>
+                <a:cs typeface="+mn-cs"/>
+              </a:rPr>
+              <a:t> </a:t>
+            </a:r>
+            <a:r>
+              <a:rPr lang="nb-NO" sz="1500" kern="1200" err="1">
+                <a:solidFill>
+                  <a:srgbClr val="000000"/>
+                </a:solidFill>
+                <a:effectLst/>
+                <a:latin typeface="Aptos" panose="020B0004020202020204" pitchFamily="34" charset="0"/>
+                <a:ea typeface="+mn-ea"/>
+                <a:cs typeface="+mn-cs"/>
+              </a:rPr>
+              <a:t>static</a:t>
+            </a:r>
+            <a:r>
+              <a:rPr lang="nb-NO" sz="1500" kern="1200">
+                <a:solidFill>
+                  <a:srgbClr val="000000"/>
+                </a:solidFill>
+                <a:effectLst/>
+                <a:latin typeface="Aptos" panose="020B0004020202020204" pitchFamily="34" charset="0"/>
+                <a:ea typeface="+mn-ea"/>
+                <a:cs typeface="+mn-cs"/>
+              </a:rPr>
+              <a:t> PCAP </a:t>
+            </a:r>
+            <a:r>
+              <a:rPr lang="nb-NO" sz="1500" kern="1200" err="1">
+                <a:solidFill>
+                  <a:srgbClr val="000000"/>
+                </a:solidFill>
+                <a:effectLst/>
+                <a:latin typeface="Aptos" panose="020B0004020202020204" pitchFamily="34" charset="0"/>
+                <a:ea typeface="+mn-ea"/>
+                <a:cs typeface="+mn-cs"/>
+              </a:rPr>
+              <a:t>linked</a:t>
+            </a:r>
+            <a:r>
+              <a:rPr lang="nb-NO" sz="1500" kern="1200">
+                <a:solidFill>
+                  <a:srgbClr val="000000"/>
+                </a:solidFill>
+                <a:effectLst/>
+                <a:latin typeface="Aptos" panose="020B0004020202020204" pitchFamily="34" charset="0"/>
+                <a:ea typeface="+mn-ea"/>
+                <a:cs typeface="+mn-cs"/>
+              </a:rPr>
+              <a:t> to CMS at </a:t>
+            </a:r>
+            <a:r>
+              <a:rPr lang="nb-NO" sz="1500" kern="1200" err="1">
+                <a:solidFill>
+                  <a:srgbClr val="000000"/>
+                </a:solidFill>
+                <a:effectLst/>
+                <a:latin typeface="Aptos" panose="020B0004020202020204" pitchFamily="34" charset="0"/>
+                <a:ea typeface="+mn-ea"/>
+                <a:cs typeface="+mn-cs"/>
+              </a:rPr>
+              <a:t>endpoint</a:t>
+            </a:r>
+            <a:r>
+              <a:rPr lang="nb-NO" sz="1500" kern="1200">
+                <a:solidFill>
+                  <a:srgbClr val="000000"/>
+                </a:solidFill>
+                <a:effectLst/>
+                <a:latin typeface="Aptos" panose="020B0004020202020204" pitchFamily="34" charset="0"/>
+                <a:ea typeface="+mn-ea"/>
+                <a:cs typeface="+mn-cs"/>
+              </a:rPr>
+              <a:t> "</a:t>
+            </a:r>
+            <a:r>
+              <a:rPr lang="nb-NO" sz="1500" kern="1200" err="1">
+                <a:solidFill>
+                  <a:srgbClr val="000000"/>
+                </a:solidFill>
+                <a:effectLst/>
+                <a:latin typeface="Aptos" panose="020B0004020202020204" pitchFamily="34" charset="0"/>
+                <a:ea typeface="+mn-ea"/>
+                <a:cs typeface="+mn-cs"/>
+              </a:rPr>
+              <a:t>static-cms</a:t>
+            </a:r>
+            <a:r>
+              <a:rPr lang="nb-NO" sz="1500" kern="1200">
+                <a:solidFill>
+                  <a:srgbClr val="000000"/>
+                </a:solidFill>
+                <a:effectLst/>
+                <a:latin typeface="Aptos" panose="020B0004020202020204" pitchFamily="34" charset="0"/>
+                <a:ea typeface="+mn-ea"/>
+                <a:cs typeface="+mn-cs"/>
+              </a:rPr>
+              <a:t>".</a:t>
+            </a:r>
+            <a:endParaRPr lang="nb-NO" sz="1500">
+              <a:effectLst/>
+            </a:endParaRPr>
+          </a:p>
+          <a:p>
+            <a:pPr marL="0" algn="l" rtl="0" eaLnBrk="1" latinLnBrk="1" hangingPunct="1">
+              <a:buNone/>
+            </a:pPr>
+            <a:r>
+              <a:rPr lang="nb-NO" sz="1500" kern="1200">
+                <a:solidFill>
+                  <a:srgbClr val="000000"/>
+                </a:solidFill>
+                <a:effectLst/>
+                <a:latin typeface="Aptos" panose="020B0004020202020204" pitchFamily="34" charset="0"/>
+                <a:ea typeface="+mn-ea"/>
+                <a:cs typeface="+mn-cs"/>
+              </a:rPr>
+              <a:t>2. </a:t>
+            </a:r>
+            <a:r>
+              <a:rPr lang="nb-NO" sz="1500" kern="1200" err="1">
+                <a:solidFill>
+                  <a:srgbClr val="000000"/>
+                </a:solidFill>
+                <a:effectLst/>
+                <a:latin typeface="Aptos" panose="020B0004020202020204" pitchFamily="34" charset="0"/>
+                <a:ea typeface="+mn-ea"/>
+                <a:cs typeface="+mn-cs"/>
+              </a:rPr>
+              <a:t>filepath_fetcher</a:t>
+            </a:r>
+            <a:r>
+              <a:rPr lang="nb-NO" sz="1500" kern="1200">
+                <a:solidFill>
+                  <a:srgbClr val="000000"/>
+                </a:solidFill>
+                <a:effectLst/>
+                <a:latin typeface="Aptos" panose="020B0004020202020204" pitchFamily="34" charset="0"/>
+                <a:ea typeface="+mn-ea"/>
+                <a:cs typeface="+mn-cs"/>
+              </a:rPr>
+              <a:t>: </a:t>
+            </a:r>
+            <a:r>
+              <a:rPr lang="nb-NO" sz="1500" kern="1200" err="1">
+                <a:solidFill>
+                  <a:srgbClr val="000000"/>
+                </a:solidFill>
+                <a:effectLst/>
+                <a:latin typeface="Aptos" panose="020B0004020202020204" pitchFamily="34" charset="0"/>
+                <a:ea typeface="+mn-ea"/>
+                <a:cs typeface="+mn-cs"/>
+              </a:rPr>
+              <a:t>Retrieved</a:t>
+            </a:r>
+            <a:r>
+              <a:rPr lang="nb-NO" sz="1500" kern="1200">
+                <a:solidFill>
+                  <a:srgbClr val="000000"/>
+                </a:solidFill>
+                <a:effectLst/>
+                <a:latin typeface="Aptos" panose="020B0004020202020204" pitchFamily="34" charset="0"/>
+                <a:ea typeface="+mn-ea"/>
+                <a:cs typeface="+mn-cs"/>
+              </a:rPr>
+              <a:t> file at </a:t>
+            </a:r>
+            <a:r>
+              <a:rPr lang="nb-NO" sz="1500" kern="1200" err="1">
+                <a:solidFill>
+                  <a:srgbClr val="000000"/>
+                </a:solidFill>
+                <a:effectLst/>
+                <a:latin typeface="Aptos" panose="020B0004020202020204" pitchFamily="34" charset="0"/>
+                <a:ea typeface="+mn-ea"/>
+                <a:cs typeface="+mn-cs"/>
+              </a:rPr>
+              <a:t>data_exports</a:t>
+            </a:r>
+            <a:r>
+              <a:rPr lang="nb-NO" sz="1500" kern="1200">
+                <a:solidFill>
+                  <a:srgbClr val="000000"/>
+                </a:solidFill>
+                <a:effectLst/>
+                <a:latin typeface="Aptos" panose="020B0004020202020204" pitchFamily="34" charset="0"/>
+                <a:ea typeface="+mn-ea"/>
+                <a:cs typeface="+mn-cs"/>
+              </a:rPr>
+              <a:t>\20230511_Denial_of_Charge_IdTag_filtered_pcaplabelled.pcap.</a:t>
+            </a:r>
+            <a:endParaRPr lang="nb-NO" sz="1500">
+              <a:effectLst/>
+            </a:endParaRPr>
+          </a:p>
+          <a:p>
+            <a:pPr marL="0" algn="l" rtl="0" eaLnBrk="1" latinLnBrk="1" hangingPunct="1">
+              <a:buNone/>
+            </a:pPr>
+            <a:r>
+              <a:rPr lang="nb-NO" sz="1500" kern="1200">
+                <a:solidFill>
+                  <a:srgbClr val="000000"/>
+                </a:solidFill>
+                <a:effectLst/>
+                <a:latin typeface="Aptos" panose="020B0004020202020204" pitchFamily="34" charset="0"/>
+                <a:ea typeface="+mn-ea"/>
+                <a:cs typeface="+mn-cs"/>
+              </a:rPr>
+              <a:t>3. </a:t>
+            </a:r>
+            <a:r>
+              <a:rPr lang="nb-NO" sz="1500" kern="1200" err="1">
+                <a:solidFill>
+                  <a:srgbClr val="000000"/>
+                </a:solidFill>
+                <a:effectLst/>
+                <a:latin typeface="Aptos" panose="020B0004020202020204" pitchFamily="34" charset="0"/>
+                <a:ea typeface="+mn-ea"/>
+                <a:cs typeface="+mn-cs"/>
+              </a:rPr>
+              <a:t>code_generator_agent</a:t>
+            </a:r>
+            <a:r>
+              <a:rPr lang="nb-NO" sz="1500" kern="1200">
+                <a:solidFill>
+                  <a:srgbClr val="000000"/>
+                </a:solidFill>
+                <a:effectLst/>
+                <a:latin typeface="Aptos" panose="020B0004020202020204" pitchFamily="34" charset="0"/>
+                <a:ea typeface="+mn-ea"/>
+                <a:cs typeface="+mn-cs"/>
+              </a:rPr>
+              <a:t>: Ran </a:t>
+            </a:r>
+            <a:r>
+              <a:rPr lang="nb-NO" sz="1500" kern="1200" err="1">
+                <a:solidFill>
+                  <a:srgbClr val="000000"/>
+                </a:solidFill>
+                <a:effectLst/>
+                <a:latin typeface="Aptos" panose="020B0004020202020204" pitchFamily="34" charset="0"/>
+                <a:ea typeface="+mn-ea"/>
+                <a:cs typeface="+mn-cs"/>
+              </a:rPr>
+              <a:t>analysis</a:t>
+            </a:r>
+            <a:r>
+              <a:rPr lang="nb-NO" sz="1500" kern="1200">
+                <a:solidFill>
+                  <a:srgbClr val="000000"/>
+                </a:solidFill>
+                <a:effectLst/>
+                <a:latin typeface="Aptos" panose="020B0004020202020204" pitchFamily="34" charset="0"/>
+                <a:ea typeface="+mn-ea"/>
+                <a:cs typeface="+mn-cs"/>
+              </a:rPr>
+              <a:t> </a:t>
+            </a:r>
+            <a:r>
+              <a:rPr lang="nb-NO" sz="1500" kern="1200" err="1">
+                <a:solidFill>
+                  <a:srgbClr val="000000"/>
+                </a:solidFill>
+                <a:effectLst/>
+                <a:latin typeface="Aptos" panose="020B0004020202020204" pitchFamily="34" charset="0"/>
+                <a:ea typeface="+mn-ea"/>
+                <a:cs typeface="+mn-cs"/>
+              </a:rPr>
+              <a:t>code</a:t>
+            </a:r>
+            <a:r>
+              <a:rPr lang="nb-NO" sz="1500" kern="1200">
+                <a:solidFill>
+                  <a:srgbClr val="000000"/>
+                </a:solidFill>
+                <a:effectLst/>
+                <a:latin typeface="Aptos" panose="020B0004020202020204" pitchFamily="34" charset="0"/>
+                <a:ea typeface="+mn-ea"/>
+                <a:cs typeface="+mn-cs"/>
+              </a:rPr>
+              <a:t> </a:t>
+            </a:r>
+            <a:r>
+              <a:rPr lang="nb-NO" sz="1500" kern="1200" err="1">
+                <a:solidFill>
+                  <a:srgbClr val="000000"/>
+                </a:solidFill>
+                <a:effectLst/>
+                <a:latin typeface="Aptos" panose="020B0004020202020204" pitchFamily="34" charset="0"/>
+                <a:ea typeface="+mn-ea"/>
+                <a:cs typeface="+mn-cs"/>
+              </a:rPr>
+              <a:t>on</a:t>
+            </a:r>
+            <a:r>
+              <a:rPr lang="nb-NO" sz="1500" kern="1200">
+                <a:solidFill>
+                  <a:srgbClr val="000000"/>
+                </a:solidFill>
+                <a:effectLst/>
+                <a:latin typeface="Aptos" panose="020B0004020202020204" pitchFamily="34" charset="0"/>
+                <a:ea typeface="+mn-ea"/>
+                <a:cs typeface="+mn-cs"/>
+              </a:rPr>
+              <a:t> </a:t>
+            </a:r>
+            <a:r>
+              <a:rPr lang="nb-NO" sz="1500" kern="1200" err="1">
+                <a:solidFill>
+                  <a:srgbClr val="000000"/>
+                </a:solidFill>
+                <a:effectLst/>
+                <a:latin typeface="Aptos" panose="020B0004020202020204" pitchFamily="34" charset="0"/>
+                <a:ea typeface="+mn-ea"/>
+                <a:cs typeface="+mn-cs"/>
+              </a:rPr>
+              <a:t>the</a:t>
+            </a:r>
+            <a:r>
+              <a:rPr lang="nb-NO" sz="1500" kern="1200">
+                <a:solidFill>
+                  <a:srgbClr val="000000"/>
+                </a:solidFill>
+                <a:effectLst/>
+                <a:latin typeface="Aptos" panose="020B0004020202020204" pitchFamily="34" charset="0"/>
+                <a:ea typeface="+mn-ea"/>
+                <a:cs typeface="+mn-cs"/>
+              </a:rPr>
+              <a:t> file and </a:t>
+            </a:r>
+            <a:r>
+              <a:rPr lang="nb-NO" sz="1500" kern="1200" err="1">
+                <a:solidFill>
+                  <a:srgbClr val="000000"/>
+                </a:solidFill>
+                <a:effectLst/>
+                <a:latin typeface="Aptos" panose="020B0004020202020204" pitchFamily="34" charset="0"/>
+                <a:ea typeface="+mn-ea"/>
+                <a:cs typeface="+mn-cs"/>
+              </a:rPr>
+              <a:t>produced</a:t>
+            </a:r>
+            <a:r>
+              <a:rPr lang="nb-NO" sz="1500" kern="1200">
+                <a:solidFill>
+                  <a:srgbClr val="000000"/>
+                </a:solidFill>
+                <a:effectLst/>
+                <a:latin typeface="Aptos" panose="020B0004020202020204" pitchFamily="34" charset="0"/>
+                <a:ea typeface="+mn-ea"/>
+                <a:cs typeface="+mn-cs"/>
+              </a:rPr>
+              <a:t> </a:t>
+            </a:r>
+            <a:r>
+              <a:rPr lang="nb-NO" sz="1500" kern="1200" err="1">
+                <a:solidFill>
+                  <a:srgbClr val="000000"/>
+                </a:solidFill>
+                <a:effectLst/>
+                <a:latin typeface="Aptos" panose="020B0004020202020204" pitchFamily="34" charset="0"/>
+                <a:ea typeface="+mn-ea"/>
+                <a:cs typeface="+mn-cs"/>
+              </a:rPr>
+              <a:t>the</a:t>
+            </a:r>
+            <a:r>
+              <a:rPr lang="nb-NO" sz="1500" kern="1200">
+                <a:solidFill>
+                  <a:srgbClr val="000000"/>
+                </a:solidFill>
+                <a:effectLst/>
+                <a:latin typeface="Aptos" panose="020B0004020202020204" pitchFamily="34" charset="0"/>
+                <a:ea typeface="+mn-ea"/>
+                <a:cs typeface="+mn-cs"/>
+              </a:rPr>
+              <a:t> </a:t>
+            </a:r>
+            <a:r>
+              <a:rPr lang="nb-NO" sz="1500" kern="1200" err="1">
+                <a:solidFill>
+                  <a:srgbClr val="000000"/>
+                </a:solidFill>
+                <a:effectLst/>
+                <a:latin typeface="Aptos" panose="020B0004020202020204" pitchFamily="34" charset="0"/>
+                <a:ea typeface="+mn-ea"/>
+                <a:cs typeface="+mn-cs"/>
+              </a:rPr>
+              <a:t>following</a:t>
+            </a:r>
+            <a:r>
+              <a:rPr lang="nb-NO" sz="1500" kern="1200">
+                <a:solidFill>
+                  <a:srgbClr val="000000"/>
+                </a:solidFill>
+                <a:effectLst/>
+                <a:latin typeface="Aptos" panose="020B0004020202020204" pitchFamily="34" charset="0"/>
+                <a:ea typeface="+mn-ea"/>
+                <a:cs typeface="+mn-cs"/>
+              </a:rPr>
+              <a:t> </a:t>
+            </a:r>
+            <a:r>
+              <a:rPr lang="nb-NO" sz="1500" kern="1200" err="1">
+                <a:solidFill>
+                  <a:srgbClr val="000000"/>
+                </a:solidFill>
+                <a:effectLst/>
+                <a:latin typeface="Aptos" panose="020B0004020202020204" pitchFamily="34" charset="0"/>
+                <a:ea typeface="+mn-ea"/>
+                <a:cs typeface="+mn-cs"/>
+              </a:rPr>
+              <a:t>summary</a:t>
+            </a:r>
+            <a:r>
+              <a:rPr lang="nb-NO" sz="1500" kern="1200">
+                <a:solidFill>
+                  <a:srgbClr val="000000"/>
+                </a:solidFill>
+                <a:effectLst/>
+                <a:latin typeface="Aptos" panose="020B0004020202020204" pitchFamily="34" charset="0"/>
+                <a:ea typeface="+mn-ea"/>
+                <a:cs typeface="+mn-cs"/>
+              </a:rPr>
+              <a:t>:</a:t>
+            </a:r>
+            <a:endParaRPr lang="nb-NO" sz="1500">
+              <a:effectLst/>
+            </a:endParaRPr>
+          </a:p>
+          <a:p>
+            <a:pPr marL="0" algn="l" rtl="0" eaLnBrk="1" latinLnBrk="1" hangingPunct="1">
+              <a:buNone/>
+            </a:pPr>
+            <a:r>
+              <a:rPr lang="nb-NO" sz="1500" kern="1200">
+                <a:solidFill>
+                  <a:srgbClr val="000000"/>
+                </a:solidFill>
+                <a:effectLst/>
+                <a:latin typeface="Aptos" panose="020B0004020202020204" pitchFamily="34" charset="0"/>
+                <a:ea typeface="+mn-ea"/>
+                <a:cs typeface="+mn-cs"/>
+              </a:rPr>
+              <a:t>**PCAP </a:t>
+            </a:r>
+            <a:r>
+              <a:rPr lang="nb-NO" sz="1500" kern="1200" err="1">
+                <a:solidFill>
+                  <a:srgbClr val="000000"/>
+                </a:solidFill>
+                <a:effectLst/>
+                <a:latin typeface="Aptos" panose="020B0004020202020204" pitchFamily="34" charset="0"/>
+                <a:ea typeface="+mn-ea"/>
+                <a:cs typeface="+mn-cs"/>
+              </a:rPr>
+              <a:t>Summary</a:t>
+            </a:r>
+            <a:r>
+              <a:rPr lang="nb-NO" sz="1500" kern="1200">
+                <a:solidFill>
+                  <a:srgbClr val="000000"/>
+                </a:solidFill>
+                <a:effectLst/>
+                <a:latin typeface="Aptos" panose="020B0004020202020204" pitchFamily="34" charset="0"/>
+                <a:ea typeface="+mn-ea"/>
+                <a:cs typeface="+mn-cs"/>
+              </a:rPr>
+              <a:t> for CMS:**</a:t>
+            </a:r>
+            <a:endParaRPr lang="nb-NO" sz="1500">
+              <a:effectLst/>
+            </a:endParaRPr>
+          </a:p>
+          <a:p>
+            <a:pPr marL="0" algn="l" rtl="0" eaLnBrk="1" latinLnBrk="1" hangingPunct="1">
+              <a:buNone/>
+            </a:pPr>
+            <a:r>
+              <a:rPr lang="nb-NO" sz="1500" kern="1200">
+                <a:solidFill>
+                  <a:srgbClr val="000000"/>
+                </a:solidFill>
+                <a:effectLst/>
+                <a:latin typeface="Aptos" panose="020B0004020202020204" pitchFamily="34" charset="0"/>
+                <a:ea typeface="+mn-ea"/>
+                <a:cs typeface="+mn-cs"/>
+              </a:rPr>
+              <a:t>- Total </a:t>
+            </a:r>
+            <a:r>
+              <a:rPr lang="nb-NO" sz="1500" kern="1200" err="1">
+                <a:solidFill>
+                  <a:srgbClr val="000000"/>
+                </a:solidFill>
+                <a:effectLst/>
+                <a:latin typeface="Aptos" panose="020B0004020202020204" pitchFamily="34" charset="0"/>
+                <a:ea typeface="+mn-ea"/>
+                <a:cs typeface="+mn-cs"/>
+              </a:rPr>
+              <a:t>packets</a:t>
+            </a:r>
+            <a:r>
+              <a:rPr lang="nb-NO" sz="1500" kern="1200">
+                <a:solidFill>
+                  <a:srgbClr val="000000"/>
+                </a:solidFill>
+                <a:effectLst/>
+                <a:latin typeface="Aptos" panose="020B0004020202020204" pitchFamily="34" charset="0"/>
+                <a:ea typeface="+mn-ea"/>
+                <a:cs typeface="+mn-cs"/>
+              </a:rPr>
+              <a:t>: 14,321 </a:t>
+            </a:r>
+            <a:endParaRPr lang="nb-NO" sz="1500">
+              <a:effectLst/>
+            </a:endParaRPr>
+          </a:p>
+          <a:p>
+            <a:pPr marL="0" algn="l" rtl="0" eaLnBrk="1" latinLnBrk="1" hangingPunct="1">
+              <a:buNone/>
+            </a:pPr>
+            <a:r>
+              <a:rPr lang="nb-NO" sz="1500" kern="1200">
+                <a:solidFill>
+                  <a:srgbClr val="000000"/>
+                </a:solidFill>
+                <a:effectLst/>
+                <a:latin typeface="Aptos" panose="020B0004020202020204" pitchFamily="34" charset="0"/>
+                <a:ea typeface="+mn-ea"/>
+                <a:cs typeface="+mn-cs"/>
+              </a:rPr>
+              <a:t>- </a:t>
+            </a:r>
+            <a:r>
+              <a:rPr lang="nb-NO" sz="1500" kern="1200" err="1">
+                <a:solidFill>
+                  <a:srgbClr val="000000"/>
+                </a:solidFill>
+                <a:effectLst/>
+                <a:latin typeface="Aptos" panose="020B0004020202020204" pitchFamily="34" charset="0"/>
+                <a:ea typeface="+mn-ea"/>
+                <a:cs typeface="+mn-cs"/>
+              </a:rPr>
+              <a:t>Protocol</a:t>
+            </a:r>
+            <a:r>
+              <a:rPr lang="nb-NO" sz="1500" kern="1200">
+                <a:solidFill>
+                  <a:srgbClr val="000000"/>
+                </a:solidFill>
+                <a:effectLst/>
+                <a:latin typeface="Aptos" panose="020B0004020202020204" pitchFamily="34" charset="0"/>
+                <a:ea typeface="+mn-ea"/>
+                <a:cs typeface="+mn-cs"/>
+              </a:rPr>
+              <a:t> breakdown: TCP (9,124), UDP (5,021), ARP (159), ICMP (15), DNS (2)</a:t>
+            </a:r>
+            <a:endParaRPr lang="nb-NO" sz="1500">
+              <a:effectLst/>
+            </a:endParaRPr>
+          </a:p>
+          <a:p>
+            <a:pPr marL="0" algn="l" rtl="0" eaLnBrk="1" latinLnBrk="1" hangingPunct="1">
+              <a:buNone/>
+            </a:pPr>
+            <a:r>
+              <a:rPr lang="nb-NO" sz="1500" kern="1200">
+                <a:solidFill>
+                  <a:srgbClr val="000000"/>
+                </a:solidFill>
+                <a:effectLst/>
+                <a:latin typeface="Aptos" panose="020B0004020202020204" pitchFamily="34" charset="0"/>
+                <a:ea typeface="+mn-ea"/>
+                <a:cs typeface="+mn-cs"/>
+              </a:rPr>
+              <a:t>(…) **</a:t>
+            </a:r>
+            <a:r>
+              <a:rPr lang="nb-NO" sz="1500" kern="1200" err="1">
+                <a:solidFill>
+                  <a:srgbClr val="000000"/>
+                </a:solidFill>
+                <a:effectLst/>
+                <a:latin typeface="Aptos" panose="020B0004020202020204" pitchFamily="34" charset="0"/>
+                <a:ea typeface="+mn-ea"/>
+                <a:cs typeface="+mn-cs"/>
+              </a:rPr>
+              <a:t>Task</a:t>
+            </a:r>
+            <a:r>
+              <a:rPr lang="nb-NO" sz="1500" kern="1200">
+                <a:solidFill>
+                  <a:srgbClr val="000000"/>
+                </a:solidFill>
+                <a:effectLst/>
+                <a:latin typeface="Aptos" panose="020B0004020202020204" pitchFamily="34" charset="0"/>
+                <a:ea typeface="+mn-ea"/>
+                <a:cs typeface="+mn-cs"/>
+              </a:rPr>
+              <a:t> </a:t>
+            </a:r>
+            <a:r>
+              <a:rPr lang="nb-NO" sz="1500" kern="1200" err="1">
+                <a:solidFill>
+                  <a:srgbClr val="000000"/>
+                </a:solidFill>
+                <a:effectLst/>
+                <a:latin typeface="Aptos" panose="020B0004020202020204" pitchFamily="34" charset="0"/>
+                <a:ea typeface="+mn-ea"/>
+                <a:cs typeface="+mn-cs"/>
+              </a:rPr>
+              <a:t>complete</a:t>
+            </a:r>
+            <a:r>
+              <a:rPr lang="nb-NO" sz="1500" kern="1200">
+                <a:solidFill>
+                  <a:srgbClr val="000000"/>
+                </a:solidFill>
+                <a:effectLst/>
+                <a:latin typeface="Aptos" panose="020B0004020202020204" pitchFamily="34" charset="0"/>
+                <a:ea typeface="+mn-ea"/>
+                <a:cs typeface="+mn-cs"/>
+              </a:rPr>
+              <a:t>.**  </a:t>
+            </a:r>
+            <a:endParaRPr lang="nb-NO" sz="1500">
+              <a:effectLst/>
+            </a:endParaRPr>
+          </a:p>
+          <a:p>
+            <a:pPr>
+              <a:buNone/>
+            </a:pPr>
+            <a:r>
+              <a:rPr lang="nb-NO" sz="1500" kern="1200">
+                <a:solidFill>
+                  <a:schemeClr val="accent5">
+                    <a:lumMod val="60000"/>
+                    <a:lumOff val="40000"/>
+                  </a:schemeClr>
+                </a:solidFill>
+                <a:effectLst/>
+                <a:latin typeface="Aptos" panose="020B0004020202020204" pitchFamily="34" charset="0"/>
+                <a:ea typeface="+mn-ea"/>
+                <a:cs typeface="+mn-cs"/>
+              </a:rPr>
+              <a:t>TERMINATE</a:t>
+            </a:r>
+            <a:endParaRPr lang="nb-NO" sz="1500">
+              <a:solidFill>
+                <a:schemeClr val="accent5">
+                  <a:lumMod val="60000"/>
+                  <a:lumOff val="40000"/>
+                </a:schemeClr>
+              </a:solidFill>
+            </a:endParaRPr>
+          </a:p>
+        </p:txBody>
+      </p:sp>
+    </p:spTree>
+    <p:extLst>
+      <p:ext uri="{BB962C8B-B14F-4D97-AF65-F5344CB8AC3E}">
+        <p14:creationId xmlns:p14="http://schemas.microsoft.com/office/powerpoint/2010/main" val="3451000195"/>
       </p:ext>
     </p:extLst>
   </p:cSld>
@@ -4449,4 +11116,319 @@
     </a:ext>
   </a:extLst>
 </a:theme>
+</file>
+
+<file path=ppt/theme/theme2.xml><?xml version="1.0" encoding="utf-8"?>
+<a:theme xmlns:a="http://schemas.openxmlformats.org/drawingml/2006/main" name="Office Theme">
+  <a:themeElements>
+    <a:clrScheme name="Office">
+      <a:dk1>
+        <a:sysClr val="windowText" lastClr="000000"/>
+      </a:dk1>
+      <a:lt1>
+        <a:sysClr val="window" lastClr="FFFFFF"/>
+      </a:lt1>
+      <a:dk2>
+        <a:srgbClr val="0E2841"/>
+      </a:dk2>
+      <a:lt2>
+        <a:srgbClr val="E8E8E8"/>
+      </a:lt2>
+      <a:accent1>
+        <a:srgbClr val="156082"/>
+      </a:accent1>
+      <a:accent2>
+        <a:srgbClr val="E97132"/>
+      </a:accent2>
+      <a:accent3>
+        <a:srgbClr val="196B24"/>
+      </a:accent3>
+      <a:accent4>
+        <a:srgbClr val="0F9ED5"/>
+      </a:accent4>
+      <a:accent5>
+        <a:srgbClr val="A02B93"/>
+      </a:accent5>
+      <a:accent6>
+        <a:srgbClr val="4EA72E"/>
+      </a:accent6>
+      <a:hlink>
+        <a:srgbClr val="467886"/>
+      </a:hlink>
+      <a:folHlink>
+        <a:srgbClr val="96607D"/>
+      </a:folHlink>
+    </a:clrScheme>
+    <a:fontScheme name="Office">
+      <a:majorFont>
+        <a:latin typeface="Aptos Display" panose="02110004020202020204"/>
+        <a:ea typeface=""/>
+        <a:cs typeface=""/>
+        <a:font script="Jpan" typeface="游ゴシック Light"/>
+        <a:font script="Hang" typeface="맑은 고딕"/>
+        <a:font script="Hans" typeface="等线 Light"/>
+        <a:font script="Hant" typeface="新細明體"/>
+        <a:font script="Arab" typeface="Times New Roman"/>
+        <a:font script="Hebr" typeface="Times New Roman"/>
+        <a:font script="Thai" typeface="Angsana New"/>
+        <a:font script="Ethi" typeface="Nyala"/>
+        <a:font script="Beng" typeface="Vrinda"/>
+        <a:font script="Gujr" typeface="Shruti"/>
+        <a:font script="Khmr" typeface="MoolBoran"/>
+        <a:font script="Knda" typeface="Tunga"/>
+        <a:font script="Guru" typeface="Raavi"/>
+        <a:font script="Cans" typeface="Euphemia"/>
+        <a:font script="Cher" typeface="Plantagenet Cherokee"/>
+        <a:font script="Yiii" typeface="Microsoft Yi Baiti"/>
+        <a:font script="Tibt" typeface="Microsoft Himalaya"/>
+        <a:font script="Thaa" typeface="MV Boli"/>
+        <a:font script="Deva" typeface="Mangal"/>
+        <a:font script="Telu" typeface="Gautami"/>
+        <a:font script="Taml" typeface="Latha"/>
+        <a:font script="Syrc" typeface="Estrangelo Edessa"/>
+        <a:font script="Orya" typeface="Kalinga"/>
+        <a:font script="Mlym" typeface="Kartika"/>
+        <a:font script="Laoo" typeface="DokChampa"/>
+        <a:font script="Sinh" typeface="Iskoola Pota"/>
+        <a:font script="Mong" typeface="Mongolian Baiti"/>
+        <a:font script="Viet" typeface="Times New Roman"/>
+        <a:font script="Uigh" typeface="Microsoft Uighur"/>
+        <a:font script="Geor" typeface="Sylfaen"/>
+        <a:font script="Armn" typeface="Arial"/>
+        <a:font script="Bugi" typeface="Leelawadee UI"/>
+        <a:font script="Bopo" typeface="Microsoft JhengHei"/>
+        <a:font script="Java" typeface="Javanese Text"/>
+        <a:font script="Lisu" typeface="Segoe UI"/>
+        <a:font script="Mymr" typeface="Myanmar Text"/>
+        <a:font script="Nkoo" typeface="Ebrima"/>
+        <a:font script="Olck" typeface="Nirmala UI"/>
+        <a:font script="Osma" typeface="Ebrima"/>
+        <a:font script="Phag" typeface="Phagspa"/>
+        <a:font script="Syrn" typeface="Estrangelo Edessa"/>
+        <a:font script="Syrj" typeface="Estrangelo Edessa"/>
+        <a:font script="Syre" typeface="Estrangelo Edessa"/>
+        <a:font script="Sora" typeface="Nirmala UI"/>
+        <a:font script="Tale" typeface="Microsoft Tai Le"/>
+        <a:font script="Talu" typeface="Microsoft New Tai Lue"/>
+        <a:font script="Tfng" typeface="Ebrima"/>
+      </a:majorFont>
+      <a:minorFont>
+        <a:latin typeface="Aptos" panose="02110004020202020204"/>
+        <a:ea typeface=""/>
+        <a:cs typeface=""/>
+        <a:font script="Jpan" typeface="游ゴシック"/>
+        <a:font script="Hang" typeface="맑은 고딕"/>
+        <a:font script="Hans" typeface="等线"/>
+        <a:font script="Hant" typeface="新細明體"/>
+        <a:font script="Arab" typeface="Arial"/>
+        <a:font script="Hebr" typeface="Arial"/>
+        <a:font script="Thai" typeface="Cordia New"/>
+        <a:font script="Ethi" typeface="Nyala"/>
+        <a:font script="Beng" typeface="Vrinda"/>
+        <a:font script="Gujr" typeface="Shruti"/>
+        <a:font script="Khmr" typeface="DaunPenh"/>
+        <a:font script="Knda" typeface="Tunga"/>
+        <a:font script="Guru" typeface="Raavi"/>
+        <a:font script="Cans" typeface="Euphemia"/>
+        <a:font script="Cher" typeface="Plantagenet Cherokee"/>
+        <a:font script="Yiii" typeface="Microsoft Yi Baiti"/>
+        <a:font script="Tibt" typeface="Microsoft Himalaya"/>
+        <a:font script="Thaa" typeface="MV Boli"/>
+        <a:font script="Deva" typeface="Mangal"/>
+        <a:font script="Telu" typeface="Gautami"/>
+        <a:font script="Taml" typeface="Latha"/>
+        <a:font script="Syrc" typeface="Estrangelo Edessa"/>
+        <a:font script="Orya" typeface="Kalinga"/>
+        <a:font script="Mlym" typeface="Kartika"/>
+        <a:font script="Laoo" typeface="DokChampa"/>
+        <a:font script="Sinh" typeface="Iskoola Pota"/>
+        <a:font script="Mong" typeface="Mongolian Baiti"/>
+        <a:font script="Viet" typeface="Arial"/>
+        <a:font script="Uigh" typeface="Microsoft Uighur"/>
+        <a:font script="Geor" typeface="Sylfaen"/>
+        <a:font script="Armn" typeface="Arial"/>
+        <a:font script="Bugi" typeface="Leelawadee UI"/>
+        <a:font script="Bopo" typeface="Microsoft JhengHei"/>
+        <a:font script="Java" typeface="Javanese Text"/>
+        <a:font script="Lisu" typeface="Segoe UI"/>
+        <a:font script="Mymr" typeface="Myanmar Text"/>
+        <a:font script="Nkoo" typeface="Ebrima"/>
+        <a:font script="Olck" typeface="Nirmala UI"/>
+        <a:font script="Osma" typeface="Ebrima"/>
+        <a:font script="Phag" typeface="Phagspa"/>
+        <a:font script="Syrn" typeface="Estrangelo Edessa"/>
+        <a:font script="Syrj" typeface="Estrangelo Edessa"/>
+        <a:font script="Syre" typeface="Estrangelo Edessa"/>
+        <a:font script="Sora" typeface="Nirmala UI"/>
+        <a:font script="Tale" typeface="Microsoft Tai Le"/>
+        <a:font script="Talu" typeface="Microsoft New Tai Lue"/>
+        <a:font script="Tfng" typeface="Ebrima"/>
+      </a:minorFont>
+    </a:fontScheme>
+    <a:fmtScheme name="Office">
+      <a:fillStyleLst>
+        <a:solidFill>
+          <a:schemeClr val="phClr"/>
+        </a:solidFill>
+        <a:gradFill rotWithShape="1">
+          <a:gsLst>
+            <a:gs pos="0">
+              <a:schemeClr val="phClr">
+                <a:lumMod val="110000"/>
+                <a:satMod val="105000"/>
+                <a:tint val="67000"/>
+              </a:schemeClr>
+            </a:gs>
+            <a:gs pos="50000">
+              <a:schemeClr val="phClr">
+                <a:lumMod val="105000"/>
+                <a:satMod val="103000"/>
+                <a:tint val="73000"/>
+              </a:schemeClr>
+            </a:gs>
+            <a:gs pos="100000">
+              <a:schemeClr val="phClr">
+                <a:lumMod val="105000"/>
+                <a:satMod val="109000"/>
+                <a:tint val="81000"/>
+              </a:schemeClr>
+            </a:gs>
+          </a:gsLst>
+          <a:lin ang="5400000" scaled="0"/>
+        </a:gradFill>
+        <a:gradFill rotWithShape="1">
+          <a:gsLst>
+            <a:gs pos="0">
+              <a:schemeClr val="phClr">
+                <a:satMod val="103000"/>
+                <a:lumMod val="102000"/>
+                <a:tint val="94000"/>
+              </a:schemeClr>
+            </a:gs>
+            <a:gs pos="50000">
+              <a:schemeClr val="phClr">
+                <a:satMod val="110000"/>
+                <a:lumMod val="100000"/>
+                <a:shade val="100000"/>
+              </a:schemeClr>
+            </a:gs>
+            <a:gs pos="100000">
+              <a:schemeClr val="phClr">
+                <a:lumMod val="99000"/>
+                <a:satMod val="120000"/>
+                <a:shade val="78000"/>
+              </a:schemeClr>
+            </a:gs>
+          </a:gsLst>
+          <a:lin ang="5400000" scaled="0"/>
+        </a:gradFill>
+      </a:fillStyleLst>
+      <a:lnStyleLst>
+        <a:ln w="12700" cap="flat" cmpd="sng" algn="ctr">
+          <a:solidFill>
+            <a:schemeClr val="phClr"/>
+          </a:solidFill>
+          <a:prstDash val="solid"/>
+          <a:miter lim="800000"/>
+        </a:ln>
+        <a:ln w="19050" cap="flat" cmpd="sng" algn="ctr">
+          <a:solidFill>
+            <a:schemeClr val="phClr"/>
+          </a:solidFill>
+          <a:prstDash val="solid"/>
+          <a:miter lim="800000"/>
+        </a:ln>
+        <a:ln w="25400" cap="flat" cmpd="sng" algn="ctr">
+          <a:solidFill>
+            <a:schemeClr val="phClr"/>
+          </a:solidFill>
+          <a:prstDash val="solid"/>
+          <a:miter lim="800000"/>
+        </a:ln>
+      </a:lnStyleLst>
+      <a:effectStyleLst>
+        <a:effectStyle>
+          <a:effectLst/>
+        </a:effectStyle>
+        <a:effectStyle>
+          <a:effectLst/>
+        </a:effectStyle>
+        <a:effectStyle>
+          <a:effectLst>
+            <a:outerShdw blurRad="57150" dist="19050" dir="5400000" algn="ctr" rotWithShape="0">
+              <a:srgbClr val="000000">
+                <a:alpha val="63000"/>
+              </a:srgbClr>
+            </a:outerShdw>
+          </a:effectLst>
+        </a:effectStyle>
+      </a:effectStyleLst>
+      <a:bgFillStyleLst>
+        <a:solidFill>
+          <a:schemeClr val="phClr"/>
+        </a:solidFill>
+        <a:solidFill>
+          <a:schemeClr val="phClr">
+            <a:tint val="95000"/>
+            <a:satMod val="170000"/>
+          </a:schemeClr>
+        </a:solidFill>
+        <a:gradFill rotWithShape="1">
+          <a:gsLst>
+            <a:gs pos="0">
+              <a:schemeClr val="phClr">
+                <a:tint val="93000"/>
+                <a:satMod val="150000"/>
+                <a:shade val="98000"/>
+                <a:lumMod val="102000"/>
+              </a:schemeClr>
+            </a:gs>
+            <a:gs pos="50000">
+              <a:schemeClr val="phClr">
+                <a:tint val="98000"/>
+                <a:satMod val="130000"/>
+                <a:shade val="90000"/>
+                <a:lumMod val="103000"/>
+              </a:schemeClr>
+            </a:gs>
+            <a:gs pos="100000">
+              <a:schemeClr val="phClr">
+                <a:shade val="63000"/>
+                <a:satMod val="120000"/>
+              </a:schemeClr>
+            </a:gs>
+          </a:gsLst>
+          <a:lin ang="5400000" scaled="0"/>
+        </a:gradFill>
+      </a:bgFillStyleLst>
+    </a:fmtScheme>
+  </a:themeElements>
+  <a:objectDefaults>
+    <a:lnDef>
+      <a:spPr/>
+      <a:bodyPr/>
+      <a:lstStyle/>
+      <a:style>
+        <a:lnRef idx="2">
+          <a:schemeClr val="accent1"/>
+        </a:lnRef>
+        <a:fillRef idx="0">
+          <a:schemeClr val="accent1"/>
+        </a:fillRef>
+        <a:effectRef idx="1">
+          <a:schemeClr val="accent1"/>
+        </a:effectRef>
+        <a:fontRef idx="minor">
+          <a:schemeClr val="tx1"/>
+        </a:fontRef>
+      </a:style>
+    </a:lnDef>
+  </a:objectDefaults>
+  <a:extraClrSchemeLst/>
+  <a:extLst>
+    <a:ext uri="{05A4C25C-085E-4340-85A3-A5531E510DB2}">
+      <thm15:themeFamily xmlns:thm15="http://schemas.microsoft.com/office/thememl/2012/main" name="Office Theme" id="{2E142A2C-CD16-42D6-873A-C26D2A0506FA}" vid="{1BDDFF52-6CD6-40A5-AB3C-68EB2F1E4D0A}"/>
+    </a:ext>
+  </a:extLst>
+</a:theme>
 </file>